--- a/presentation/presentation.pptx
+++ b/presentation/presentation.pptx
@@ -5,44 +5,53 @@
     <p:sldMasterId id="2147483659" r:id="rId1"/>
   </p:sldMasterIdLst>
   <p:notesMasterIdLst>
-    <p:notesMasterId r:id="rId17"/>
+    <p:notesMasterId r:id="rId22"/>
   </p:notesMasterIdLst>
   <p:sldIdLst>
-    <p:sldId id="256" r:id="rId15"/>
-    <p:sldId id="257" r:id="rId16"/>
-    <p:sldId id="258" r:id="rId14"/>
-    <p:sldId id="259" r:id="rId13"/>
-    <p:sldId id="260" r:id="rId12"/>
-    <p:sldId id="261" r:id="rId11"/>
-    <p:sldId id="262" r:id="rId10"/>
+    <p:sldId id="256" r:id="rId2"/>
+    <p:sldId id="257" r:id="rId3"/>
+    <p:sldId id="258" r:id="rId4"/>
+    <p:sldId id="259" r:id="rId5"/>
+    <p:sldId id="260" r:id="rId6"/>
+    <p:sldId id="261" r:id="rId7"/>
+    <p:sldId id="262" r:id="rId8"/>
     <p:sldId id="263" r:id="rId9"/>
-    <p:sldId id="264" r:id="rId8"/>
-    <p:sldId id="265" r:id="rId7"/>
-    <p:sldId id="266" r:id="rId6"/>
-    <p:sldId id="267" r:id="rId5"/>
-    <p:sldId id="268" r:id="rId4"/>
-    <p:sldId id="269" r:id="rId3"/>
-    <p:sldId id="270" r:id="rId2"/>
-    <p:sldId id="271" r:id="rId30"/>
-    <p:sldId id="272" r:id="rId31"/>
-    <p:sldId id="273" r:id="rId32"/>
+    <p:sldId id="264" r:id="rId10"/>
+    <p:sldId id="265" r:id="rId11"/>
+    <p:sldId id="266" r:id="rId12"/>
+    <p:sldId id="267" r:id="rId13"/>
+    <p:sldId id="268" r:id="rId14"/>
+    <p:sldId id="269" r:id="rId15"/>
+    <p:sldId id="270" r:id="rId16"/>
+    <p:sldId id="271" r:id="rId17"/>
+    <p:sldId id="272" r:id="rId18"/>
+    <p:sldId id="273" r:id="rId19"/>
+    <p:sldId id="274" r:id="rId20"/>
+    <p:sldId id="275" r:id="rId21"/>
   </p:sldIdLst>
   <p:sldSz cx="9144000" cy="5143500" type="screen16x9"/>
   <p:notesSz cx="6858000" cy="9144000"/>
   <p:embeddedFontLst>
     <p:embeddedFont>
+      <p:font typeface="Consolas" panose="020B0609020204030204" pitchFamily="49" charset="0"/>
+      <p:regular r:id="rId23"/>
+      <p:bold r:id="rId24"/>
+      <p:italic r:id="rId25"/>
+      <p:boldItalic r:id="rId26"/>
+    </p:embeddedFont>
+    <p:embeddedFont>
       <p:font typeface="Lato" panose="020F0502020204030203" pitchFamily="34" charset="0"/>
-      <p:regular r:id="rId18"/>
-      <p:bold r:id="rId19"/>
-      <p:italic r:id="rId20"/>
-      <p:boldItalic r:id="rId21"/>
+      <p:regular r:id="rId27"/>
+      <p:bold r:id="rId28"/>
+      <p:italic r:id="rId29"/>
+      <p:boldItalic r:id="rId30"/>
     </p:embeddedFont>
     <p:embeddedFont>
       <p:font typeface="Montserrat" panose="00000500000000000000" pitchFamily="2" charset="0"/>
-      <p:regular r:id="rId22"/>
-      <p:bold r:id="rId23"/>
-      <p:italic r:id="rId24"/>
-      <p:boldItalic r:id="rId25"/>
+      <p:regular r:id="rId31"/>
+      <p:bold r:id="rId32"/>
+      <p:italic r:id="rId33"/>
+      <p:boldItalic r:id="rId34"/>
     </p:embeddedFont>
   </p:embeddedFontLst>
   <p:defaultTextStyle>
@@ -735,7 +744,7 @@
 </file>
 
 <file path=ppt/notesSlides/notesSlide1.xml><?xml version="1.0" encoding="utf-8"?>
-<p:notes xmlns:a="http://schemas.openxmlformats.org/drawingml/2006/main" xmlns:p="http://schemas.openxmlformats.org/presentationml/2006/main" xmlns:r="http://schemas.openxmlformats.org/officeDocument/2006/relationships">
+<p:notes xmlns:a="http://schemas.openxmlformats.org/drawingml/2006/main" xmlns:r="http://schemas.openxmlformats.org/officeDocument/2006/relationships" xmlns:p="http://schemas.openxmlformats.org/presentationml/2006/main">
   <p:cSld>
     <p:spTree>
       <p:nvGrpSpPr>
@@ -755,7 +764,7 @@
         <p:nvSpPr>
           <p:cNvPr id="2" name="Slide Image Placeholder 1"/>
           <p:cNvSpPr>
-            <a:spLocks noGrp="1"/>
+            <a:spLocks noGrp="1" noRot="1" noChangeAspect="1"/>
           </p:cNvSpPr>
           <p:nvPr>
             <p:ph type="sldImg" idx="2"/>
@@ -793,7 +802,7 @@
 </file>
 
 <file path=ppt/notesSlides/notesSlide10.xml><?xml version="1.0" encoding="utf-8"?>
-<p:notes xmlns:a="http://schemas.openxmlformats.org/drawingml/2006/main" xmlns:p="http://schemas.openxmlformats.org/presentationml/2006/main" xmlns:r="http://schemas.openxmlformats.org/officeDocument/2006/relationships">
+<p:notes xmlns:a="http://schemas.openxmlformats.org/drawingml/2006/main" xmlns:r="http://schemas.openxmlformats.org/officeDocument/2006/relationships" xmlns:p="http://schemas.openxmlformats.org/presentationml/2006/main">
   <p:cSld>
     <p:spTree>
       <p:nvGrpSpPr>
@@ -813,7 +822,7 @@
         <p:nvSpPr>
           <p:cNvPr id="2" name="Slide Image Placeholder 1"/>
           <p:cNvSpPr>
-            <a:spLocks noGrp="1"/>
+            <a:spLocks noGrp="1" noRot="1" noChangeAspect="1"/>
           </p:cNvSpPr>
           <p:nvPr>
             <p:ph type="sldImg" idx="2"/>
@@ -837,7 +846,7 @@
           <a:lstStyle/>
           <a:p>
             <a:r>
-              <a:t>Six functions. They live in src/replenishment.py so the notebook and the app share the same code instead of keeping two copies that drift apart.</a:t>
+              <a:t>This is the single most important design decision in the project. The model is a router. If it hallucinated a quantity, a store would ship the wrong shoes.</a:t>
             </a:r>
           </a:p>
         </p:txBody>
@@ -851,7 +860,7 @@
 </file>
 
 <file path=ppt/notesSlides/notesSlide11.xml><?xml version="1.0" encoding="utf-8"?>
-<p:notes xmlns:a="http://schemas.openxmlformats.org/drawingml/2006/main" xmlns:p="http://schemas.openxmlformats.org/presentationml/2006/main" xmlns:r="http://schemas.openxmlformats.org/officeDocument/2006/relationships">
+<p:notes xmlns:a="http://schemas.openxmlformats.org/drawingml/2006/main" xmlns:r="http://schemas.openxmlformats.org/officeDocument/2006/relationships" xmlns:p="http://schemas.openxmlformats.org/presentationml/2006/main">
   <p:cSld>
     <p:spTree>
       <p:nvGrpSpPr>
@@ -871,13 +880,18 @@
         <p:nvSpPr>
           <p:cNvPr id="2" name="Slide Image Placeholder 1"/>
           <p:cNvSpPr>
-            <a:spLocks noGrp="1"/>
+            <a:spLocks noGrp="1" noRot="1" noChangeAspect="1"/>
           </p:cNvSpPr>
           <p:nvPr>
             <p:ph type="sldImg" idx="2"/>
           </p:nvPr>
         </p:nvSpPr>
-        <p:spPr/>
+        <p:spPr>
+          <a:xfrm>
+            <a:off x="381000" y="685800"/>
+            <a:ext cx="6096000" cy="3429000"/>
+          </a:xfrm>
+        </p:spPr>
       </p:sp>
       <p:sp>
         <p:nvSpPr>
@@ -895,7 +909,7 @@
           <a:lstStyle/>
           <a:p>
             <a:r>
-              <a:t>The scope rule is the important part. This is size-gap replenishment, not new assortment. Without it a general request returns thousands of useless lines.</a:t>
+              <a:t>The description is the whole trick. The model matches the user question against these descriptions to pick the right tool.</a:t>
             </a:r>
           </a:p>
         </p:txBody>
@@ -909,7 +923,7 @@
 </file>
 
 <file path=ppt/notesSlides/notesSlide12.xml><?xml version="1.0" encoding="utf-8"?>
-<p:notes xmlns:a="http://schemas.openxmlformats.org/drawingml/2006/main" xmlns:p="http://schemas.openxmlformats.org/presentationml/2006/main" xmlns:r="http://schemas.openxmlformats.org/officeDocument/2006/relationships">
+<p:notes xmlns:a="http://schemas.openxmlformats.org/drawingml/2006/main" xmlns:r="http://schemas.openxmlformats.org/officeDocument/2006/relationships" xmlns:p="http://schemas.openxmlformats.org/presentationml/2006/main">
   <p:cSld>
     <p:spTree>
       <p:nvGrpSpPr>
@@ -929,13 +943,18 @@
         <p:nvSpPr>
           <p:cNvPr id="2" name="Slide Image Placeholder 1"/>
           <p:cNvSpPr>
-            <a:spLocks noGrp="1"/>
+            <a:spLocks noGrp="1" noRot="1" noChangeAspect="1"/>
           </p:cNvSpPr>
           <p:nvPr>
             <p:ph type="sldImg" idx="2"/>
           </p:nvPr>
         </p:nvSpPr>
-        <p:spPr/>
+        <p:spPr>
+          <a:xfrm>
+            <a:off x="381000" y="685800"/>
+            <a:ext cx="6096000" cy="3429000"/>
+          </a:xfrm>
+        </p:spPr>
       </p:sp>
       <p:sp>
         <p:nvSpPr>
@@ -953,7 +972,7 @@
           <a:lstStyle/>
           <a:p>
             <a:r>
-              <a:t>I deliberately kept this out of the database. A stateless design was easier to defend and the deadline did not allow a persistence layer. Querying is free; only generating a document commits.</a:t>
+              <a:t>Six functions. They live in src/replenishment.py so the notebook and the app share the same code instead of keeping two copies that drift apart.</a:t>
             </a:r>
           </a:p>
         </p:txBody>
@@ -967,7 +986,7 @@
 </file>
 
 <file path=ppt/notesSlides/notesSlide13.xml><?xml version="1.0" encoding="utf-8"?>
-<p:notes xmlns:a="http://schemas.openxmlformats.org/drawingml/2006/main" xmlns:p="http://schemas.openxmlformats.org/presentationml/2006/main" xmlns:r="http://schemas.openxmlformats.org/officeDocument/2006/relationships">
+<p:notes xmlns:a="http://schemas.openxmlformats.org/drawingml/2006/main" xmlns:r="http://schemas.openxmlformats.org/officeDocument/2006/relationships" xmlns:p="http://schemas.openxmlformats.org/presentationml/2006/main">
   <p:cSld>
     <p:spTree>
       <p:nvGrpSpPr>
@@ -987,13 +1006,18 @@
         <p:nvSpPr>
           <p:cNvPr id="2" name="Slide Image Placeholder 1"/>
           <p:cNvSpPr>
-            <a:spLocks noGrp="1"/>
+            <a:spLocks noGrp="1" noRot="1" noChangeAspect="1"/>
           </p:cNvSpPr>
           <p:nvPr>
             <p:ph type="sldImg" idx="2"/>
           </p:nvPr>
         </p:nvSpPr>
-        <p:spPr/>
+        <p:spPr>
+          <a:xfrm>
+            <a:off x="381000" y="685800"/>
+            <a:ext cx="6096000" cy="3429000"/>
+          </a:xfrm>
+        </p:spPr>
       </p:sp>
       <p:sp>
         <p:nvSpPr>
@@ -1011,7 +1035,7 @@
           <a:lstStyle/>
           <a:p>
             <a:r>
-              <a:t>Small detail that matters: the person picking does not need to know HQ has 107 pairs. They need to know they are taking one. Showing both invites mistakes.</a:t>
+              <a:t>The scope rule is the important part. This is size-gap replenishment, not new assortment. Without it a general request returns thousands of useless lines.</a:t>
             </a:r>
           </a:p>
         </p:txBody>
@@ -1025,7 +1049,7 @@
 </file>
 
 <file path=ppt/notesSlides/notesSlide14.xml><?xml version="1.0" encoding="utf-8"?>
-<p:notes xmlns:a="http://schemas.openxmlformats.org/drawingml/2006/main" xmlns:p="http://schemas.openxmlformats.org/presentationml/2006/main" xmlns:r="http://schemas.openxmlformats.org/officeDocument/2006/relationships">
+<p:notes xmlns:a="http://schemas.openxmlformats.org/drawingml/2006/main" xmlns:r="http://schemas.openxmlformats.org/officeDocument/2006/relationships" xmlns:p="http://schemas.openxmlformats.org/presentationml/2006/main">
   <p:cSld>
     <p:spTree>
       <p:nvGrpSpPr>
@@ -1045,13 +1069,18 @@
         <p:nvSpPr>
           <p:cNvPr id="2" name="Slide Image Placeholder 1"/>
           <p:cNvSpPr>
-            <a:spLocks noGrp="1"/>
+            <a:spLocks noGrp="1" noRot="1" noChangeAspect="1"/>
           </p:cNvSpPr>
           <p:nvPr>
             <p:ph type="sldImg" idx="2"/>
           </p:nvPr>
         </p:nvSpPr>
-        <p:spPr/>
+        <p:spPr>
+          <a:xfrm>
+            <a:off x="381000" y="685800"/>
+            <a:ext cx="6096000" cy="3429000"/>
+          </a:xfrm>
+        </p:spPr>
       </p:sp>
       <p:sp>
         <p:nvSpPr>
@@ -1069,33 +1098,7 @@
           <a:lstStyle/>
           <a:p>
             <a:r>
-              <a:t>DEMO SCRIPT:</a:t>
-            </a:r>
-          </a:p>
-          <a:p>
-            <a:r>
-              <a:t>1. "Where is reference DH2920?" — shows the text answer</a:t>
-            </a:r>
-          </a:p>
-          <a:p>
-            <a:r>
-              <a:t>2. "Which Nike sizes are missing in Loja Colombo?" — shows the table</a:t>
-            </a:r>
-          </a:p>
-          <a:p>
-            <a:r>
-              <a:t>3. Set units per size to 1, generate the document, open it</a:t>
-            </a:r>
-          </a:p>
-          <a:p>
-            <a:r>
-              <a:t>4. Ask the same question again — the committed sizes are gone</a:t>
-            </a:r>
-          </a:p>
-          <a:p/>
-          <a:p>
-            <a:r>
-              <a:t>Reset session allocations before starting.</a:t>
+              <a:t>I deliberately kept this out of the database. A stateless design was easier to defend and the deadline did not allow a persistence layer. Querying is free; only generating a document commits.</a:t>
             </a:r>
           </a:p>
         </p:txBody>
@@ -1109,7 +1112,7 @@
 </file>
 
 <file path=ppt/notesSlides/notesSlide15.xml><?xml version="1.0" encoding="utf-8"?>
-<p:notes xmlns:a="http://schemas.openxmlformats.org/drawingml/2006/main" xmlns:p="http://schemas.openxmlformats.org/presentationml/2006/main" xmlns:r="http://schemas.openxmlformats.org/officeDocument/2006/relationships">
+<p:notes xmlns:a="http://schemas.openxmlformats.org/drawingml/2006/main" xmlns:r="http://schemas.openxmlformats.org/officeDocument/2006/relationships" xmlns:p="http://schemas.openxmlformats.org/presentationml/2006/main">
   <p:cSld>
     <p:spTree>
       <p:nvGrpSpPr>
@@ -1129,13 +1132,18 @@
         <p:nvSpPr>
           <p:cNvPr id="2" name="Slide Image Placeholder 1"/>
           <p:cNvSpPr>
-            <a:spLocks noGrp="1"/>
+            <a:spLocks noGrp="1" noRot="1" noChangeAspect="1"/>
           </p:cNvSpPr>
           <p:nvPr>
             <p:ph type="sldImg" idx="2"/>
           </p:nvPr>
         </p:nvSpPr>
-        <p:spPr/>
+        <p:spPr>
+          <a:xfrm>
+            <a:off x="381000" y="685800"/>
+            <a:ext cx="6096000" cy="3429000"/>
+          </a:xfrm>
+        </p:spPr>
       </p:sp>
       <p:sp>
         <p:nvSpPr>
@@ -1153,7 +1161,7 @@
           <a:lstStyle/>
           <a:p>
             <a:r>
-              <a:t>If you remember one slide, this is it. Every one of these was a decision with an alternative I rejected for a reason.</a:t>
+              <a:t>Small detail that matters: the person picking does not need to know HQ has 107 pairs. They need to know they are taking one. Showing both invites mistakes.</a:t>
             </a:r>
           </a:p>
         </p:txBody>
@@ -1167,7 +1175,7 @@
 </file>
 
 <file path=ppt/notesSlides/notesSlide16.xml><?xml version="1.0" encoding="utf-8"?>
-<p:notes xmlns:a="http://schemas.openxmlformats.org/drawingml/2006/main" xmlns:p="http://schemas.openxmlformats.org/presentationml/2006/main" xmlns:r="http://schemas.openxmlformats.org/officeDocument/2006/relationships">
+<p:notes xmlns:a="http://schemas.openxmlformats.org/drawingml/2006/main" xmlns:r="http://schemas.openxmlformats.org/officeDocument/2006/relationships" xmlns:p="http://schemas.openxmlformats.org/presentationml/2006/main">
   <p:cSld>
     <p:spTree>
       <p:nvGrpSpPr>
@@ -1187,7 +1195,7 @@
         <p:nvSpPr>
           <p:cNvPr id="2" name="Slide Image Placeholder 1"/>
           <p:cNvSpPr>
-            <a:spLocks noGrp="1"/>
+            <a:spLocks noGrp="1" noRot="1" noChangeAspect="1"/>
           </p:cNvSpPr>
           <p:nvPr>
             <p:ph type="sldImg" idx="2"/>
@@ -1211,7 +1219,35 @@
           <a:lstStyle/>
           <a:p>
             <a:r>
-              <a:t>I would rather tell you these than have you find them. Each one was a scope decision, not an oversight.</a:t>
+              <a:t>DEMO SCRIPT:</a:t>
+            </a:r>
+          </a:p>
+          <a:p>
+            <a:r>
+              <a:t>1. "Where is reference DH2920?" — shows the text answer</a:t>
+            </a:r>
+          </a:p>
+          <a:p>
+            <a:r>
+              <a:t>2. "Which Nike sizes are missing in Loja Colombo?" — shows the table</a:t>
+            </a:r>
+          </a:p>
+          <a:p>
+            <a:r>
+              <a:t>3. Set units per size to 1, generate the document, open it</a:t>
+            </a:r>
+          </a:p>
+          <a:p>
+            <a:r>
+              <a:t>4. Ask the same question again — the committed sizes are gone</a:t>
+            </a:r>
+          </a:p>
+          <a:p>
+            <a:endParaRPr/>
+          </a:p>
+          <a:p>
+            <a:r>
+              <a:t>Reset session allocations before starting.</a:t>
             </a:r>
           </a:p>
         </p:txBody>
@@ -1225,7 +1261,7 @@
 </file>
 
 <file path=ppt/notesSlides/notesSlide17.xml><?xml version="1.0" encoding="utf-8"?>
-<p:notes xmlns:a="http://schemas.openxmlformats.org/drawingml/2006/main" xmlns:p="http://schemas.openxmlformats.org/presentationml/2006/main" xmlns:r="http://schemas.openxmlformats.org/officeDocument/2006/relationships">
+<p:notes xmlns:a="http://schemas.openxmlformats.org/drawingml/2006/main" xmlns:r="http://schemas.openxmlformats.org/officeDocument/2006/relationships" xmlns:p="http://schemas.openxmlformats.org/presentationml/2006/main">
   <p:cSld>
     <p:spTree>
       <p:nvGrpSpPr>
@@ -1245,13 +1281,18 @@
         <p:nvSpPr>
           <p:cNvPr id="2" name="Slide Image Placeholder 1"/>
           <p:cNvSpPr>
-            <a:spLocks noGrp="1"/>
+            <a:spLocks noGrp="1" noRot="1" noChangeAspect="1"/>
           </p:cNvSpPr>
           <p:nvPr>
             <p:ph type="sldImg" idx="2"/>
           </p:nvPr>
         </p:nvSpPr>
-        <p:spPr/>
+        <p:spPr>
+          <a:xfrm>
+            <a:off x="381000" y="685800"/>
+            <a:ext cx="6096000" cy="3429000"/>
+          </a:xfrm>
+        </p:spPr>
       </p:sp>
       <p:sp>
         <p:nvSpPr>
@@ -1269,7 +1310,7 @@
           <a:lstStyle/>
           <a:p>
             <a:r>
-              <a:t>The first one is the real product. Everything here is a size-gap tool; with sales history it becomes an allocation tool. That is where the value is.</a:t>
+              <a:t>If you remember one slide, this is it. Every one of these was a decision with an alternative I rejected for a reason.</a:t>
             </a:r>
           </a:p>
         </p:txBody>
@@ -1283,7 +1324,7 @@
 </file>
 
 <file path=ppt/notesSlides/notesSlide18.xml><?xml version="1.0" encoding="utf-8"?>
-<p:notes xmlns:a="http://schemas.openxmlformats.org/drawingml/2006/main" xmlns:p="http://schemas.openxmlformats.org/presentationml/2006/main" xmlns:r="http://schemas.openxmlformats.org/officeDocument/2006/relationships">
+<p:notes xmlns:a="http://schemas.openxmlformats.org/drawingml/2006/main" xmlns:r="http://schemas.openxmlformats.org/officeDocument/2006/relationships" xmlns:p="http://schemas.openxmlformats.org/presentationml/2006/main">
   <p:cSld>
     <p:spTree>
       <p:nvGrpSpPr>
@@ -1303,7 +1344,7 @@
         <p:nvSpPr>
           <p:cNvPr id="2" name="Slide Image Placeholder 1"/>
           <p:cNvSpPr>
-            <a:spLocks noGrp="1"/>
+            <a:spLocks noGrp="1" noRot="1" noChangeAspect="1"/>
           </p:cNvSpPr>
           <p:nvPr>
             <p:ph type="sldImg" idx="2"/>
@@ -1327,7 +1368,7 @@
           <a:lstStyle/>
           <a:p>
             <a:r>
-              <a:t>Questions.</a:t>
+              <a:t>I would rather tell you these than have you find them. Each one was a scope decision, not an oversight.</a:t>
             </a:r>
           </a:p>
         </p:txBody>
@@ -1340,8 +1381,8 @@
 </p:notes>
 </file>
 
-<file path=ppt/notesSlides/notesSlide2.xml><?xml version="1.0" encoding="utf-8"?>
-<p:notes xmlns:a="http://schemas.openxmlformats.org/drawingml/2006/main" xmlns:p="http://schemas.openxmlformats.org/presentationml/2006/main" xmlns:r="http://schemas.openxmlformats.org/officeDocument/2006/relationships">
+<file path=ppt/notesSlides/notesSlide19.xml><?xml version="1.0" encoding="utf-8"?>
+<p:notes xmlns:a="http://schemas.openxmlformats.org/drawingml/2006/main" xmlns:r="http://schemas.openxmlformats.org/officeDocument/2006/relationships" xmlns:p="http://schemas.openxmlformats.org/presentationml/2006/main">
   <p:cSld>
     <p:spTree>
       <p:nvGrpSpPr>
@@ -1361,13 +1402,18 @@
         <p:nvSpPr>
           <p:cNvPr id="2" name="Slide Image Placeholder 1"/>
           <p:cNvSpPr>
-            <a:spLocks noGrp="1"/>
+            <a:spLocks noGrp="1" noRot="1" noChangeAspect="1"/>
           </p:cNvSpPr>
           <p:nvPr>
             <p:ph type="sldImg" idx="2"/>
           </p:nvPr>
         </p:nvSpPr>
-        <p:spPr/>
+        <p:spPr>
+          <a:xfrm>
+            <a:off x="381000" y="685800"/>
+            <a:ext cx="6096000" cy="3429000"/>
+          </a:xfrm>
+        </p:spPr>
       </p:sp>
       <p:sp>
         <p:nvSpPr>
@@ -1385,7 +1431,7 @@
           <a:lstStyle/>
           <a:p>
             <a:r>
-              <a:t>This is a problem I lived. In sports retail the size gap is the most common lost sale: the customer wants the shoe, you have it, just not in their size, and the warehouse has it sitting there.</a:t>
+              <a:t>The second one is the real product. Everything here finds size gaps; with sales data it starts deciding quantities, and that is where the value is. The last two come from the same idea: stock should move sideways, not only from HQ down.</a:t>
             </a:r>
           </a:p>
         </p:txBody>
@@ -1398,8 +1444,8 @@
 </p:notes>
 </file>
 
-<file path=ppt/notesSlides/notesSlide3.xml><?xml version="1.0" encoding="utf-8"?>
-<p:notes xmlns:a="http://schemas.openxmlformats.org/drawingml/2006/main" xmlns:p="http://schemas.openxmlformats.org/presentationml/2006/main" xmlns:r="http://schemas.openxmlformats.org/officeDocument/2006/relationships">
+<file path=ppt/notesSlides/notesSlide2.xml><?xml version="1.0" encoding="utf-8"?>
+<p:notes xmlns:a="http://schemas.openxmlformats.org/drawingml/2006/main" xmlns:r="http://schemas.openxmlformats.org/officeDocument/2006/relationships" xmlns:p="http://schemas.openxmlformats.org/presentationml/2006/main">
   <p:cSld>
     <p:spTree>
       <p:nvGrpSpPr>
@@ -1419,13 +1465,18 @@
         <p:nvSpPr>
           <p:cNvPr id="2" name="Slide Image Placeholder 1"/>
           <p:cNvSpPr>
-            <a:spLocks noGrp="1"/>
+            <a:spLocks noGrp="1" noRot="1" noChangeAspect="1"/>
           </p:cNvSpPr>
           <p:nvPr>
             <p:ph type="sldImg" idx="2"/>
           </p:nvPr>
         </p:nvSpPr>
-        <p:spPr/>
+        <p:spPr>
+          <a:xfrm>
+            <a:off x="381000" y="685800"/>
+            <a:ext cx="6096000" cy="3429000"/>
+          </a:xfrm>
+        </p:spPr>
       </p:sp>
       <p:sp>
         <p:nvSpPr>
@@ -1443,7 +1494,7 @@
           <a:lstStyle/>
           <a:p>
             <a:r>
-              <a:t>Three goals. Everything in the project serves one of these.</a:t>
+              <a:t>I chose this because I lived it. Every one of these bullets is something I did by hand, week after week. The routine was the worst part: the same export, the same tidying, the same comparison, over and over.</a:t>
             </a:r>
           </a:p>
         </p:txBody>
@@ -1456,8 +1507,8 @@
 </p:notes>
 </file>
 
-<file path=ppt/notesSlides/notesSlide4.xml><?xml version="1.0" encoding="utf-8"?>
-<p:notes xmlns:a="http://schemas.openxmlformats.org/drawingml/2006/main" xmlns:p="http://schemas.openxmlformats.org/presentationml/2006/main" xmlns:r="http://schemas.openxmlformats.org/officeDocument/2006/relationships">
+<file path=ppt/notesSlides/notesSlide20.xml><?xml version="1.0" encoding="utf-8"?>
+<p:notes xmlns:a="http://schemas.openxmlformats.org/drawingml/2006/main" xmlns:r="http://schemas.openxmlformats.org/officeDocument/2006/relationships" xmlns:p="http://schemas.openxmlformats.org/presentationml/2006/main">
   <p:cSld>
     <p:spTree>
       <p:nvGrpSpPr>
@@ -1477,7 +1528,7 @@
         <p:nvSpPr>
           <p:cNvPr id="2" name="Slide Image Placeholder 1"/>
           <p:cNvSpPr>
-            <a:spLocks noGrp="1"/>
+            <a:spLocks noGrp="1" noRot="1" noChangeAspect="1"/>
           </p:cNvSpPr>
           <p:nvPr>
             <p:ph type="sldImg" idx="2"/>
@@ -1501,7 +1552,7 @@
           <a:lstStyle/>
           <a:p>
             <a:r>
-              <a:t>Real data, so it is anonymised and stays out of the repo. The numbers you see are after cleaning.</a:t>
+              <a:t>Questions.</a:t>
             </a:r>
           </a:p>
         </p:txBody>
@@ -1514,8 +1565,8 @@
 </p:notes>
 </file>
 
-<file path=ppt/notesSlides/notesSlide5.xml><?xml version="1.0" encoding="utf-8"?>
-<p:notes xmlns:a="http://schemas.openxmlformats.org/drawingml/2006/main" xmlns:p="http://schemas.openxmlformats.org/presentationml/2006/main" xmlns:r="http://schemas.openxmlformats.org/officeDocument/2006/relationships">
+<file path=ppt/notesSlides/notesSlide3.xml><?xml version="1.0" encoding="utf-8"?>
+<p:notes xmlns:a="http://schemas.openxmlformats.org/drawingml/2006/main" xmlns:r="http://schemas.openxmlformats.org/officeDocument/2006/relationships" xmlns:p="http://schemas.openxmlformats.org/presentationml/2006/main">
   <p:cSld>
     <p:spTree>
       <p:nvGrpSpPr>
@@ -1535,13 +1586,18 @@
         <p:nvSpPr>
           <p:cNvPr id="2" name="Slide Image Placeholder 1"/>
           <p:cNvSpPr>
-            <a:spLocks noGrp="1"/>
+            <a:spLocks noGrp="1" noRot="1" noChangeAspect="1"/>
           </p:cNvSpPr>
           <p:nvPr>
             <p:ph type="sldImg" idx="2"/>
           </p:nvPr>
         </p:nvSpPr>
-        <p:spPr/>
+        <p:spPr>
+          <a:xfrm>
+            <a:off x="381000" y="685800"/>
+            <a:ext cx="6096000" cy="3429000"/>
+          </a:xfrm>
+        </p:spPr>
       </p:sp>
       <p:sp>
         <p:nvSpPr>
@@ -1559,7 +1615,7 @@
           <a:lstStyle/>
           <a:p>
             <a:r>
-              <a:t>The negative quantities were the interesting one — my first instinct was to drop those rows, but they represent transfers in progress, so treating them as zero is the conservative choice.</a:t>
+              <a:t>Three goals. Everything in the project serves one of these.</a:t>
             </a:r>
           </a:p>
         </p:txBody>
@@ -1572,8 +1628,8 @@
 </p:notes>
 </file>
 
-<file path=ppt/notesSlides/notesSlide6.xml><?xml version="1.0" encoding="utf-8"?>
-<p:notes xmlns:a="http://schemas.openxmlformats.org/drawingml/2006/main" xmlns:p="http://schemas.openxmlformats.org/presentationml/2006/main" xmlns:r="http://schemas.openxmlformats.org/officeDocument/2006/relationships">
+<file path=ppt/notesSlides/notesSlide4.xml><?xml version="1.0" encoding="utf-8"?>
+<p:notes xmlns:a="http://schemas.openxmlformats.org/drawingml/2006/main" xmlns:r="http://schemas.openxmlformats.org/officeDocument/2006/relationships" xmlns:p="http://schemas.openxmlformats.org/presentationml/2006/main">
   <p:cSld>
     <p:spTree>
       <p:nvGrpSpPr>
@@ -1593,7 +1649,7 @@
         <p:nvSpPr>
           <p:cNvPr id="2" name="Slide Image Placeholder 1"/>
           <p:cNvSpPr>
-            <a:spLocks noGrp="1"/>
+            <a:spLocks noGrp="1" noRot="1" noChangeAspect="1"/>
           </p:cNvSpPr>
           <p:nvPr>
             <p:ph type="sldImg" idx="2"/>
@@ -1617,7 +1673,7 @@
           <a:lstStyle/>
           <a:p>
             <a:r>
-              <a:t>This was the hardest cleaning problem. A 6 in kids US sizing and a 6 in EU sizing are completely different shoes. The reason it is safe is that the replenishment logic never compares sizes across references.</a:t>
+              <a:t>Real data, so it is anonymised and stays out of the repo. The raw file is much bigger than what I actually use — most of it is other product families and stores outside the scope I chose.</a:t>
             </a:r>
           </a:p>
         </p:txBody>
@@ -1630,8 +1686,8 @@
 </p:notes>
 </file>
 
-<file path=ppt/notesSlides/notesSlide7.xml><?xml version="1.0" encoding="utf-8"?>
-<p:notes xmlns:a="http://schemas.openxmlformats.org/drawingml/2006/main" xmlns:p="http://schemas.openxmlformats.org/presentationml/2006/main" xmlns:r="http://schemas.openxmlformats.org/officeDocument/2006/relationships">
+<file path=ppt/notesSlides/notesSlide5.xml><?xml version="1.0" encoding="utf-8"?>
+<p:notes xmlns:a="http://schemas.openxmlformats.org/drawingml/2006/main" xmlns:r="http://schemas.openxmlformats.org/officeDocument/2006/relationships" xmlns:p="http://schemas.openxmlformats.org/presentationml/2006/main">
   <p:cSld>
     <p:spTree>
       <p:nvGrpSpPr>
@@ -1651,13 +1707,18 @@
         <p:nvSpPr>
           <p:cNvPr id="2" name="Slide Image Placeholder 1"/>
           <p:cNvSpPr>
-            <a:spLocks noGrp="1"/>
+            <a:spLocks noGrp="1" noRot="1" noChangeAspect="1"/>
           </p:cNvSpPr>
           <p:nvPr>
             <p:ph type="sldImg" idx="2"/>
           </p:nvPr>
         </p:nvSpPr>
-        <p:spPr/>
+        <p:spPr>
+          <a:xfrm>
+            <a:off x="381000" y="685800"/>
+            <a:ext cx="6096000" cy="3429000"/>
+          </a:xfrm>
+        </p:spPr>
       </p:sp>
       <p:sp>
         <p:nvSpPr>
@@ -1675,7 +1736,7 @@
           <a:lstStyle/>
           <a:p>
             <a:r>
-              <a:t>Now the part that matters — the architecture.</a:t>
+              <a:t>The negative quantities were the interesting one. My first instinct was to drop those rows, but they represent transfers in progress, so treating them as zero is the conservative choice: it never overstates what is available.</a:t>
             </a:r>
           </a:p>
         </p:txBody>
@@ -1688,8 +1749,8 @@
 </p:notes>
 </file>
 
-<file path=ppt/notesSlides/notesSlide8.xml><?xml version="1.0" encoding="utf-8"?>
-<p:notes xmlns:a="http://schemas.openxmlformats.org/drawingml/2006/main" xmlns:p="http://schemas.openxmlformats.org/presentationml/2006/main" xmlns:r="http://schemas.openxmlformats.org/officeDocument/2006/relationships">
+<file path=ppt/notesSlides/notesSlide6.xml><?xml version="1.0" encoding="utf-8"?>
+<p:notes xmlns:a="http://schemas.openxmlformats.org/drawingml/2006/main" xmlns:r="http://schemas.openxmlformats.org/officeDocument/2006/relationships" xmlns:p="http://schemas.openxmlformats.org/presentationml/2006/main">
   <p:cSld>
     <p:spTree>
       <p:nvGrpSpPr>
@@ -1709,13 +1770,18 @@
         <p:nvSpPr>
           <p:cNvPr id="2" name="Slide Image Placeholder 1"/>
           <p:cNvSpPr>
-            <a:spLocks noGrp="1"/>
+            <a:spLocks noGrp="1" noRot="1" noChangeAspect="1"/>
           </p:cNvSpPr>
           <p:nvPr>
             <p:ph type="sldImg" idx="2"/>
           </p:nvPr>
         </p:nvSpPr>
-        <p:spPr/>
+        <p:spPr>
+          <a:xfrm>
+            <a:off x="381000" y="685800"/>
+            <a:ext cx="6096000" cy="3429000"/>
+          </a:xfrm>
+        </p:spPr>
       </p:sp>
       <p:sp>
         <p:nvSpPr>
@@ -1733,7 +1799,7 @@
           <a:lstStyle/>
           <a:p>
             <a:r>
-              <a:t>This is the single most important design decision in the project. The model is a router. If it hallucinated a quantity, a store would ship the wrong shoes.</a:t>
+              <a:t>A scope decision, not a data problem. Six stores is enough to prove the logic works, and the code has nothing store-specific in it, so adding the rest is a change to one list.</a:t>
             </a:r>
           </a:p>
         </p:txBody>
@@ -1746,8 +1812,8 @@
 </p:notes>
 </file>
 
-<file path=ppt/notesSlides/notesSlide9.xml><?xml version="1.0" encoding="utf-8"?>
-<p:notes xmlns:a="http://schemas.openxmlformats.org/drawingml/2006/main" xmlns:p="http://schemas.openxmlformats.org/presentationml/2006/main" xmlns:r="http://schemas.openxmlformats.org/officeDocument/2006/relationships">
+<file path=ppt/notesSlides/notesSlide7.xml><?xml version="1.0" encoding="utf-8"?>
+<p:notes xmlns:a="http://schemas.openxmlformats.org/drawingml/2006/main" xmlns:r="http://schemas.openxmlformats.org/officeDocument/2006/relationships" xmlns:p="http://schemas.openxmlformats.org/presentationml/2006/main">
   <p:cSld>
     <p:spTree>
       <p:nvGrpSpPr>
@@ -1767,7 +1833,7 @@
         <p:nvSpPr>
           <p:cNvPr id="2" name="Slide Image Placeholder 1"/>
           <p:cNvSpPr>
-            <a:spLocks noGrp="1"/>
+            <a:spLocks noGrp="1" noRot="1" noChangeAspect="1"/>
           </p:cNvSpPr>
           <p:nvPr>
             <p:ph type="sldImg" idx="2"/>
@@ -1791,7 +1857,123 @@
           <a:lstStyle/>
           <a:p>
             <a:r>
-              <a:t>The description is the whole trick. The model matches the user question against these descriptions to pick the right tool.</a:t>
+              <a:t>This chart is the one that shaped the logic. Look at how much of it is zero. Each store has its own assortment, so a general "send this store everything HQ has" would be useless. The rule I built follows directly from what this shows.</a:t>
+            </a:r>
+          </a:p>
+        </p:txBody>
+      </p:sp>
+    </p:spTree>
+  </p:cSld>
+  <p:clrMapOvr>
+    <a:masterClrMapping/>
+  </p:clrMapOvr>
+</p:notes>
+</file>
+
+<file path=ppt/notesSlides/notesSlide8.xml><?xml version="1.0" encoding="utf-8"?>
+<p:notes xmlns:a="http://schemas.openxmlformats.org/drawingml/2006/main" xmlns:r="http://schemas.openxmlformats.org/officeDocument/2006/relationships" xmlns:p="http://schemas.openxmlformats.org/presentationml/2006/main">
+  <p:cSld>
+    <p:spTree>
+      <p:nvGrpSpPr>
+        <p:cNvPr id="1" name=""/>
+        <p:cNvGrpSpPr/>
+        <p:nvPr/>
+      </p:nvGrpSpPr>
+      <p:grpSpPr>
+        <a:xfrm>
+          <a:off x="0" y="0"/>
+          <a:ext cx="0" cy="0"/>
+          <a:chOff x="0" y="0"/>
+          <a:chExt cx="0" cy="0"/>
+        </a:xfrm>
+      </p:grpSpPr>
+      <p:sp>
+        <p:nvSpPr>
+          <p:cNvPr id="2" name="Slide Image Placeholder 1"/>
+          <p:cNvSpPr>
+            <a:spLocks noGrp="1" noRot="1" noChangeAspect="1"/>
+          </p:cNvSpPr>
+          <p:nvPr>
+            <p:ph type="sldImg" idx="2"/>
+          </p:nvPr>
+        </p:nvSpPr>
+        <p:spPr/>
+      </p:sp>
+      <p:sp>
+        <p:nvSpPr>
+          <p:cNvPr id="3" name="Notes Placeholder 2"/>
+          <p:cNvSpPr>
+            <a:spLocks noGrp="1"/>
+          </p:cNvSpPr>
+          <p:nvPr>
+            <p:ph type="body" idx="1"/>
+          </p:nvPr>
+        </p:nvSpPr>
+        <p:spPr/>
+        <p:txBody>
+          <a:bodyPr/>
+          <a:lstStyle/>
+          <a:p>
+            <a:r>
+              <a:t>This was the hardest cleaning problem. A 6 in kids US sizing and a 6 in EU sizing are completely different shoes. The reason it is safe is that the replenishment logic never compares sizes across references.</a:t>
+            </a:r>
+          </a:p>
+        </p:txBody>
+      </p:sp>
+    </p:spTree>
+  </p:cSld>
+  <p:clrMapOvr>
+    <a:masterClrMapping/>
+  </p:clrMapOvr>
+</p:notes>
+</file>
+
+<file path=ppt/notesSlides/notesSlide9.xml><?xml version="1.0" encoding="utf-8"?>
+<p:notes xmlns:a="http://schemas.openxmlformats.org/drawingml/2006/main" xmlns:r="http://schemas.openxmlformats.org/officeDocument/2006/relationships" xmlns:p="http://schemas.openxmlformats.org/presentationml/2006/main">
+  <p:cSld>
+    <p:spTree>
+      <p:nvGrpSpPr>
+        <p:cNvPr id="1" name=""/>
+        <p:cNvGrpSpPr/>
+        <p:nvPr/>
+      </p:nvGrpSpPr>
+      <p:grpSpPr>
+        <a:xfrm>
+          <a:off x="0" y="0"/>
+          <a:ext cx="0" cy="0"/>
+          <a:chOff x="0" y="0"/>
+          <a:chExt cx="0" cy="0"/>
+        </a:xfrm>
+      </p:grpSpPr>
+      <p:sp>
+        <p:nvSpPr>
+          <p:cNvPr id="2" name="Slide Image Placeholder 1"/>
+          <p:cNvSpPr>
+            <a:spLocks noGrp="1" noRot="1" noChangeAspect="1"/>
+          </p:cNvSpPr>
+          <p:nvPr>
+            <p:ph type="sldImg" idx="2"/>
+          </p:nvPr>
+        </p:nvSpPr>
+        <p:spPr/>
+      </p:sp>
+      <p:sp>
+        <p:nvSpPr>
+          <p:cNvPr id="3" name="Notes Placeholder 2"/>
+          <p:cNvSpPr>
+            <a:spLocks noGrp="1"/>
+          </p:cNvSpPr>
+          <p:nvPr>
+            <p:ph type="body" idx="1"/>
+          </p:nvPr>
+        </p:nvSpPr>
+        <p:spPr/>
+        <p:txBody>
+          <a:bodyPr/>
+          <a:lstStyle/>
+          <a:p>
+            <a:r>
+              <a:t>Now the part that matters — the architecture.</a:t>
             </a:r>
           </a:p>
         </p:txBody>
@@ -2531,7 +2713,7 @@
           <a:p>
             <a:fld id="{5BCAD085-E8A6-8845-BD4E-CB4CCA059FC4}" type="datetimeFigureOut">
               <a:rPr lang="en-US" smtClean="0"/>
-              <a:t>7/2/2026</a:t>
+              <a:t>9/10/2026</a:t>
             </a:fld>
             <a:endParaRPr lang="en-US"/>
           </a:p>
@@ -9252,7 +9434,7 @@
 </file>
 
 <file path=ppt/slides/slide1.xml><?xml version="1.0" encoding="utf-8"?>
-<p:sld xmlns:a="http://schemas.openxmlformats.org/drawingml/2006/main" xmlns:p="http://schemas.openxmlformats.org/presentationml/2006/main" xmlns:r="http://schemas.openxmlformats.org/officeDocument/2006/relationships">
+<p:sld xmlns:a="http://schemas.openxmlformats.org/drawingml/2006/main" xmlns:r="http://schemas.openxmlformats.org/officeDocument/2006/relationships" xmlns:p="http://schemas.openxmlformats.org/presentationml/2006/main">
   <p:cSld>
     <p:spTree>
       <p:nvGrpSpPr>
@@ -9260,7 +9442,14 @@
         <p:cNvGrpSpPr/>
         <p:nvPr/>
       </p:nvGrpSpPr>
-      <p:grpSpPr/>
+      <p:grpSpPr>
+        <a:xfrm>
+          <a:off x="0" y="0"/>
+          <a:ext cx="0" cy="0"/>
+          <a:chOff x="0" y="0"/>
+          <a:chExt cx="0" cy="0"/>
+        </a:xfrm>
+      </p:grpSpPr>
       <p:sp>
         <p:nvSpPr>
           <p:cNvPr id="2" name="Title 1"/>
@@ -9324,7 +9513,7 @@
 </file>
 
 <file path=ppt/slides/slide10.xml><?xml version="1.0" encoding="utf-8"?>
-<p:sld xmlns:a="http://schemas.openxmlformats.org/drawingml/2006/main" xmlns:p="http://schemas.openxmlformats.org/presentationml/2006/main" xmlns:r="http://schemas.openxmlformats.org/officeDocument/2006/relationships">
+<p:sld xmlns:a="http://schemas.openxmlformats.org/drawingml/2006/main" xmlns:r="http://schemas.openxmlformats.org/officeDocument/2006/relationships" xmlns:p="http://schemas.openxmlformats.org/presentationml/2006/main">
   <p:cSld>
     <p:spTree>
       <p:nvGrpSpPr>
@@ -9332,7 +9521,14 @@
         <p:cNvGrpSpPr/>
         <p:nvPr/>
       </p:nvGrpSpPr>
-      <p:grpSpPr/>
+      <p:grpSpPr>
+        <a:xfrm>
+          <a:off x="0" y="0"/>
+          <a:ext cx="0" cy="0"/>
+          <a:chOff x="0" y="0"/>
+          <a:chExt cx="0" cy="0"/>
+        </a:xfrm>
+      </p:grpSpPr>
       <p:sp>
         <p:nvSpPr>
           <p:cNvPr id="2" name="Title 1"/>
@@ -9355,7 +9551,7 @@
                 </a:solidFill>
                 <a:latin typeface="Montserrat"/>
               </a:rPr>
-              <a:t>The Query Functions</a:t>
+              <a:t>Architecture</a:t>
             </a:r>
           </a:p>
         </p:txBody>
@@ -9368,8 +9564,8 @@
         </p:nvSpPr>
         <p:spPr>
           <a:xfrm>
-            <a:off x="411480" y="1143000"/>
-            <a:ext cx="8321040" cy="3634740"/>
+            <a:off x="411480" y="1005840"/>
+            <a:ext cx="8321040" cy="3771900"/>
           </a:xfrm>
           <a:prstGeom prst="rect">
             <a:avLst/>
@@ -9377,27 +9573,745 @@
           <a:noFill/>
         </p:spPr>
         <p:txBody>
-          <a:bodyPr wrap="square" lIns="0" rIns="0" tIns="0">
+          <a:bodyPr wrap="square" lIns="0" tIns="0" rIns="0">
             <a:spAutoFit/>
           </a:bodyPr>
           <a:lstStyle/>
           <a:p>
             <a:pPr>
               <a:spcAft>
+                <a:spcPts val="800"/>
+              </a:spcAft>
+            </a:pPr>
+            <a:r>
+              <a:rPr sz="1400">
+                <a:solidFill>
+                  <a:srgbClr val="FFFFFF"/>
+                </a:solidFill>
+                <a:latin typeface="Montserrat"/>
+              </a:rPr>
+              <a:t>The language model reads the question and decides which function to call. It never produces a stock figure itself.</a:t>
+            </a:r>
+          </a:p>
+        </p:txBody>
+      </p:sp>
+      <p:sp>
+        <p:nvSpPr>
+          <p:cNvPr id="4" name="Rounded Rectangle 3"/>
+          <p:cNvSpPr/>
+          <p:nvPr/>
+        </p:nvSpPr>
+        <p:spPr>
+          <a:xfrm>
+            <a:off x="411480" y="1737360"/>
+            <a:ext cx="8321040" cy="1458468"/>
+          </a:xfrm>
+          <a:prstGeom prst="roundRect">
+            <a:avLst>
+              <a:gd name="adj" fmla="val 4000"/>
+            </a:avLst>
+          </a:prstGeom>
+          <a:solidFill>
+            <a:srgbClr val="121720"/>
+          </a:solidFill>
+          <a:ln>
+            <a:noFill/>
+          </a:ln>
+          <a:effectLst/>
+        </p:spPr>
+        <p:style>
+          <a:lnRef idx="1">
+            <a:schemeClr val="accent1"/>
+          </a:lnRef>
+          <a:fillRef idx="3">
+            <a:schemeClr val="accent1"/>
+          </a:fillRef>
+          <a:effectRef idx="2">
+            <a:schemeClr val="accent1"/>
+          </a:effectRef>
+          <a:fontRef idx="minor">
+            <a:schemeClr val="lt1"/>
+          </a:fontRef>
+        </p:style>
+        <p:txBody>
+          <a:bodyPr rtlCol="0" anchor="ctr"/>
+          <a:lstStyle/>
+          <a:p>
+            <a:pPr algn="ctr"/>
+            <a:endParaRPr/>
+          </a:p>
+        </p:txBody>
+      </p:sp>
+      <p:sp>
+        <p:nvSpPr>
+          <p:cNvPr id="5" name="TextBox 4"/>
+          <p:cNvSpPr txBox="1"/>
+          <p:nvPr/>
+        </p:nvSpPr>
+        <p:spPr>
+          <a:xfrm>
+            <a:off x="576072" y="1847088"/>
+            <a:ext cx="7991856" cy="1239012"/>
+          </a:xfrm>
+          <a:prstGeom prst="rect">
+            <a:avLst/>
+          </a:prstGeom>
+          <a:noFill/>
+        </p:spPr>
+        <p:txBody>
+          <a:bodyPr wrap="square" lIns="0" tIns="0" rIns="0" bIns="0">
+            <a:spAutoFit/>
+          </a:bodyPr>
+          <a:lstStyle/>
+          <a:p>
+            <a:pPr algn="l">
+              <a:spcAft>
+                <a:spcPts val="0"/>
+              </a:spcAft>
+            </a:pPr>
+            <a:r>
+              <a:rPr sz="1200">
+                <a:solidFill>
+                  <a:srgbClr val="D6DEE8"/>
+                </a:solidFill>
+                <a:latin typeface="Consolas"/>
+              </a:rPr>
+              <a:t>  user question</a:t>
+            </a:r>
+          </a:p>
+          <a:p>
+            <a:pPr algn="l">
+              <a:spcAft>
+                <a:spcPts val="0"/>
+              </a:spcAft>
+            </a:pPr>
+            <a:r>
+              <a:rPr sz="1200">
+                <a:solidFill>
+                  <a:srgbClr val="D6DEE8"/>
+                </a:solidFill>
+                <a:latin typeface="Consolas"/>
+              </a:rPr>
+              <a:t>        |</a:t>
+            </a:r>
+          </a:p>
+          <a:p>
+            <a:pPr algn="l">
+              <a:spcAft>
+                <a:spcPts val="0"/>
+              </a:spcAft>
+            </a:pPr>
+            <a:r>
+              <a:rPr sz="1200">
+                <a:solidFill>
+                  <a:srgbClr val="D6DEE8"/>
+                </a:solidFill>
+                <a:latin typeface="Consolas"/>
+              </a:rPr>
+              <a:t>        v</a:t>
+            </a:r>
+          </a:p>
+          <a:p>
+            <a:pPr algn="l">
+              <a:spcAft>
+                <a:spcPts val="0"/>
+              </a:spcAft>
+            </a:pPr>
+            <a:r>
+              <a:rPr sz="1200">
+                <a:solidFill>
+                  <a:srgbClr val="D6DEE8"/>
+                </a:solidFill>
+                <a:latin typeface="Consolas"/>
+              </a:rPr>
+              <a:t>  LLM  (routing only, no data)</a:t>
+            </a:r>
+          </a:p>
+          <a:p>
+            <a:pPr algn="l">
+              <a:spcAft>
+                <a:spcPts val="0"/>
+              </a:spcAft>
+            </a:pPr>
+            <a:r>
+              <a:rPr sz="1200">
+                <a:solidFill>
+                  <a:srgbClr val="D6DEE8"/>
+                </a:solidFill>
+                <a:latin typeface="Consolas"/>
+              </a:rPr>
+              <a:t>        |</a:t>
+            </a:r>
+          </a:p>
+          <a:p>
+            <a:pPr algn="l">
+              <a:spcAft>
+                <a:spcPts val="0"/>
+              </a:spcAft>
+            </a:pPr>
+            <a:r>
+              <a:rPr sz="1200">
+                <a:solidFill>
+                  <a:srgbClr val="D6DEE8"/>
+                </a:solidFill>
+                <a:latin typeface="Consolas"/>
+              </a:rPr>
+              <a:t>        v</a:t>
+            </a:r>
+          </a:p>
+          <a:p>
+            <a:pPr algn="l">
+              <a:spcAft>
+                <a:spcPts val="0"/>
+              </a:spcAft>
+            </a:pPr>
+            <a:r>
+              <a:rPr sz="1200">
+                <a:solidFill>
+                  <a:srgbClr val="D6DEE8"/>
+                </a:solidFill>
+                <a:latin typeface="Consolas"/>
+              </a:rPr>
+              <a:t>  Python query function  -&gt;  dataset  -&gt;  real numbers</a:t>
+            </a:r>
+          </a:p>
+        </p:txBody>
+      </p:sp>
+      <p:sp>
+        <p:nvSpPr>
+          <p:cNvPr id="6" name="TextBox 5"/>
+          <p:cNvSpPr txBox="1"/>
+          <p:nvPr/>
+        </p:nvSpPr>
+        <p:spPr>
+          <a:xfrm>
+            <a:off x="411480" y="3840480"/>
+            <a:ext cx="8321040" cy="937259"/>
+          </a:xfrm>
+          <a:prstGeom prst="rect">
+            <a:avLst/>
+          </a:prstGeom>
+          <a:noFill/>
+        </p:spPr>
+        <p:txBody>
+          <a:bodyPr wrap="square" lIns="0" tIns="0" rIns="0">
+            <a:spAutoFit/>
+          </a:bodyPr>
+          <a:lstStyle/>
+          <a:p>
+            <a:pPr>
+              <a:spcAft>
+                <a:spcPts val="1000"/>
+              </a:spcAft>
+            </a:pPr>
+            <a:r>
+              <a:rPr sz="1400" b="1">
+                <a:solidFill>
+                  <a:srgbClr val="82C7A5"/>
+                </a:solidFill>
+                <a:latin typeface="Montserrat"/>
+              </a:rPr>
+              <a:t>Every number on screen comes from pandas, not from the model.</a:t>
+            </a:r>
+          </a:p>
+        </p:txBody>
+      </p:sp>
+    </p:spTree>
+  </p:cSld>
+  <p:clrMapOvr>
+    <a:masterClrMapping/>
+  </p:clrMapOvr>
+</p:sld>
+</file>
+
+<file path=ppt/slides/slide11.xml><?xml version="1.0" encoding="utf-8"?>
+<p:sld xmlns:a="http://schemas.openxmlformats.org/drawingml/2006/main" xmlns:r="http://schemas.openxmlformats.org/officeDocument/2006/relationships" xmlns:p="http://schemas.openxmlformats.org/presentationml/2006/main">
+  <p:cSld>
+    <p:spTree>
+      <p:nvGrpSpPr>
+        <p:cNvPr id="1" name=""/>
+        <p:cNvGrpSpPr/>
+        <p:nvPr/>
+      </p:nvGrpSpPr>
+      <p:grpSpPr>
+        <a:xfrm>
+          <a:off x="0" y="0"/>
+          <a:ext cx="0" cy="0"/>
+          <a:chOff x="0" y="0"/>
+          <a:chExt cx="0" cy="0"/>
+        </a:xfrm>
+      </p:grpSpPr>
+      <p:sp>
+        <p:nvSpPr>
+          <p:cNvPr id="2" name="Title 1"/>
+          <p:cNvSpPr>
+            <a:spLocks noGrp="1"/>
+          </p:cNvSpPr>
+          <p:nvPr>
+            <p:ph type="title"/>
+          </p:nvPr>
+        </p:nvSpPr>
+        <p:spPr/>
+        <p:txBody>
+          <a:bodyPr/>
+          <a:lstStyle/>
+          <a:p>
+            <a:r>
+              <a:rPr sz="2800" b="1" dirty="0">
+                <a:solidFill>
+                  <a:srgbClr val="FFFFFF"/>
+                </a:solidFill>
+                <a:latin typeface="Montserrat"/>
+              </a:rPr>
+              <a:t>Function Calling</a:t>
+            </a:r>
+          </a:p>
+        </p:txBody>
+      </p:sp>
+      <p:sp>
+        <p:nvSpPr>
+          <p:cNvPr id="3" name="TextBox 2"/>
+          <p:cNvSpPr txBox="1"/>
+          <p:nvPr/>
+        </p:nvSpPr>
+        <p:spPr>
+          <a:xfrm>
+            <a:off x="411480" y="1005840"/>
+            <a:ext cx="8321040" cy="564257"/>
+          </a:xfrm>
+          <a:prstGeom prst="rect">
+            <a:avLst/>
+          </a:prstGeom>
+          <a:noFill/>
+        </p:spPr>
+        <p:txBody>
+          <a:bodyPr wrap="square" lIns="0" tIns="0" rIns="0">
+            <a:spAutoFit/>
+          </a:bodyPr>
+          <a:lstStyle/>
+          <a:p>
+            <a:pPr>
+              <a:spcAft>
+                <a:spcPts val="800"/>
+              </a:spcAft>
+            </a:pPr>
+            <a:endParaRPr lang="pt-PT" sz="1350" dirty="0">
+              <a:solidFill>
+                <a:srgbClr val="FFFFFF"/>
+              </a:solidFill>
+              <a:latin typeface="Montserrat"/>
+            </a:endParaRPr>
+          </a:p>
+          <a:p>
+            <a:pPr>
+              <a:spcAft>
+                <a:spcPts val="800"/>
+              </a:spcAft>
+            </a:pPr>
+            <a:r>
+              <a:rPr sz="1350" dirty="0">
+                <a:solidFill>
+                  <a:srgbClr val="FFFFFF"/>
+                </a:solidFill>
+                <a:latin typeface="Montserrat"/>
+              </a:rPr>
+              <a:t>Each function is described to the model as a tool. The model picks one and fills in the arguments.</a:t>
+            </a:r>
+          </a:p>
+        </p:txBody>
+      </p:sp>
+      <p:sp>
+        <p:nvSpPr>
+          <p:cNvPr id="4" name="Rounded Rectangle 3"/>
+          <p:cNvSpPr/>
+          <p:nvPr/>
+        </p:nvSpPr>
+        <p:spPr>
+          <a:xfrm>
+            <a:off x="411480" y="1737360"/>
+            <a:ext cx="8321040" cy="2135124"/>
+          </a:xfrm>
+          <a:prstGeom prst="roundRect">
+            <a:avLst>
+              <a:gd name="adj" fmla="val 4000"/>
+            </a:avLst>
+          </a:prstGeom>
+          <a:solidFill>
+            <a:srgbClr val="121720"/>
+          </a:solidFill>
+          <a:ln>
+            <a:noFill/>
+          </a:ln>
+          <a:effectLst/>
+        </p:spPr>
+        <p:style>
+          <a:lnRef idx="1">
+            <a:schemeClr val="accent1"/>
+          </a:lnRef>
+          <a:fillRef idx="3">
+            <a:schemeClr val="accent1"/>
+          </a:fillRef>
+          <a:effectRef idx="2">
+            <a:schemeClr val="accent1"/>
+          </a:effectRef>
+          <a:fontRef idx="minor">
+            <a:schemeClr val="lt1"/>
+          </a:fontRef>
+        </p:style>
+        <p:txBody>
+          <a:bodyPr rtlCol="0" anchor="ctr"/>
+          <a:lstStyle/>
+          <a:p>
+            <a:pPr algn="ctr"/>
+            <a:endParaRPr/>
+          </a:p>
+        </p:txBody>
+      </p:sp>
+      <p:sp>
+        <p:nvSpPr>
+          <p:cNvPr id="5" name="TextBox 4"/>
+          <p:cNvSpPr txBox="1"/>
+          <p:nvPr/>
+        </p:nvSpPr>
+        <p:spPr>
+          <a:xfrm>
+            <a:off x="576072" y="1847088"/>
+            <a:ext cx="7991856" cy="1915667"/>
+          </a:xfrm>
+          <a:prstGeom prst="rect">
+            <a:avLst/>
+          </a:prstGeom>
+          <a:noFill/>
+        </p:spPr>
+        <p:txBody>
+          <a:bodyPr wrap="square" lIns="0" tIns="0" rIns="0" bIns="0">
+            <a:spAutoFit/>
+          </a:bodyPr>
+          <a:lstStyle/>
+          <a:p>
+            <a:pPr algn="l">
+              <a:spcAft>
+                <a:spcPts val="0"/>
+              </a:spcAft>
+            </a:pPr>
+            <a:r>
+              <a:rPr sz="1050">
+                <a:solidFill>
+                  <a:srgbClr val="D6DEE8"/>
+                </a:solidFill>
+                <a:latin typeface="Consolas"/>
+              </a:rPr>
+              <a:t>{</a:t>
+            </a:r>
+          </a:p>
+          <a:p>
+            <a:pPr algn="l">
+              <a:spcAft>
+                <a:spcPts val="0"/>
+              </a:spcAft>
+            </a:pPr>
+            <a:r>
+              <a:rPr sz="1050">
+                <a:solidFill>
+                  <a:srgbClr val="D6DEE8"/>
+                </a:solidFill>
+                <a:latin typeface="Consolas"/>
+              </a:rPr>
+              <a:t>    'name': 'find_replenishable_sizes',</a:t>
+            </a:r>
+          </a:p>
+          <a:p>
+            <a:pPr algn="l">
+              <a:spcAft>
+                <a:spcPts val="0"/>
+              </a:spcAft>
+            </a:pPr>
+            <a:r>
+              <a:rPr sz="1050">
+                <a:solidFill>
+                  <a:srgbClr val="D6DEE8"/>
+                </a:solidFill>
+                <a:latin typeface="Consolas"/>
+              </a:rPr>
+              <a:t>    'description': 'Find sizes the central warehouse has in stock but a store</a:t>
+            </a:r>
+          </a:p>
+          <a:p>
+            <a:pPr algn="l">
+              <a:spcAft>
+                <a:spcPts val="0"/>
+              </a:spcAft>
+            </a:pPr>
+            <a:r>
+              <a:rPr sz="1050">
+                <a:solidFill>
+                  <a:srgbClr val="D6DEE8"/>
+                </a:solidFill>
+                <a:latin typeface="Consolas"/>
+              </a:rPr>
+              <a:t>                    does not, for references the store already carries.',</a:t>
+            </a:r>
+          </a:p>
+          <a:p>
+            <a:pPr algn="l">
+              <a:spcAft>
+                <a:spcPts val="0"/>
+              </a:spcAft>
+            </a:pPr>
+            <a:r>
+              <a:rPr sz="1050">
+                <a:solidFill>
+                  <a:srgbClr val="D6DEE8"/>
+                </a:solidFill>
+                <a:latin typeface="Consolas"/>
+              </a:rPr>
+              <a:t>    'parameters': {</a:t>
+            </a:r>
+          </a:p>
+          <a:p>
+            <a:pPr algn="l">
+              <a:spcAft>
+                <a:spcPts val="0"/>
+              </a:spcAft>
+            </a:pPr>
+            <a:r>
+              <a:rPr sz="1050">
+                <a:solidFill>
+                  <a:srgbClr val="D6DEE8"/>
+                </a:solidFill>
+                <a:latin typeface="Consolas"/>
+              </a:rPr>
+              <a:t>        'store_input':     {'type': 'string'},   # required</a:t>
+            </a:r>
+          </a:p>
+          <a:p>
+            <a:pPr algn="l">
+              <a:spcAft>
+                <a:spcPts val="0"/>
+              </a:spcAft>
+            </a:pPr>
+            <a:r>
+              <a:rPr sz="1050">
+                <a:solidFill>
+                  <a:srgbClr val="D6DEE8"/>
+                </a:solidFill>
+                <a:latin typeface="Consolas"/>
+              </a:rPr>
+              <a:t>        'brand_input':     {'type': 'string'},   # optional</a:t>
+            </a:r>
+          </a:p>
+          <a:p>
+            <a:pPr algn="l">
+              <a:spcAft>
+                <a:spcPts val="0"/>
+              </a:spcAft>
+            </a:pPr>
+            <a:r>
+              <a:rPr sz="1050">
+                <a:solidFill>
+                  <a:srgbClr val="D6DEE8"/>
+                </a:solidFill>
+                <a:latin typeface="Consolas"/>
+              </a:rPr>
+              <a:t>        'reference_input': {'type': 'string'},   # optional</a:t>
+            </a:r>
+          </a:p>
+          <a:p>
+            <a:pPr algn="l">
+              <a:spcAft>
+                <a:spcPts val="0"/>
+              </a:spcAft>
+            </a:pPr>
+            <a:r>
+              <a:rPr sz="1050">
+                <a:solidFill>
+                  <a:srgbClr val="D6DEE8"/>
+                </a:solidFill>
+                <a:latin typeface="Consolas"/>
+              </a:rPr>
+              <a:t>        'units_per_size':  {'type': 'integer'},  # optional</a:t>
+            </a:r>
+          </a:p>
+          <a:p>
+            <a:pPr algn="l">
+              <a:spcAft>
+                <a:spcPts val="0"/>
+              </a:spcAft>
+            </a:pPr>
+            <a:r>
+              <a:rPr sz="1050">
+                <a:solidFill>
+                  <a:srgbClr val="D6DEE8"/>
+                </a:solidFill>
+                <a:latin typeface="Consolas"/>
+              </a:rPr>
+              <a:t>    },</a:t>
+            </a:r>
+          </a:p>
+          <a:p>
+            <a:pPr algn="l">
+              <a:spcAft>
+                <a:spcPts val="0"/>
+              </a:spcAft>
+            </a:pPr>
+            <a:r>
+              <a:rPr sz="1050">
+                <a:solidFill>
+                  <a:srgbClr val="D6DEE8"/>
+                </a:solidFill>
+                <a:latin typeface="Consolas"/>
+              </a:rPr>
+              <a:t>}</a:t>
+            </a:r>
+          </a:p>
+        </p:txBody>
+      </p:sp>
+      <p:sp>
+        <p:nvSpPr>
+          <p:cNvPr id="6" name="TextBox 5"/>
+          <p:cNvSpPr txBox="1"/>
+          <p:nvPr/>
+        </p:nvSpPr>
+        <p:spPr>
+          <a:xfrm>
+            <a:off x="411480" y="4114800"/>
+            <a:ext cx="8321040" cy="457200"/>
+          </a:xfrm>
+          <a:prstGeom prst="rect">
+            <a:avLst/>
+          </a:prstGeom>
+          <a:noFill/>
+        </p:spPr>
+        <p:txBody>
+          <a:bodyPr wrap="square" lIns="0" tIns="0">
+            <a:spAutoFit/>
+          </a:bodyPr>
+          <a:lstStyle/>
+          <a:p>
+            <a:r>
+              <a:rPr sz="1200" i="1">
+                <a:solidFill>
+                  <a:srgbClr val="B8C0CC"/>
+                </a:solidFill>
+                <a:latin typeface="Montserrat"/>
+              </a:rPr>
+              <a:t>"Which Nike sizes are missing in Loja Colombo?"  -&gt;  store_input='Loja Colombo', brand_input='Nike'</a:t>
+            </a:r>
+          </a:p>
+        </p:txBody>
+      </p:sp>
+    </p:spTree>
+  </p:cSld>
+  <p:clrMapOvr>
+    <a:masterClrMapping/>
+  </p:clrMapOvr>
+</p:sld>
+</file>
+
+<file path=ppt/slides/slide12.xml><?xml version="1.0" encoding="utf-8"?>
+<p:sld xmlns:a="http://schemas.openxmlformats.org/drawingml/2006/main" xmlns:r="http://schemas.openxmlformats.org/officeDocument/2006/relationships" xmlns:p="http://schemas.openxmlformats.org/presentationml/2006/main">
+  <p:cSld>
+    <p:spTree>
+      <p:nvGrpSpPr>
+        <p:cNvPr id="1" name=""/>
+        <p:cNvGrpSpPr/>
+        <p:nvPr/>
+      </p:nvGrpSpPr>
+      <p:grpSpPr>
+        <a:xfrm>
+          <a:off x="0" y="0"/>
+          <a:ext cx="0" cy="0"/>
+          <a:chOff x="0" y="0"/>
+          <a:chExt cx="0" cy="0"/>
+        </a:xfrm>
+      </p:grpSpPr>
+      <p:sp>
+        <p:nvSpPr>
+          <p:cNvPr id="2" name="Title 1"/>
+          <p:cNvSpPr>
+            <a:spLocks noGrp="1"/>
+          </p:cNvSpPr>
+          <p:nvPr>
+            <p:ph type="title"/>
+          </p:nvPr>
+        </p:nvSpPr>
+        <p:spPr/>
+        <p:txBody>
+          <a:bodyPr/>
+          <a:lstStyle/>
+          <a:p>
+            <a:r>
+              <a:rPr sz="2800" b="1">
+                <a:solidFill>
+                  <a:srgbClr val="FFFFFF"/>
+                </a:solidFill>
+                <a:latin typeface="Montserrat"/>
+              </a:rPr>
+              <a:t>The Query Functions</a:t>
+            </a:r>
+          </a:p>
+        </p:txBody>
+      </p:sp>
+      <p:sp>
+        <p:nvSpPr>
+          <p:cNvPr id="3" name="TextBox 2"/>
+          <p:cNvSpPr txBox="1"/>
+          <p:nvPr/>
+        </p:nvSpPr>
+        <p:spPr>
+          <a:xfrm>
+            <a:off x="411480" y="1143000"/>
+            <a:ext cx="8321040" cy="2446824"/>
+          </a:xfrm>
+          <a:prstGeom prst="rect">
+            <a:avLst/>
+          </a:prstGeom>
+          <a:noFill/>
+        </p:spPr>
+        <p:txBody>
+          <a:bodyPr wrap="square" lIns="0" tIns="0" rIns="0">
+            <a:spAutoFit/>
+          </a:bodyPr>
+          <a:lstStyle/>
+          <a:p>
+            <a:pPr>
+              <a:spcAft>
                 <a:spcPts val="1300"/>
               </a:spcAft>
             </a:pPr>
-            <a:r>
-              <a:rPr b="1" sz="1300">
+            <a:endParaRPr lang="pt-PT" sz="1300" b="1" dirty="0">
+              <a:solidFill>
+                <a:srgbClr val="82C7A5"/>
+              </a:solidFill>
+              <a:latin typeface="Montserrat"/>
+            </a:endParaRPr>
+          </a:p>
+          <a:p>
+            <a:pPr>
+              <a:spcAft>
+                <a:spcPts val="1300"/>
+              </a:spcAft>
+            </a:pPr>
+            <a:r>
+              <a:rPr sz="1300" b="1" dirty="0" err="1">
                 <a:solidFill>
                   <a:srgbClr val="82C7A5"/>
                 </a:solidFill>
                 <a:latin typeface="Montserrat"/>
               </a:rPr>
-              <a:t>find_replenishable_sizes  </a:t>
-            </a:r>
-            <a:r>
-              <a:rPr sz="1300">
+              <a:t>find_replenishable_sizes</a:t>
+            </a:r>
+            <a:r>
+              <a:rPr sz="1300" b="1" dirty="0">
+                <a:solidFill>
+                  <a:srgbClr val="82C7A5"/>
+                </a:solidFill>
+                <a:latin typeface="Montserrat"/>
+              </a:rPr>
+              <a:t>  </a:t>
+            </a:r>
+            <a:r>
+              <a:rPr sz="1300" dirty="0">
                 <a:solidFill>
                   <a:srgbClr val="FFFFFF"/>
                 </a:solidFill>
@@ -9413,16 +10327,25 @@
               </a:spcAft>
             </a:pPr>
             <a:r>
-              <a:rPr b="1" sz="1300">
+              <a:rPr sz="1300" b="1" dirty="0" err="1">
                 <a:solidFill>
                   <a:srgbClr val="82C7A5"/>
                 </a:solidFill>
                 <a:latin typeface="Montserrat"/>
               </a:rPr>
-              <a:t>generate_replenishment_document  </a:t>
-            </a:r>
-            <a:r>
-              <a:rPr sz="1300">
+              <a:t>generate_replenishment_document</a:t>
+            </a:r>
+            <a:r>
+              <a:rPr sz="1300" b="1" dirty="0">
+                <a:solidFill>
+                  <a:srgbClr val="82C7A5"/>
+                </a:solidFill>
+                <a:latin typeface="Montserrat"/>
+              </a:rPr>
+              <a:t>  </a:t>
+            </a:r>
+            <a:r>
+              <a:rPr sz="1300" dirty="0">
                 <a:solidFill>
                   <a:srgbClr val="FFFFFF"/>
                 </a:solidFill>
@@ -9438,16 +10361,25 @@
               </a:spcAft>
             </a:pPr>
             <a:r>
-              <a:rPr b="1" sz="1300">
+              <a:rPr sz="1300" b="1" dirty="0" err="1">
                 <a:solidFill>
                   <a:srgbClr val="82C7A5"/>
                 </a:solidFill>
                 <a:latin typeface="Montserrat"/>
               </a:rPr>
-              <a:t>find_reference  </a:t>
-            </a:r>
-            <a:r>
-              <a:rPr sz="1300">
+              <a:t>find_reference</a:t>
+            </a:r>
+            <a:r>
+              <a:rPr sz="1300" b="1" dirty="0">
+                <a:solidFill>
+                  <a:srgbClr val="82C7A5"/>
+                </a:solidFill>
+                <a:latin typeface="Montserrat"/>
+              </a:rPr>
+              <a:t>  </a:t>
+            </a:r>
+            <a:r>
+              <a:rPr sz="1300" dirty="0">
                 <a:solidFill>
                   <a:srgbClr val="FFFFFF"/>
                 </a:solidFill>
@@ -9463,16 +10395,25 @@
               </a:spcAft>
             </a:pPr>
             <a:r>
-              <a:rPr b="1" sz="1300">
+              <a:rPr sz="1300" b="1" dirty="0" err="1">
                 <a:solidFill>
                   <a:srgbClr val="82C7A5"/>
                 </a:solidFill>
                 <a:latin typeface="Montserrat"/>
               </a:rPr>
-              <a:t>get_quantity  </a:t>
-            </a:r>
-            <a:r>
-              <a:rPr sz="1300">
+              <a:t>get_quantity</a:t>
+            </a:r>
+            <a:r>
+              <a:rPr sz="1300" b="1" dirty="0">
+                <a:solidFill>
+                  <a:srgbClr val="82C7A5"/>
+                </a:solidFill>
+                <a:latin typeface="Montserrat"/>
+              </a:rPr>
+              <a:t>  </a:t>
+            </a:r>
+            <a:r>
+              <a:rPr sz="1300" dirty="0">
                 <a:solidFill>
                   <a:srgbClr val="FFFFFF"/>
                 </a:solidFill>
@@ -9488,16 +10429,25 @@
               </a:spcAft>
             </a:pPr>
             <a:r>
-              <a:rPr b="1" sz="1300">
+              <a:rPr sz="1300" b="1" dirty="0" err="1">
                 <a:solidFill>
                   <a:srgbClr val="82C7A5"/>
                 </a:solidFill>
                 <a:latin typeface="Montserrat"/>
               </a:rPr>
-              <a:t>find_model_by_type  </a:t>
-            </a:r>
-            <a:r>
-              <a:rPr sz="1300">
+              <a:t>find_model_by_type</a:t>
+            </a:r>
+            <a:r>
+              <a:rPr sz="1300" b="1" dirty="0">
+                <a:solidFill>
+                  <a:srgbClr val="82C7A5"/>
+                </a:solidFill>
+                <a:latin typeface="Montserrat"/>
+              </a:rPr>
+              <a:t>  </a:t>
+            </a:r>
+            <a:r>
+              <a:rPr sz="1300" dirty="0">
                 <a:solidFill>
                   <a:srgbClr val="FFFFFF"/>
                 </a:solidFill>
@@ -9513,16 +10463,25 @@
               </a:spcAft>
             </a:pPr>
             <a:r>
-              <a:rPr b="1" sz="1300">
+              <a:rPr sz="1300" b="1" dirty="0" err="1">
                 <a:solidFill>
                   <a:srgbClr val="82C7A5"/>
                 </a:solidFill>
                 <a:latin typeface="Montserrat"/>
               </a:rPr>
-              <a:t>export_stock  </a:t>
-            </a:r>
-            <a:r>
-              <a:rPr sz="1300">
+              <a:t>export_stock</a:t>
+            </a:r>
+            <a:r>
+              <a:rPr sz="1300" b="1" dirty="0">
+                <a:solidFill>
+                  <a:srgbClr val="82C7A5"/>
+                </a:solidFill>
+                <a:latin typeface="Montserrat"/>
+              </a:rPr>
+              <a:t>  </a:t>
+            </a:r>
+            <a:r>
+              <a:rPr sz="1300" dirty="0">
                 <a:solidFill>
                   <a:srgbClr val="FFFFFF"/>
                 </a:solidFill>
@@ -9575,8 +10534,8 @@
 </p:sld>
 </file>
 
-<file path=ppt/slides/slide11.xml><?xml version="1.0" encoding="utf-8"?>
-<p:sld xmlns:a="http://schemas.openxmlformats.org/drawingml/2006/main" xmlns:p="http://schemas.openxmlformats.org/presentationml/2006/main" xmlns:r="http://schemas.openxmlformats.org/officeDocument/2006/relationships">
+<file path=ppt/slides/slide13.xml><?xml version="1.0" encoding="utf-8"?>
+<p:sld xmlns:a="http://schemas.openxmlformats.org/drawingml/2006/main" xmlns:r="http://schemas.openxmlformats.org/officeDocument/2006/relationships" xmlns:p="http://schemas.openxmlformats.org/presentationml/2006/main">
   <p:cSld>
     <p:spTree>
       <p:nvGrpSpPr>
@@ -9584,7 +10543,14 @@
         <p:cNvGrpSpPr/>
         <p:nvPr/>
       </p:nvGrpSpPr>
-      <p:grpSpPr/>
+      <p:grpSpPr>
+        <a:xfrm>
+          <a:off x="0" y="0"/>
+          <a:ext cx="0" cy="0"/>
+          <a:chOff x="0" y="0"/>
+          <a:chExt cx="0" cy="0"/>
+        </a:xfrm>
+      </p:grpSpPr>
       <p:sp>
         <p:nvSpPr>
           <p:cNvPr id="2" name="Title 1"/>
@@ -9621,7 +10587,7 @@
         <p:spPr>
           <a:xfrm>
             <a:off x="411480" y="960120"/>
-            <a:ext cx="8321040" cy="3817620"/>
+            <a:ext cx="8321040" cy="538609"/>
           </a:xfrm>
           <a:prstGeom prst="rect">
             <a:avLst/>
@@ -9629,7 +10595,7 @@
           <a:noFill/>
         </p:spPr>
         <p:txBody>
-          <a:bodyPr wrap="square" lIns="0" rIns="0" tIns="0">
+          <a:bodyPr wrap="square" lIns="0" tIns="0" rIns="0">
             <a:spAutoFit/>
           </a:bodyPr>
           <a:lstStyle/>
@@ -9639,8 +10605,21 @@
                 <a:spcPts val="600"/>
               </a:spcAft>
             </a:pPr>
-            <a:r>
-              <a:rPr sz="1350">
+            <a:endParaRPr lang="pt-PT" sz="1350" dirty="0">
+              <a:solidFill>
+                <a:srgbClr val="FFFFFF"/>
+              </a:solidFill>
+              <a:latin typeface="Montserrat"/>
+            </a:endParaRPr>
+          </a:p>
+          <a:p>
+            <a:pPr>
+              <a:spcAft>
+                <a:spcPts val="600"/>
+              </a:spcAft>
+            </a:pPr>
+            <a:r>
+              <a:rPr sz="1350" dirty="0">
                 <a:solidFill>
                   <a:srgbClr val="FFFFFF"/>
                 </a:solidFill>
@@ -9694,6 +10673,7 @@
           <a:lstStyle/>
           <a:p>
             <a:pPr algn="ctr"/>
+            <a:endParaRPr/>
           </a:p>
         </p:txBody>
       </p:sp>
@@ -9714,7 +10694,7 @@
           <a:noFill/>
         </p:spPr>
         <p:txBody>
-          <a:bodyPr wrap="square" lIns="0" rIns="0" tIns="0" bIns="0">
+          <a:bodyPr wrap="square" lIns="0" tIns="0" rIns="0" bIns="0">
             <a:spAutoFit/>
           </a:bodyPr>
           <a:lstStyle/>
@@ -9922,8 +10902,8 @@
 </p:sld>
 </file>
 
-<file path=ppt/slides/slide12.xml><?xml version="1.0" encoding="utf-8"?>
-<p:sld xmlns:a="http://schemas.openxmlformats.org/drawingml/2006/main" xmlns:p="http://schemas.openxmlformats.org/presentationml/2006/main" xmlns:r="http://schemas.openxmlformats.org/officeDocument/2006/relationships">
+<file path=ppt/slides/slide14.xml><?xml version="1.0" encoding="utf-8"?>
+<p:sld xmlns:a="http://schemas.openxmlformats.org/drawingml/2006/main" xmlns:r="http://schemas.openxmlformats.org/officeDocument/2006/relationships" xmlns:p="http://schemas.openxmlformats.org/presentationml/2006/main">
   <p:cSld>
     <p:spTree>
       <p:nvGrpSpPr>
@@ -9931,7 +10911,14 @@
         <p:cNvGrpSpPr/>
         <p:nvPr/>
       </p:nvGrpSpPr>
-      <p:grpSpPr/>
+      <p:grpSpPr>
+        <a:xfrm>
+          <a:off x="0" y="0"/>
+          <a:ext cx="0" cy="0"/>
+          <a:chOff x="0" y="0"/>
+          <a:chExt cx="0" cy="0"/>
+        </a:xfrm>
+      </p:grpSpPr>
       <p:sp>
         <p:nvSpPr>
           <p:cNvPr id="2" name="Title 1"/>
@@ -9968,7 +10955,7 @@
         <p:spPr>
           <a:xfrm>
             <a:off x="411480" y="960120"/>
-            <a:ext cx="8321040" cy="3817620"/>
+            <a:ext cx="8321040" cy="538609"/>
           </a:xfrm>
           <a:prstGeom prst="rect">
             <a:avLst/>
@@ -9976,7 +10963,7 @@
           <a:noFill/>
         </p:spPr>
         <p:txBody>
-          <a:bodyPr wrap="square" lIns="0" rIns="0" tIns="0">
+          <a:bodyPr wrap="square" lIns="0" tIns="0" rIns="0">
             <a:spAutoFit/>
           </a:bodyPr>
           <a:lstStyle/>
@@ -9986,8 +10973,21 @@
                 <a:spcPts val="600"/>
               </a:spcAft>
             </a:pPr>
-            <a:r>
-              <a:rPr sz="1350">
+            <a:endParaRPr lang="pt-PT" sz="1350" dirty="0">
+              <a:solidFill>
+                <a:srgbClr val="FFFFFF"/>
+              </a:solidFill>
+              <a:latin typeface="Montserrat"/>
+            </a:endParaRPr>
+          </a:p>
+          <a:p>
+            <a:pPr>
+              <a:spcAft>
+                <a:spcPts val="600"/>
+              </a:spcAft>
+            </a:pPr>
+            <a:r>
+              <a:rPr sz="1350" dirty="0">
                 <a:solidFill>
                   <a:srgbClr val="FFFFFF"/>
                 </a:solidFill>
@@ -10041,6 +11041,7 @@
           <a:lstStyle/>
           <a:p>
             <a:pPr algn="ctr"/>
+            <a:endParaRPr/>
           </a:p>
         </p:txBody>
       </p:sp>
@@ -10061,7 +11062,7 @@
           <a:noFill/>
         </p:spPr>
         <p:txBody>
-          <a:bodyPr wrap="square" lIns="0" rIns="0" tIns="0" bIns="0">
+          <a:bodyPr wrap="square" lIns="0" tIns="0" rIns="0" bIns="0">
             <a:spAutoFit/>
           </a:bodyPr>
           <a:lstStyle/>
@@ -10072,7 +11073,7 @@
               </a:spcAft>
             </a:pPr>
             <a:r>
-              <a:rPr sz="1050">
+              <a:rPr sz="1050" dirty="0">
                 <a:solidFill>
                   <a:srgbClr val="748499"/>
                 </a:solidFill>
@@ -10088,13 +11089,22 @@
               </a:spcAft>
             </a:pPr>
             <a:r>
-              <a:rPr sz="1050">
+              <a:rPr sz="1050" dirty="0" err="1">
                 <a:solidFill>
                   <a:srgbClr val="D6DEE8"/>
                 </a:solidFill>
                 <a:latin typeface="Consolas"/>
               </a:rPr>
-              <a:t>hq_stock['HQ_AVAILABLE'] = [</a:t>
+              <a:t>hq_stock</a:t>
+            </a:r>
+            <a:r>
+              <a:rPr sz="1050" dirty="0">
+                <a:solidFill>
+                  <a:srgbClr val="D6DEE8"/>
+                </a:solidFill>
+                <a:latin typeface="Consolas"/>
+              </a:rPr>
+              <a:t>['HQ_AVAILABLE'] = [</a:t>
             </a:r>
           </a:p>
           <a:p>
@@ -10104,13 +11114,31 @@
               </a:spcAft>
             </a:pPr>
             <a:r>
-              <a:rPr sz="1050">
+              <a:rPr sz="1050" dirty="0">
                 <a:solidFill>
                   <a:srgbClr val="D6DEE8"/>
                 </a:solidFill>
                 <a:latin typeface="Consolas"/>
               </a:rPr>
-              <a:t>    int(q - allocated.get((r, s), 0))</a:t>
+              <a:t>    int(q - </a:t>
+            </a:r>
+            <a:r>
+              <a:rPr sz="1050" dirty="0" err="1">
+                <a:solidFill>
+                  <a:srgbClr val="D6DEE8"/>
+                </a:solidFill>
+                <a:latin typeface="Consolas"/>
+              </a:rPr>
+              <a:t>allocated.get</a:t>
+            </a:r>
+            <a:r>
+              <a:rPr sz="1050" dirty="0">
+                <a:solidFill>
+                  <a:srgbClr val="D6DEE8"/>
+                </a:solidFill>
+                <a:latin typeface="Consolas"/>
+              </a:rPr>
+              <a:t>((r, s), 0))</a:t>
             </a:r>
           </a:p>
           <a:p>
@@ -10120,13 +11148,31 @@
               </a:spcAft>
             </a:pPr>
             <a:r>
-              <a:rPr sz="1050">
+              <a:rPr sz="1050" dirty="0">
                 <a:solidFill>
                   <a:srgbClr val="D6DEE8"/>
                 </a:solidFill>
                 <a:latin typeface="Consolas"/>
               </a:rPr>
-              <a:t>    for r, s, q in zip(hq_stock['REFERENCE'],</a:t>
+              <a:t>    for r, s, q in zip(</a:t>
+            </a:r>
+            <a:r>
+              <a:rPr sz="1050" dirty="0" err="1">
+                <a:solidFill>
+                  <a:srgbClr val="D6DEE8"/>
+                </a:solidFill>
+                <a:latin typeface="Consolas"/>
+              </a:rPr>
+              <a:t>hq_stock</a:t>
+            </a:r>
+            <a:r>
+              <a:rPr sz="1050" dirty="0">
+                <a:solidFill>
+                  <a:srgbClr val="D6DEE8"/>
+                </a:solidFill>
+                <a:latin typeface="Consolas"/>
+              </a:rPr>
+              <a:t>['REFERENCE'],</a:t>
             </a:r>
           </a:p>
           <a:p>
@@ -10136,13 +11182,31 @@
               </a:spcAft>
             </a:pPr>
             <a:r>
-              <a:rPr sz="1050">
+              <a:rPr sz="1050" dirty="0">
                 <a:solidFill>
                   <a:srgbClr val="D6DEE8"/>
                 </a:solidFill>
                 <a:latin typeface="Consolas"/>
               </a:rPr>
-              <a:t>                       hq_stock['SIZE'],</a:t>
+              <a:t>                       </a:t>
+            </a:r>
+            <a:r>
+              <a:rPr sz="1050" dirty="0" err="1">
+                <a:solidFill>
+                  <a:srgbClr val="D6DEE8"/>
+                </a:solidFill>
+                <a:latin typeface="Consolas"/>
+              </a:rPr>
+              <a:t>hq_stock</a:t>
+            </a:r>
+            <a:r>
+              <a:rPr sz="1050" dirty="0">
+                <a:solidFill>
+                  <a:srgbClr val="D6DEE8"/>
+                </a:solidFill>
+                <a:latin typeface="Consolas"/>
+              </a:rPr>
+              <a:t>['SIZE'],</a:t>
             </a:r>
           </a:p>
           <a:p>
@@ -10152,13 +11216,31 @@
               </a:spcAft>
             </a:pPr>
             <a:r>
-              <a:rPr sz="1050">
+              <a:rPr sz="1050" dirty="0">
                 <a:solidFill>
                   <a:srgbClr val="D6DEE8"/>
                 </a:solidFill>
                 <a:latin typeface="Consolas"/>
               </a:rPr>
-              <a:t>                       hq_stock['QUANTITY'])</a:t>
+              <a:t>                       </a:t>
+            </a:r>
+            <a:r>
+              <a:rPr sz="1050" dirty="0" err="1">
+                <a:solidFill>
+                  <a:srgbClr val="D6DEE8"/>
+                </a:solidFill>
+                <a:latin typeface="Consolas"/>
+              </a:rPr>
+              <a:t>hq_stock</a:t>
+            </a:r>
+            <a:r>
+              <a:rPr sz="1050" dirty="0">
+                <a:solidFill>
+                  <a:srgbClr val="D6DEE8"/>
+                </a:solidFill>
+                <a:latin typeface="Consolas"/>
+              </a:rPr>
+              <a:t>['QUANTITY'])</a:t>
             </a:r>
           </a:p>
           <a:p>
@@ -10168,7 +11250,7 @@
               </a:spcAft>
             </a:pPr>
             <a:r>
-              <a:rPr sz="1050">
+              <a:rPr sz="1050" dirty="0">
                 <a:solidFill>
                   <a:srgbClr val="D6DEE8"/>
                 </a:solidFill>
@@ -10188,7 +11270,7 @@
         <p:spPr>
           <a:xfrm>
             <a:off x="411480" y="3200400"/>
-            <a:ext cx="8321040" cy="1577340"/>
+            <a:ext cx="8321040" cy="902811"/>
           </a:xfrm>
           <a:prstGeom prst="rect">
             <a:avLst/>
@@ -10196,7 +11278,7 @@
           <a:noFill/>
         </p:spPr>
         <p:txBody>
-          <a:bodyPr wrap="square" lIns="0" rIns="0" tIns="0">
+          <a:bodyPr wrap="square" lIns="0" tIns="0" rIns="0">
             <a:spAutoFit/>
           </a:bodyPr>
           <a:lstStyle/>
@@ -10206,8 +11288,21 @@
                 <a:spcPts val="1000"/>
               </a:spcAft>
             </a:pPr>
-            <a:r>
-              <a:rPr sz="1300">
+            <a:endParaRPr lang="pt-PT" sz="1300" dirty="0">
+              <a:solidFill>
+                <a:srgbClr val="FFFFFF"/>
+              </a:solidFill>
+              <a:latin typeface="Montserrat"/>
+            </a:endParaRPr>
+          </a:p>
+          <a:p>
+            <a:pPr>
+              <a:spcAft>
+                <a:spcPts val="1000"/>
+              </a:spcAft>
+            </a:pPr>
+            <a:r>
+              <a:rPr sz="1300" dirty="0">
                 <a:solidFill>
                   <a:srgbClr val="FFFFFF"/>
                 </a:solidFill>
@@ -10223,13 +11318,31 @@
               </a:spcAft>
             </a:pPr>
             <a:r>
-              <a:rPr sz="1300">
+              <a:rPr sz="1300" dirty="0">
                 <a:solidFill>
                   <a:srgbClr val="FFFFFF"/>
                 </a:solidFill>
                 <a:latin typeface="Montserrat"/>
               </a:rPr>
-              <a:t>Nothing is written back to the dataset — the record lives in the Streamlit session.</a:t>
+              <a:t>Nothing is written back to the dataset — the record lives in the </a:t>
+            </a:r>
+            <a:r>
+              <a:rPr sz="1300" dirty="0" err="1">
+                <a:solidFill>
+                  <a:srgbClr val="FFFFFF"/>
+                </a:solidFill>
+                <a:latin typeface="Montserrat"/>
+              </a:rPr>
+              <a:t>Streamlit</a:t>
+            </a:r>
+            <a:r>
+              <a:rPr sz="1300" dirty="0">
+                <a:solidFill>
+                  <a:srgbClr val="FFFFFF"/>
+                </a:solidFill>
+                <a:latin typeface="Montserrat"/>
+              </a:rPr>
+              <a:t> session.</a:t>
             </a:r>
           </a:p>
         </p:txBody>
@@ -10242,8 +11355,8 @@
 </p:sld>
 </file>
 
-<file path=ppt/slides/slide13.xml><?xml version="1.0" encoding="utf-8"?>
-<p:sld xmlns:a="http://schemas.openxmlformats.org/drawingml/2006/main" xmlns:p="http://schemas.openxmlformats.org/presentationml/2006/main" xmlns:r="http://schemas.openxmlformats.org/officeDocument/2006/relationships">
+<file path=ppt/slides/slide15.xml><?xml version="1.0" encoding="utf-8"?>
+<p:sld xmlns:a="http://schemas.openxmlformats.org/drawingml/2006/main" xmlns:r="http://schemas.openxmlformats.org/officeDocument/2006/relationships" xmlns:p="http://schemas.openxmlformats.org/presentationml/2006/main">
   <p:cSld>
     <p:spTree>
       <p:nvGrpSpPr>
@@ -10251,7 +11364,14 @@
         <p:cNvGrpSpPr/>
         <p:nvPr/>
       </p:nvGrpSpPr>
-      <p:grpSpPr/>
+      <p:grpSpPr>
+        <a:xfrm>
+          <a:off x="0" y="0"/>
+          <a:ext cx="0" cy="0"/>
+          <a:chOff x="0" y="0"/>
+          <a:chExt cx="0" cy="0"/>
+        </a:xfrm>
+      </p:grpSpPr>
       <p:sp>
         <p:nvSpPr>
           <p:cNvPr id="2" name="Title 1"/>
@@ -10288,7 +11408,7 @@
         <p:spPr>
           <a:xfrm>
             <a:off x="411480" y="960120"/>
-            <a:ext cx="8321040" cy="3817620"/>
+            <a:ext cx="8321040" cy="564257"/>
           </a:xfrm>
           <a:prstGeom prst="rect">
             <a:avLst/>
@@ -10296,7 +11416,7 @@
           <a:noFill/>
         </p:spPr>
         <p:txBody>
-          <a:bodyPr wrap="square" lIns="0" rIns="0" tIns="0">
+          <a:bodyPr wrap="square" lIns="0" tIns="0" rIns="0">
             <a:spAutoFit/>
           </a:bodyPr>
           <a:lstStyle/>
@@ -10306,8 +11426,21 @@
                 <a:spcPts val="800"/>
               </a:spcAft>
             </a:pPr>
-            <a:r>
-              <a:rPr sz="1350">
+            <a:endParaRPr lang="pt-PT" sz="1350" dirty="0">
+              <a:solidFill>
+                <a:srgbClr val="FFFFFF"/>
+              </a:solidFill>
+              <a:latin typeface="Montserrat"/>
+            </a:endParaRPr>
+          </a:p>
+          <a:p>
+            <a:pPr>
+              <a:spcAft>
+                <a:spcPts val="800"/>
+              </a:spcAft>
+            </a:pPr>
+            <a:r>
+              <a:rPr sz="1350" dirty="0">
                 <a:solidFill>
                   <a:srgbClr val="FFFFFF"/>
                 </a:solidFill>
@@ -10361,6 +11494,7 @@
           <a:lstStyle/>
           <a:p>
             <a:pPr algn="ctr"/>
+            <a:endParaRPr/>
           </a:p>
         </p:txBody>
       </p:sp>
@@ -10381,7 +11515,7 @@
           <a:noFill/>
         </p:spPr>
         <p:txBody>
-          <a:bodyPr wrap="square" lIns="0" rIns="0" tIns="0" bIns="0">
+          <a:bodyPr wrap="square" lIns="0" tIns="0" rIns="0" bIns="0">
             <a:spAutoFit/>
           </a:bodyPr>
           <a:lstStyle/>
@@ -10516,7 +11650,7 @@
           <a:noFill/>
         </p:spPr>
         <p:txBody>
-          <a:bodyPr wrap="square" lIns="0" rIns="0" tIns="0">
+          <a:bodyPr wrap="square" lIns="0" tIns="0" rIns="0">
             <a:spAutoFit/>
           </a:bodyPr>
           <a:lstStyle/>
@@ -10561,7 +11695,7 @@
           <a:lstStyle/>
           <a:p>
             <a:r>
-              <a:rPr sz="1200" i="1">
+              <a:rPr sz="1200" i="1" dirty="0">
                 <a:solidFill>
                   <a:srgbClr val="B8C0CC"/>
                 </a:solidFill>
@@ -10580,8 +11714,8 @@
 </p:sld>
 </file>
 
-<file path=ppt/slides/slide14.xml><?xml version="1.0" encoding="utf-8"?>
-<p:sld xmlns:a="http://schemas.openxmlformats.org/drawingml/2006/main" xmlns:p="http://schemas.openxmlformats.org/presentationml/2006/main" xmlns:r="http://schemas.openxmlformats.org/officeDocument/2006/relationships">
+<file path=ppt/slides/slide16.xml><?xml version="1.0" encoding="utf-8"?>
+<p:sld xmlns:a="http://schemas.openxmlformats.org/drawingml/2006/main" xmlns:r="http://schemas.openxmlformats.org/officeDocument/2006/relationships" xmlns:p="http://schemas.openxmlformats.org/presentationml/2006/main">
   <p:cSld>
     <p:spTree>
       <p:nvGrpSpPr>
@@ -10589,7 +11723,14 @@
         <p:cNvGrpSpPr/>
         <p:nvPr/>
       </p:nvGrpSpPr>
-      <p:grpSpPr/>
+      <p:grpSpPr>
+        <a:xfrm>
+          <a:off x="0" y="0"/>
+          <a:ext cx="0" cy="0"/>
+          <a:chOff x="0" y="0"/>
+          <a:chExt cx="0" cy="0"/>
+        </a:xfrm>
+      </p:grpSpPr>
       <p:sp>
         <p:nvSpPr>
           <p:cNvPr id="2" name="Title 1"/>
@@ -10645,7 +11786,7 @@
                   <a:srgbClr val="82C7A5"/>
                 </a:solidFill>
                 <a:latin typeface="Consolas"/>
-                <a:hlinkClick r:id="rId2"/>
+                <a:hlinkClick r:id="rId3"/>
               </a:rPr>
               <a:t>http://localhost:8501</a:t>
             </a:r>
@@ -10660,8 +11801,8 @@
 </p:sld>
 </file>
 
-<file path=ppt/slides/slide15.xml><?xml version="1.0" encoding="utf-8"?>
-<p:sld xmlns:a="http://schemas.openxmlformats.org/drawingml/2006/main" xmlns:p="http://schemas.openxmlformats.org/presentationml/2006/main" xmlns:r="http://schemas.openxmlformats.org/officeDocument/2006/relationships">
+<file path=ppt/slides/slide17.xml><?xml version="1.0" encoding="utf-8"?>
+<p:sld xmlns:a="http://schemas.openxmlformats.org/drawingml/2006/main" xmlns:r="http://schemas.openxmlformats.org/officeDocument/2006/relationships" xmlns:p="http://schemas.openxmlformats.org/presentationml/2006/main">
   <p:cSld>
     <p:spTree>
       <p:nvGrpSpPr>
@@ -10669,7 +11810,14 @@
         <p:cNvGrpSpPr/>
         <p:nvPr/>
       </p:nvGrpSpPr>
-      <p:grpSpPr/>
+      <p:grpSpPr>
+        <a:xfrm>
+          <a:off x="0" y="0"/>
+          <a:ext cx="0" cy="0"/>
+          <a:chOff x="0" y="0"/>
+          <a:chExt cx="0" cy="0"/>
+        </a:xfrm>
+      </p:grpSpPr>
       <p:sp>
         <p:nvSpPr>
           <p:cNvPr id="2" name="Title 1"/>
@@ -10706,7 +11854,7 @@
         <p:spPr>
           <a:xfrm>
             <a:off x="411480" y="1143000"/>
-            <a:ext cx="8321040" cy="3634740"/>
+            <a:ext cx="8321040" cy="2372444"/>
           </a:xfrm>
           <a:prstGeom prst="rect">
             <a:avLst/>
@@ -10714,7 +11862,7 @@
           <a:noFill/>
         </p:spPr>
         <p:txBody>
-          <a:bodyPr wrap="square" lIns="0" rIns="0" tIns="0">
+          <a:bodyPr wrap="square" lIns="0" tIns="0" rIns="0">
             <a:spAutoFit/>
           </a:bodyPr>
           <a:lstStyle/>
@@ -10724,8 +11872,21 @@
                 <a:spcPts val="1700"/>
               </a:spcAft>
             </a:pPr>
-            <a:r>
-              <a:rPr b="1" sz="1350">
+            <a:endParaRPr lang="pt-PT" sz="1350" b="1" dirty="0">
+              <a:solidFill>
+                <a:srgbClr val="82C7A5"/>
+              </a:solidFill>
+              <a:latin typeface="Montserrat"/>
+            </a:endParaRPr>
+          </a:p>
+          <a:p>
+            <a:pPr>
+              <a:spcAft>
+                <a:spcPts val="1700"/>
+              </a:spcAft>
+            </a:pPr>
+            <a:r>
+              <a:rPr sz="1350" b="1" dirty="0">
                 <a:solidFill>
                   <a:srgbClr val="82C7A5"/>
                 </a:solidFill>
@@ -10734,7 +11895,7 @@
               <a:t>The LLM routes, it does not calculate.  </a:t>
             </a:r>
             <a:r>
-              <a:rPr sz="1350">
+              <a:rPr sz="1350" dirty="0">
                 <a:solidFill>
                   <a:srgbClr val="FFFFFF"/>
                 </a:solidFill>
@@ -10750,7 +11911,7 @@
               </a:spcAft>
             </a:pPr>
             <a:r>
-              <a:rPr b="1" sz="1350">
+              <a:rPr sz="1350" b="1" dirty="0">
                 <a:solidFill>
                   <a:srgbClr val="82C7A5"/>
                 </a:solidFill>
@@ -10759,7 +11920,7 @@
               <a:t>Querying is not committing.  </a:t>
             </a:r>
             <a:r>
-              <a:rPr sz="1350">
+              <a:rPr sz="1350" dirty="0">
                 <a:solidFill>
                   <a:srgbClr val="FFFFFF"/>
                 </a:solidFill>
@@ -10775,7 +11936,7 @@
               </a:spcAft>
             </a:pPr>
             <a:r>
-              <a:rPr b="1" sz="1350">
+              <a:rPr sz="1350" b="1" dirty="0">
                 <a:solidFill>
                   <a:srgbClr val="82C7A5"/>
                 </a:solidFill>
@@ -10784,7 +11945,7 @@
               <a:t>Chat plus a confirmation form.  </a:t>
             </a:r>
             <a:r>
-              <a:rPr sz="1350">
+              <a:rPr sz="1350" dirty="0">
                 <a:solidFill>
                   <a:srgbClr val="FFFFFF"/>
                 </a:solidFill>
@@ -10800,7 +11961,7 @@
               </a:spcAft>
             </a:pPr>
             <a:r>
-              <a:rPr b="1" sz="1350">
+              <a:rPr sz="1350" b="1" dirty="0">
                 <a:solidFill>
                   <a:srgbClr val="82C7A5"/>
                 </a:solidFill>
@@ -10809,7 +11970,7 @@
               <a:t>Functions extracted to a module.  </a:t>
             </a:r>
             <a:r>
-              <a:rPr sz="1350">
+              <a:rPr sz="1350" dirty="0">
                 <a:solidFill>
                   <a:srgbClr val="FFFFFF"/>
                 </a:solidFill>
@@ -10828,8 +11989,8 @@
 </p:sld>
 </file>
 
-<file path=ppt/slides/slide16.xml><?xml version="1.0" encoding="utf-8"?>
-<p:sld xmlns:a="http://schemas.openxmlformats.org/drawingml/2006/main" xmlns:p="http://schemas.openxmlformats.org/presentationml/2006/main" xmlns:r="http://schemas.openxmlformats.org/officeDocument/2006/relationships">
+<file path=ppt/slides/slide18.xml><?xml version="1.0" encoding="utf-8"?>
+<p:sld xmlns:a="http://schemas.openxmlformats.org/drawingml/2006/main" xmlns:r="http://schemas.openxmlformats.org/officeDocument/2006/relationships" xmlns:p="http://schemas.openxmlformats.org/presentationml/2006/main">
   <p:cSld>
     <p:spTree>
       <p:nvGrpSpPr>
@@ -10837,7 +11998,14 @@
         <p:cNvGrpSpPr/>
         <p:nvPr/>
       </p:nvGrpSpPr>
-      <p:grpSpPr/>
+      <p:grpSpPr>
+        <a:xfrm>
+          <a:off x="0" y="0"/>
+          <a:ext cx="0" cy="0"/>
+          <a:chOff x="0" y="0"/>
+          <a:chExt cx="0" cy="0"/>
+        </a:xfrm>
+      </p:grpSpPr>
       <p:sp>
         <p:nvSpPr>
           <p:cNvPr id="2" name="Title 1"/>
@@ -10882,7 +12050,7 @@
           <a:noFill/>
         </p:spPr>
         <p:txBody>
-          <a:bodyPr wrap="square" lIns="0" rIns="0" tIns="0">
+          <a:bodyPr wrap="square" lIns="0" tIns="0" rIns="0">
             <a:spAutoFit/>
           </a:bodyPr>
           <a:lstStyle/>
@@ -10960,8 +12128,8 @@
 </p:sld>
 </file>
 
-<file path=ppt/slides/slide17.xml><?xml version="1.0" encoding="utf-8"?>
-<p:sld xmlns:a="http://schemas.openxmlformats.org/drawingml/2006/main" xmlns:p="http://schemas.openxmlformats.org/presentationml/2006/main" xmlns:r="http://schemas.openxmlformats.org/officeDocument/2006/relationships">
+<file path=ppt/slides/slide19.xml><?xml version="1.0" encoding="utf-8"?>
+<p:sld xmlns:a="http://schemas.openxmlformats.org/drawingml/2006/main" xmlns:r="http://schemas.openxmlformats.org/officeDocument/2006/relationships" xmlns:p="http://schemas.openxmlformats.org/presentationml/2006/main">
   <p:cSld>
     <p:spTree>
       <p:nvGrpSpPr>
@@ -10969,7 +12137,14 @@
         <p:cNvGrpSpPr/>
         <p:nvPr/>
       </p:nvGrpSpPr>
-      <p:grpSpPr/>
+      <p:grpSpPr>
+        <a:xfrm>
+          <a:off x="0" y="0"/>
+          <a:ext cx="0" cy="0"/>
+          <a:chOff x="0" y="0"/>
+          <a:chExt cx="0" cy="0"/>
+        </a:xfrm>
+      </p:grpSpPr>
       <p:sp>
         <p:nvSpPr>
           <p:cNvPr id="2" name="Title 1"/>
@@ -10992,7 +12167,7 @@
                 </a:solidFill>
                 <a:latin typeface="Montserrat"/>
               </a:rPr>
-              <a:t>Next Steps</a:t>
+              <a:t>Future</a:t>
             </a:r>
           </a:p>
         </p:txBody>
@@ -11005,8 +12180,8 @@
         </p:nvSpPr>
         <p:spPr>
           <a:xfrm>
-            <a:off x="411480" y="1143000"/>
-            <a:ext cx="8321040" cy="3634740"/>
+            <a:off x="411480" y="1097280"/>
+            <a:ext cx="8321040" cy="2010807"/>
           </a:xfrm>
           <a:prstGeom prst="rect">
             <a:avLst/>
@@ -11014,109 +12189,101 @@
           <a:noFill/>
         </p:spPr>
         <p:txBody>
-          <a:bodyPr wrap="square" lIns="0" rIns="0" tIns="0">
+          <a:bodyPr wrap="square" lIns="0" tIns="0" rIns="0">
             <a:spAutoFit/>
           </a:bodyPr>
           <a:lstStyle/>
           <a:p>
             <a:pPr>
               <a:spcAft>
-                <a:spcPts val="1500"/>
+                <a:spcPts val="1400"/>
               </a:spcAft>
             </a:pPr>
-            <a:r>
-              <a:rPr b="1" sz="1300">
-                <a:solidFill>
-                  <a:srgbClr val="82C7A5"/>
+            <a:endParaRPr lang="pt-PT" sz="1350" dirty="0">
+              <a:solidFill>
+                <a:srgbClr val="FFFFFF"/>
+              </a:solidFill>
+              <a:latin typeface="Montserrat"/>
+            </a:endParaRPr>
+          </a:p>
+          <a:p>
+            <a:pPr>
+              <a:spcAft>
+                <a:spcPts val="1400"/>
+              </a:spcAft>
+            </a:pPr>
+            <a:r>
+              <a:rPr sz="1350" dirty="0">
+                <a:solidFill>
+                  <a:srgbClr val="FFFFFF"/>
                 </a:solidFill>
                 <a:latin typeface="Montserrat"/>
               </a:rPr>
-              <a:t>Sales history  </a:t>
-            </a:r>
-            <a:r>
-              <a:rPr sz="1300">
+              <a:t>Cover every location and every product type, not just footwear in six stores.</a:t>
+            </a:r>
+          </a:p>
+          <a:p>
+            <a:pPr>
+              <a:spcAft>
+                <a:spcPts val="1400"/>
+              </a:spcAft>
+            </a:pPr>
+            <a:r>
+              <a:rPr sz="1350" dirty="0">
                 <a:solidFill>
                   <a:srgbClr val="FFFFFF"/>
                 </a:solidFill>
                 <a:latin typeface="Montserrat"/>
               </a:rPr>
-              <a:t>— turn "which sizes are missing" into "how many to send", based on what each store actually sells.</a:t>
+              <a:t>Add sales files, so the system can predict how many units and which references are worth sending.</a:t>
             </a:r>
           </a:p>
           <a:p>
             <a:pPr>
               <a:spcAft>
-                <a:spcPts val="1500"/>
+                <a:spcPts val="1400"/>
               </a:spcAft>
             </a:pPr>
             <a:r>
-              <a:rPr b="1" sz="1300">
-                <a:solidFill>
-                  <a:srgbClr val="82C7A5"/>
+              <a:rPr sz="1350" dirty="0">
+                <a:solidFill>
+                  <a:srgbClr val="FFFFFF"/>
                 </a:solidFill>
                 <a:latin typeface="Montserrat"/>
               </a:rPr>
-              <a:t>Persistence  </a:t>
-            </a:r>
-            <a:r>
-              <a:rPr sz="1300">
+              <a:t>Allow store-to-store transfers: a size sitting dead in one store may be selling in another.</a:t>
+            </a:r>
+          </a:p>
+          <a:p>
+            <a:pPr>
+              <a:spcAft>
+                <a:spcPts val="1400"/>
+              </a:spcAft>
+            </a:pPr>
+            <a:r>
+              <a:rPr sz="1350" dirty="0">
                 <a:solidFill>
                   <a:srgbClr val="FFFFFF"/>
                 </a:solidFill>
                 <a:latin typeface="Montserrat"/>
               </a:rPr>
-              <a:t>— a small database so allocations survive between sessions and become an auditable record.</a:t>
-            </a:r>
-          </a:p>
-          <a:p>
-            <a:pPr>
-              <a:spcAft>
-                <a:spcPts val="1500"/>
-              </a:spcAft>
-            </a:pPr>
-            <a:r>
-              <a:rPr b="1" sz="1300">
-                <a:solidFill>
-                  <a:srgbClr val="82C7A5"/>
+              <a:t>Accept stock files from any </a:t>
+            </a:r>
+            <a:r>
+              <a:rPr lang="pt-PT" sz="1350" dirty="0">
+                <a:solidFill>
+                  <a:srgbClr val="FFFFFF"/>
                 </a:solidFill>
                 <a:latin typeface="Montserrat"/>
               </a:rPr>
-              <a:t>Store-to-store transfers  </a:t>
-            </a:r>
-            <a:r>
-              <a:rPr sz="1300">
-                <a:solidFill>
-                  <a:srgbClr val="FFFFFF"/>
-                </a:solidFill>
-                <a:latin typeface="Montserrat"/>
-              </a:rPr>
-              <a:t>— HQ is not the only source; a size sitting dead in one store may be selling in another.</a:t>
-            </a:r>
-          </a:p>
-          <a:p>
-            <a:pPr>
-              <a:spcAft>
-                <a:spcPts val="1500"/>
-              </a:spcAft>
-            </a:pPr>
-            <a:r>
-              <a:rPr b="1" sz="1300">
-                <a:solidFill>
-                  <a:srgbClr val="82C7A5"/>
-                </a:solidFill>
-                <a:latin typeface="Montserrat"/>
-              </a:rPr>
-              <a:t>Barcode scanning  </a:t>
-            </a:r>
-            <a:r>
-              <a:rPr sz="1300">
-                <a:solidFill>
-                  <a:srgbClr val="FFFFFF"/>
-                </a:solidFill>
-                <a:latin typeface="Montserrat"/>
-              </a:rPr>
-              <a:t>— close the loop by confirming what was physically picked.</a:t>
-            </a:r>
+              <a:t>date</a:t>
+            </a:r>
+            <a:endParaRPr sz="1350" dirty="0">
+              <a:solidFill>
+                <a:srgbClr val="FFFFFF"/>
+              </a:solidFill>
+              <a:latin typeface="Montserrat"/>
+            </a:endParaRPr>
           </a:p>
         </p:txBody>
       </p:sp>
@@ -11128,8 +12295,8 @@
 </p:sld>
 </file>
 
-<file path=ppt/slides/slide18.xml><?xml version="1.0" encoding="utf-8"?>
-<p:sld xmlns:a="http://schemas.openxmlformats.org/drawingml/2006/main" xmlns:p="http://schemas.openxmlformats.org/presentationml/2006/main" xmlns:r="http://schemas.openxmlformats.org/officeDocument/2006/relationships">
+<file path=ppt/slides/slide2.xml><?xml version="1.0" encoding="utf-8"?>
+<p:sld xmlns:a="http://schemas.openxmlformats.org/drawingml/2006/main" xmlns:r="http://schemas.openxmlformats.org/officeDocument/2006/relationships" xmlns:p="http://schemas.openxmlformats.org/presentationml/2006/main">
   <p:cSld>
     <p:spTree>
       <p:nvGrpSpPr>
@@ -11137,7 +12304,248 @@
         <p:cNvGrpSpPr/>
         <p:nvPr/>
       </p:nvGrpSpPr>
-      <p:grpSpPr/>
+      <p:grpSpPr>
+        <a:xfrm>
+          <a:off x="0" y="0"/>
+          <a:ext cx="0" cy="0"/>
+          <a:chOff x="0" y="0"/>
+          <a:chExt cx="0" cy="0"/>
+        </a:xfrm>
+      </p:grpSpPr>
+      <p:sp>
+        <p:nvSpPr>
+          <p:cNvPr id="2" name="Title 1"/>
+          <p:cNvSpPr>
+            <a:spLocks noGrp="1"/>
+          </p:cNvSpPr>
+          <p:nvPr>
+            <p:ph type="title"/>
+          </p:nvPr>
+        </p:nvSpPr>
+        <p:spPr/>
+        <p:txBody>
+          <a:bodyPr/>
+          <a:lstStyle/>
+          <a:p>
+            <a:r>
+              <a:rPr sz="2800" b="1">
+                <a:solidFill>
+                  <a:srgbClr val="FFFFFF"/>
+                </a:solidFill>
+                <a:latin typeface="Montserrat"/>
+              </a:rPr>
+              <a:t>What? Why?</a:t>
+            </a:r>
+          </a:p>
+        </p:txBody>
+      </p:sp>
+      <p:sp>
+        <p:nvSpPr>
+          <p:cNvPr id="3" name="TextBox 2"/>
+          <p:cNvSpPr txBox="1"/>
+          <p:nvPr/>
+        </p:nvSpPr>
+        <p:spPr>
+          <a:xfrm>
+            <a:off x="411480" y="985583"/>
+            <a:ext cx="8321040" cy="687368"/>
+          </a:xfrm>
+          <a:prstGeom prst="rect">
+            <a:avLst/>
+          </a:prstGeom>
+          <a:noFill/>
+        </p:spPr>
+        <p:txBody>
+          <a:bodyPr wrap="square" lIns="0" tIns="0" rIns="0">
+            <a:spAutoFit/>
+          </a:bodyPr>
+          <a:lstStyle/>
+          <a:p>
+            <a:pPr>
+              <a:spcAft>
+                <a:spcPts val="1400"/>
+              </a:spcAft>
+            </a:pPr>
+            <a:endParaRPr lang="pt-PT" sz="1500" dirty="0">
+              <a:solidFill>
+                <a:srgbClr val="FFFFFF"/>
+              </a:solidFill>
+              <a:latin typeface="Montserrat"/>
+            </a:endParaRPr>
+          </a:p>
+          <a:p>
+            <a:pPr>
+              <a:spcAft>
+                <a:spcPts val="1400"/>
+              </a:spcAft>
+            </a:pPr>
+            <a:r>
+              <a:rPr sz="1500" dirty="0">
+                <a:solidFill>
+                  <a:srgbClr val="FFFFFF"/>
+                </a:solidFill>
+                <a:latin typeface="Montserrat"/>
+              </a:rPr>
+              <a:t>I wanted to build something I would actually use, not a dataset exercise.</a:t>
+            </a:r>
+          </a:p>
+        </p:txBody>
+      </p:sp>
+      <p:sp>
+        <p:nvSpPr>
+          <p:cNvPr id="4" name="TextBox 3"/>
+          <p:cNvSpPr txBox="1"/>
+          <p:nvPr/>
+        </p:nvSpPr>
+        <p:spPr>
+          <a:xfrm>
+            <a:off x="411480" y="2034259"/>
+            <a:ext cx="8321040" cy="2123658"/>
+          </a:xfrm>
+          <a:prstGeom prst="rect">
+            <a:avLst/>
+          </a:prstGeom>
+          <a:noFill/>
+        </p:spPr>
+        <p:txBody>
+          <a:bodyPr wrap="square" lIns="0" tIns="0" rIns="0">
+            <a:spAutoFit/>
+          </a:bodyPr>
+          <a:lstStyle/>
+          <a:p>
+            <a:pPr>
+              <a:spcAft>
+                <a:spcPts val="1800"/>
+              </a:spcAft>
+            </a:pPr>
+            <a:r>
+              <a:rPr lang="pt-PT" sz="1500" dirty="0" err="1">
+                <a:solidFill>
+                  <a:srgbClr val="FFFFFF"/>
+                </a:solidFill>
+                <a:latin typeface="Montserrat"/>
+              </a:rPr>
+              <a:t>Work</a:t>
+            </a:r>
+            <a:r>
+              <a:rPr lang="pt-PT" sz="1500" dirty="0">
+                <a:solidFill>
+                  <a:srgbClr val="FFFFFF"/>
+                </a:solidFill>
+                <a:latin typeface="Montserrat"/>
+              </a:rPr>
+              <a:t> </a:t>
+            </a:r>
+            <a:r>
+              <a:rPr lang="pt-PT" sz="1500" dirty="0" err="1">
+                <a:solidFill>
+                  <a:srgbClr val="FFFFFF"/>
+                </a:solidFill>
+                <a:latin typeface="Montserrat"/>
+              </a:rPr>
+              <a:t>flow</a:t>
+            </a:r>
+            <a:r>
+              <a:rPr lang="pt-PT" sz="1500" dirty="0">
+                <a:solidFill>
+                  <a:srgbClr val="FFFFFF"/>
+                </a:solidFill>
+                <a:latin typeface="Montserrat"/>
+              </a:rPr>
+              <a:t>:</a:t>
+            </a:r>
+          </a:p>
+          <a:p>
+            <a:pPr>
+              <a:spcAft>
+                <a:spcPts val="1800"/>
+              </a:spcAft>
+            </a:pPr>
+            <a:r>
+              <a:rPr sz="1500" dirty="0">
+                <a:solidFill>
+                  <a:srgbClr val="FFFFFF"/>
+                </a:solidFill>
+                <a:latin typeface="Montserrat"/>
+              </a:rPr>
+              <a:t>Export the stock file, tidy the data, compare store against warehouse. Every time.</a:t>
+            </a:r>
+          </a:p>
+          <a:p>
+            <a:pPr>
+              <a:spcAft>
+                <a:spcPts val="1800"/>
+              </a:spcAft>
+            </a:pPr>
+            <a:r>
+              <a:rPr sz="1500" dirty="0">
+                <a:solidFill>
+                  <a:srgbClr val="FFFFFF"/>
+                </a:solidFill>
+                <a:latin typeface="Montserrat"/>
+              </a:rPr>
+              <a:t>Sizes missing on the shelf, while the same size sat in the warehouse.</a:t>
+            </a:r>
+          </a:p>
+          <a:p>
+            <a:pPr>
+              <a:spcAft>
+                <a:spcPts val="1800"/>
+              </a:spcAft>
+            </a:pPr>
+            <a:r>
+              <a:rPr sz="1500" dirty="0">
+                <a:solidFill>
+                  <a:srgbClr val="FFFFFF"/>
+                </a:solidFill>
+                <a:latin typeface="Montserrat"/>
+              </a:rPr>
+              <a:t>Checking took long enough that nobody checked often.</a:t>
+            </a:r>
+          </a:p>
+          <a:p>
+            <a:pPr>
+              <a:spcAft>
+                <a:spcPts val="1800"/>
+              </a:spcAft>
+            </a:pPr>
+            <a:r>
+              <a:rPr sz="1500" dirty="0">
+                <a:solidFill>
+                  <a:srgbClr val="FFFFFF"/>
+                </a:solidFill>
+                <a:latin typeface="Montserrat"/>
+              </a:rPr>
+              <a:t>No easy way to know what had already been sent somewhere else.</a:t>
+            </a:r>
+          </a:p>
+        </p:txBody>
+      </p:sp>
+    </p:spTree>
+  </p:cSld>
+  <p:clrMapOvr>
+    <a:masterClrMapping/>
+  </p:clrMapOvr>
+</p:sld>
+</file>
+
+<file path=ppt/slides/slide20.xml><?xml version="1.0" encoding="utf-8"?>
+<p:sld xmlns:a="http://schemas.openxmlformats.org/drawingml/2006/main" xmlns:r="http://schemas.openxmlformats.org/officeDocument/2006/relationships" xmlns:p="http://schemas.openxmlformats.org/presentationml/2006/main">
+  <p:cSld>
+    <p:spTree>
+      <p:nvGrpSpPr>
+        <p:cNvPr id="1" name=""/>
+        <p:cNvGrpSpPr/>
+        <p:nvPr/>
+      </p:nvGrpSpPr>
+      <p:grpSpPr>
+        <a:xfrm>
+          <a:off x="0" y="0"/>
+          <a:ext cx="0" cy="0"/>
+          <a:chOff x="0" y="0"/>
+          <a:chExt cx="0" cy="0"/>
+        </a:xfrm>
+      </p:grpSpPr>
       <p:sp>
         <p:nvSpPr>
           <p:cNvPr id="2" name="Title 1"/>
@@ -11223,8 +12631,8 @@
 </p:sld>
 </file>
 
-<file path=ppt/slides/slide2.xml><?xml version="1.0" encoding="utf-8"?>
-<p:sld xmlns:a="http://schemas.openxmlformats.org/drawingml/2006/main" xmlns:p="http://schemas.openxmlformats.org/presentationml/2006/main" xmlns:r="http://schemas.openxmlformats.org/officeDocument/2006/relationships">
+<file path=ppt/slides/slide3.xml><?xml version="1.0" encoding="utf-8"?>
+<p:sld xmlns:a="http://schemas.openxmlformats.org/drawingml/2006/main" xmlns:r="http://schemas.openxmlformats.org/officeDocument/2006/relationships" xmlns:p="http://schemas.openxmlformats.org/presentationml/2006/main">
   <p:cSld>
     <p:spTree>
       <p:nvGrpSpPr>
@@ -11232,7 +12640,14 @@
         <p:cNvGrpSpPr/>
         <p:nvPr/>
       </p:nvGrpSpPr>
-      <p:grpSpPr/>
+      <p:grpSpPr>
+        <a:xfrm>
+          <a:off x="0" y="0"/>
+          <a:ext cx="0" cy="0"/>
+          <a:chOff x="0" y="0"/>
+          <a:chExt cx="0" cy="0"/>
+        </a:xfrm>
+      </p:grpSpPr>
       <p:sp>
         <p:nvSpPr>
           <p:cNvPr id="2" name="Title 1"/>
@@ -11243,19 +12658,26 @@
             <p:ph type="title"/>
           </p:nvPr>
         </p:nvSpPr>
-        <p:spPr/>
+        <p:spPr>
+          <a:xfrm>
+            <a:off x="311700" y="445025"/>
+            <a:ext cx="8520600" cy="503242"/>
+          </a:xfrm>
+        </p:spPr>
         <p:txBody>
-          <a:bodyPr/>
+          <a:bodyPr>
+            <a:normAutofit fontScale="90000"/>
+          </a:bodyPr>
           <a:lstStyle/>
           <a:p>
             <a:r>
-              <a:rPr sz="2800" b="1">
+              <a:rPr sz="2800" b="1" dirty="0">
                 <a:solidFill>
                   <a:srgbClr val="FFFFFF"/>
                 </a:solidFill>
                 <a:latin typeface="Montserrat"/>
               </a:rPr>
-              <a:t>The Problem</a:t>
+              <a:t>Objectives</a:t>
             </a:r>
           </a:p>
         </p:txBody>
@@ -11268,8 +12690,8 @@
         </p:nvSpPr>
         <p:spPr>
           <a:xfrm>
-            <a:off x="411480" y="1051560"/>
-            <a:ext cx="8321040" cy="3726179"/>
+            <a:off x="411480" y="1096060"/>
+            <a:ext cx="8321040" cy="3223260"/>
           </a:xfrm>
           <a:prstGeom prst="rect">
             <a:avLst/>
@@ -11277,116 +12699,92 @@
           <a:noFill/>
         </p:spPr>
         <p:txBody>
-          <a:bodyPr wrap="square" lIns="0" rIns="0" tIns="0">
+          <a:bodyPr wrap="square" lIns="0" tIns="0" rIns="0">
             <a:spAutoFit/>
           </a:bodyPr>
           <a:lstStyle/>
           <a:p>
             <a:pPr>
               <a:spcAft>
-                <a:spcPts val="1400"/>
+                <a:spcPts val="2400"/>
               </a:spcAft>
             </a:pPr>
             <a:r>
-              <a:rPr sz="1500">
+              <a:rPr sz="1700" dirty="0">
                 <a:solidFill>
                   <a:srgbClr val="FFFFFF"/>
                 </a:solidFill>
                 <a:latin typeface="Montserrat"/>
               </a:rPr>
-              <a:t>A retail chain holds stock in a central warehouse (HQ) and in its stores.</a:t>
+              <a:t>Do the work automatically, instead of by hand.</a:t>
             </a:r>
           </a:p>
           <a:p>
             <a:pPr>
               <a:spcAft>
-                <a:spcPts val="1400"/>
+                <a:spcPts val="2400"/>
               </a:spcAft>
             </a:pPr>
             <a:r>
-              <a:rPr sz="1500">
+              <a:rPr sz="1700" dirty="0">
                 <a:solidFill>
                   <a:srgbClr val="FFFFFF"/>
                 </a:solidFill>
                 <a:latin typeface="Montserrat"/>
               </a:rPr>
-              <a:t>When a store runs out of a size, someone has to check HQ manually, decide what is worth sending, and write a picking list by hand.</a:t>
+              <a:t>Answer stock questions by talking to it.</a:t>
             </a:r>
           </a:p>
           <a:p>
             <a:pPr>
               <a:spcAft>
-                <a:spcPts val="1400"/>
+                <a:spcPts val="2400"/>
               </a:spcAft>
             </a:pPr>
             <a:r>
-              <a:rPr sz="1500">
+              <a:rPr sz="1700" dirty="0">
                 <a:solidFill>
                   <a:srgbClr val="FFFFFF"/>
                 </a:solidFill>
                 <a:latin typeface="Montserrat"/>
               </a:rPr>
-              <a:t>That check is slow, easy to get wrong, and nobody does it often enough.</a:t>
+              <a:t>Find the sizes a store is missing.</a:t>
+            </a:r>
+          </a:p>
+          <a:p>
+            <a:pPr>
+              <a:spcAft>
+                <a:spcPts val="2400"/>
+              </a:spcAft>
+            </a:pPr>
+            <a:r>
+              <a:rPr sz="1700" dirty="0">
+                <a:solidFill>
+                  <a:srgbClr val="FFFFFF"/>
+                </a:solidFill>
+                <a:latin typeface="Montserrat"/>
+              </a:rPr>
+              <a:t>Create a picking list ready to print.</a:t>
             </a:r>
           </a:p>
         </p:txBody>
       </p:sp>
       <p:sp>
         <p:nvSpPr>
-          <p:cNvPr id="4" name="Rounded Rectangle 3"/>
-          <p:cNvSpPr/>
+          <p:cNvPr id="5" name="TextBox 4">
+            <a:extLst>
+              <a:ext uri="{FF2B5EF4-FFF2-40B4-BE49-F238E27FC236}">
+                <a16:creationId xmlns:a16="http://schemas.microsoft.com/office/drawing/2014/main" id="{73362C46-F23B-CF67-7314-8FCFFE4BCD26}"/>
+              </a:ext>
+            </a:extLst>
+          </p:cNvPr>
+          <p:cNvSpPr txBox="1"/>
           <p:nvPr/>
         </p:nvSpPr>
         <p:spPr>
           <a:xfrm>
-            <a:off x="411480" y="2880360"/>
-            <a:ext cx="8321040" cy="612647"/>
-          </a:xfrm>
-          <a:prstGeom prst="roundRect">
-            <a:avLst>
-              <a:gd name="adj" fmla="val 4000"/>
-            </a:avLst>
-          </a:prstGeom>
-          <a:solidFill>
-            <a:srgbClr val="121720"/>
-          </a:solidFill>
-          <a:ln>
-            <a:noFill/>
-          </a:ln>
-          <a:effectLst/>
-        </p:spPr>
-        <p:style>
-          <a:lnRef idx="1">
-            <a:schemeClr val="accent1"/>
-          </a:lnRef>
-          <a:fillRef idx="3">
-            <a:schemeClr val="accent1"/>
-          </a:fillRef>
-          <a:effectRef idx="2">
-            <a:schemeClr val="accent1"/>
-          </a:effectRef>
-          <a:fontRef idx="minor">
-            <a:schemeClr val="lt1"/>
-          </a:fontRef>
-        </p:style>
-        <p:txBody>
-          <a:bodyPr rtlCol="0" anchor="ctr"/>
-          <a:lstStyle/>
-          <a:p>
-            <a:pPr algn="ctr"/>
-          </a:p>
-        </p:txBody>
-      </p:sp>
-      <p:sp>
-        <p:nvSpPr>
-          <p:cNvPr id="5" name="TextBox 4"/>
-          <p:cNvSpPr txBox="1"/>
-          <p:nvPr/>
-        </p:nvSpPr>
-        <p:spPr>
-          <a:xfrm>
-            <a:off x="576072" y="2990088"/>
-            <a:ext cx="7991856" cy="393191"/>
+            <a:off x="411480" y="3657600"/>
+            <a:ext cx="8321040" cy="661720"/>
           </a:xfrm>
           <a:prstGeom prst="rect">
             <a:avLst/>
@@ -11394,217 +12792,24 @@
           <a:noFill/>
         </p:spPr>
         <p:txBody>
-          <a:bodyPr wrap="square" lIns="0" rIns="0" tIns="0" bIns="0">
+          <a:bodyPr wrap="square" lIns="0" tIns="0" rIns="0">
             <a:spAutoFit/>
           </a:bodyPr>
           <a:lstStyle/>
           <a:p>
-            <a:pPr algn="l">
-              <a:spcAft>
-                <a:spcPts val="0"/>
+            <a:pPr algn="ctr">
+              <a:spcAft>
+                <a:spcPts val="800"/>
               </a:spcAft>
             </a:pPr>
             <a:r>
-              <a:rPr sz="1100">
-                <a:solidFill>
-                  <a:srgbClr val="D6DEE8"/>
-                </a:solidFill>
-                <a:latin typeface="Consolas"/>
-              </a:rPr>
-              <a:t>Store manager:  "Do we have a 42 of this model anywhere?"</a:t>
-            </a:r>
-          </a:p>
-          <a:p>
-            <a:pPr algn="l">
-              <a:spcAft>
-                <a:spcPts val="0"/>
-              </a:spcAft>
-            </a:pPr>
-            <a:r>
-              <a:rPr sz="1100">
-                <a:solidFill>
-                  <a:srgbClr val="D6DEE8"/>
-                </a:solidFill>
-                <a:latin typeface="Consolas"/>
-              </a:rPr>
-              <a:t>Warehouse:      opens the stock file, filters, scrolls, guesses</a:t>
-            </a:r>
-          </a:p>
-        </p:txBody>
-      </p:sp>
-      <p:sp>
-        <p:nvSpPr>
-          <p:cNvPr id="6" name="TextBox 5"/>
-          <p:cNvSpPr txBox="1"/>
-          <p:nvPr/>
-        </p:nvSpPr>
-        <p:spPr>
-          <a:xfrm>
-            <a:off x="411480" y="3977639"/>
-            <a:ext cx="8321040" cy="457200"/>
-          </a:xfrm>
-          <a:prstGeom prst="rect">
-            <a:avLst/>
-          </a:prstGeom>
-          <a:noFill/>
-        </p:spPr>
-        <p:txBody>
-          <a:bodyPr wrap="square" lIns="0" tIns="0">
-            <a:spAutoFit/>
-          </a:bodyPr>
-          <a:lstStyle/>
-          <a:p>
-            <a:r>
-              <a:rPr sz="1200" i="1">
-                <a:solidFill>
-                  <a:srgbClr val="B8C0CC"/>
+              <a:rPr sz="2000" dirty="0">
+                <a:solidFill>
+                  <a:srgbClr val="82C7A5"/>
                 </a:solidFill>
                 <a:latin typeface="Montserrat"/>
               </a:rPr>
-              <a:t>I spent years in sports retail doing exactly this by hand.</a:t>
-            </a:r>
-          </a:p>
-        </p:txBody>
-      </p:sp>
-    </p:spTree>
-  </p:cSld>
-  <p:clrMapOvr>
-    <a:masterClrMapping/>
-  </p:clrMapOvr>
-</p:sld>
-</file>
-
-<file path=ppt/slides/slide3.xml><?xml version="1.0" encoding="utf-8"?>
-<p:sld xmlns:a="http://schemas.openxmlformats.org/drawingml/2006/main" xmlns:p="http://schemas.openxmlformats.org/presentationml/2006/main" xmlns:r="http://schemas.openxmlformats.org/officeDocument/2006/relationships">
-  <p:cSld>
-    <p:spTree>
-      <p:nvGrpSpPr>
-        <p:cNvPr id="1" name=""/>
-        <p:cNvGrpSpPr/>
-        <p:nvPr/>
-      </p:nvGrpSpPr>
-      <p:grpSpPr/>
-      <p:sp>
-        <p:nvSpPr>
-          <p:cNvPr id="2" name="Title 1"/>
-          <p:cNvSpPr>
-            <a:spLocks noGrp="1"/>
-          </p:cNvSpPr>
-          <p:nvPr>
-            <p:ph type="title"/>
-          </p:nvPr>
-        </p:nvSpPr>
-        <p:spPr/>
-        <p:txBody>
-          <a:bodyPr/>
-          <a:lstStyle/>
-          <a:p>
-            <a:r>
-              <a:rPr sz="2800" b="1">
-                <a:solidFill>
-                  <a:srgbClr val="FFFFFF"/>
-                </a:solidFill>
-                <a:latin typeface="Montserrat"/>
-              </a:rPr>
-              <a:t>Objectives</a:t>
-            </a:r>
-          </a:p>
-        </p:txBody>
-      </p:sp>
-      <p:sp>
-        <p:nvSpPr>
-          <p:cNvPr id="3" name="TextBox 2"/>
-          <p:cNvSpPr txBox="1"/>
-          <p:nvPr/>
-        </p:nvSpPr>
-        <p:spPr>
-          <a:xfrm>
-            <a:off x="411480" y="1371600"/>
-            <a:ext cx="8321040" cy="3406140"/>
-          </a:xfrm>
-          <a:prstGeom prst="rect">
-            <a:avLst/>
-          </a:prstGeom>
-          <a:noFill/>
-        </p:spPr>
-        <p:txBody>
-          <a:bodyPr wrap="square" lIns="0" rIns="0" tIns="0">
-            <a:spAutoFit/>
-          </a:bodyPr>
-          <a:lstStyle/>
-          <a:p>
-            <a:pPr>
-              <a:spcAft>
-                <a:spcPts val="2200"/>
-              </a:spcAft>
-            </a:pPr>
-            <a:r>
-              <a:rPr b="1" sz="1600">
-                <a:solidFill>
-                  <a:srgbClr val="82C7A5"/>
-                </a:solidFill>
-                <a:latin typeface="Montserrat"/>
-              </a:rPr>
-              <a:t>Answer stock questions in plain language  </a:t>
-            </a:r>
-            <a:r>
-              <a:rPr sz="1600">
-                <a:solidFill>
-                  <a:srgbClr val="FFFFFF"/>
-                </a:solidFill>
-                <a:latin typeface="Montserrat"/>
-              </a:rPr>
-              <a:t>— no filters, no training, no manual.</a:t>
-            </a:r>
-          </a:p>
-          <a:p>
-            <a:pPr>
-              <a:spcAft>
-                <a:spcPts val="2200"/>
-              </a:spcAft>
-            </a:pPr>
-            <a:r>
-              <a:rPr b="1" sz="1600">
-                <a:solidFill>
-                  <a:srgbClr val="82C7A5"/>
-                </a:solidFill>
-                <a:latin typeface="Montserrat"/>
-              </a:rPr>
-              <a:t>Find replenishable sizes automatically  </a:t>
-            </a:r>
-            <a:r>
-              <a:rPr sz="1600">
-                <a:solidFill>
-                  <a:srgbClr val="FFFFFF"/>
-                </a:solidFill>
-                <a:latin typeface="Montserrat"/>
-              </a:rPr>
-              <a:t>— what HQ has and the store does not.</a:t>
-            </a:r>
-          </a:p>
-          <a:p>
-            <a:pPr>
-              <a:spcAft>
-                <a:spcPts val="2200"/>
-              </a:spcAft>
-            </a:pPr>
-            <a:r>
-              <a:rPr b="1" sz="1600">
-                <a:solidFill>
-                  <a:srgbClr val="82C7A5"/>
-                </a:solidFill>
-                <a:latin typeface="Montserrat"/>
-              </a:rPr>
-              <a:t>Produce a printable picking document  </a:t>
-            </a:r>
-            <a:r>
-              <a:rPr sz="1600">
-                <a:solidFill>
-                  <a:srgbClr val="FFFFFF"/>
-                </a:solidFill>
-                <a:latin typeface="Montserrat"/>
-              </a:rPr>
-              <a:t>— ready for the warehouse team.</a:t>
+              <a:t>The idea: take a picture of the stock at a given moment, and let the system do the comparison.</a:t>
             </a:r>
           </a:p>
         </p:txBody>
@@ -11618,7 +12823,7 @@
 </file>
 
 <file path=ppt/slides/slide4.xml><?xml version="1.0" encoding="utf-8"?>
-<p:sld xmlns:a="http://schemas.openxmlformats.org/drawingml/2006/main" xmlns:p="http://schemas.openxmlformats.org/presentationml/2006/main" xmlns:r="http://schemas.openxmlformats.org/officeDocument/2006/relationships">
+<p:sld xmlns:a="http://schemas.openxmlformats.org/drawingml/2006/main" xmlns:r="http://schemas.openxmlformats.org/officeDocument/2006/relationships" xmlns:p="http://schemas.openxmlformats.org/presentationml/2006/main">
   <p:cSld>
     <p:spTree>
       <p:nvGrpSpPr>
@@ -11626,7 +12831,14 @@
         <p:cNvGrpSpPr/>
         <p:nvPr/>
       </p:nvGrpSpPr>
-      <p:grpSpPr/>
+      <p:grpSpPr>
+        <a:xfrm>
+          <a:off x="0" y="0"/>
+          <a:ext cx="0" cy="0"/>
+          <a:chOff x="0" y="0"/>
+          <a:chExt cx="0" cy="0"/>
+        </a:xfrm>
+      </p:grpSpPr>
       <p:sp>
         <p:nvSpPr>
           <p:cNvPr id="2" name="Title 1"/>
@@ -11662,8 +12874,8 @@
         </p:nvSpPr>
         <p:spPr>
           <a:xfrm>
-            <a:off x="411480" y="1005840"/>
-            <a:ext cx="8321040" cy="3771900"/>
+            <a:off x="411480" y="960120"/>
+            <a:ext cx="8321040" cy="3817620"/>
           </a:xfrm>
           <a:prstGeom prst="rect">
             <a:avLst/>
@@ -11671,7 +12883,7 @@
           <a:noFill/>
         </p:spPr>
         <p:txBody>
-          <a:bodyPr wrap="square" lIns="0" rIns="0" tIns="0">
+          <a:bodyPr wrap="square" lIns="0" tIns="0" rIns="0">
             <a:spAutoFit/>
           </a:bodyPr>
           <a:lstStyle/>
@@ -11688,21 +12900,60 @@
                 </a:solidFill>
                 <a:latin typeface="Montserrat"/>
               </a:rPr>
-              <a:t>A real stock snapshot from a footwear retailer — one row per brand, reference, size and location.</a:t>
+              <a:t>A real stock snapshot from a footwear retailer, one row per brand, reference, size and location.</a:t>
             </a:r>
           </a:p>
         </p:txBody>
       </p:sp>
       <p:sp>
         <p:nvSpPr>
-          <p:cNvPr id="4" name="Rounded Rectangle 3"/>
+          <p:cNvPr id="4" name="TextBox 3"/>
+          <p:cNvSpPr txBox="1"/>
+          <p:nvPr/>
+        </p:nvSpPr>
+        <p:spPr>
+          <a:xfrm>
+            <a:off x="411480" y="1554480"/>
+            <a:ext cx="8321040" cy="3223260"/>
+          </a:xfrm>
+          <a:prstGeom prst="rect">
+            <a:avLst/>
+          </a:prstGeom>
+          <a:noFill/>
+        </p:spPr>
+        <p:txBody>
+          <a:bodyPr wrap="square" lIns="0" tIns="0" rIns="0">
+            <a:spAutoFit/>
+          </a:bodyPr>
+          <a:lstStyle/>
+          <a:p>
+            <a:pPr>
+              <a:spcAft>
+                <a:spcPts val="1000"/>
+              </a:spcAft>
+            </a:pPr>
+            <a:r>
+              <a:rPr sz="1050">
+                <a:solidFill>
+                  <a:srgbClr val="B8C0CC"/>
+                </a:solidFill>
+                <a:latin typeface="Montserrat"/>
+              </a:rPr>
+              <a:t>RAW FILE</a:t>
+            </a:r>
+          </a:p>
+        </p:txBody>
+      </p:sp>
+      <p:sp>
+        <p:nvSpPr>
+          <p:cNvPr id="5" name="Rounded Rectangle 4"/>
           <p:cNvSpPr/>
           <p:nvPr/>
         </p:nvSpPr>
         <p:spPr>
           <a:xfrm>
-            <a:off x="411480" y="1691640"/>
-            <a:ext cx="1908810" cy="1234440"/>
+            <a:off x="411480" y="1810512"/>
+            <a:ext cx="1908810" cy="914400"/>
           </a:xfrm>
           <a:prstGeom prst="roundRect">
             <a:avLst>
@@ -11736,19 +12987,20 @@
           <a:lstStyle/>
           <a:p>
             <a:pPr algn="ctr"/>
+            <a:endParaRPr/>
           </a:p>
         </p:txBody>
       </p:sp>
       <p:sp>
         <p:nvSpPr>
-          <p:cNvPr id="5" name="TextBox 4"/>
+          <p:cNvPr id="6" name="TextBox 5"/>
           <p:cNvSpPr txBox="1"/>
           <p:nvPr/>
         </p:nvSpPr>
         <p:spPr>
           <a:xfrm>
-            <a:off x="411480" y="1856232"/>
-            <a:ext cx="1908810" cy="960120"/>
+            <a:off x="411480" y="1975104"/>
+            <a:ext cx="1908810" cy="640080"/>
           </a:xfrm>
           <a:prstGeom prst="rect">
             <a:avLst/>
@@ -11763,13 +13015,13 @@
           <a:p>
             <a:pPr algn="ctr"/>
             <a:r>
-              <a:rPr sz="3000" b="1">
+              <a:rPr sz="2200" b="1">
                 <a:solidFill>
                   <a:srgbClr val="82C7A5"/>
                 </a:solidFill>
                 <a:latin typeface="Montserrat"/>
               </a:rPr>
-              <a:t>23,279</a:t>
+              <a:t>128,075</a:t>
             </a:r>
           </a:p>
           <a:p>
@@ -11781,21 +13033,21 @@
                 </a:solidFill>
                 <a:latin typeface="Montserrat"/>
               </a:rPr>
-              <a:t>rows after cleaning</a:t>
+              <a:t>rows</a:t>
             </a:r>
           </a:p>
         </p:txBody>
       </p:sp>
       <p:sp>
         <p:nvSpPr>
-          <p:cNvPr id="6" name="Rounded Rectangle 5"/>
+          <p:cNvPr id="7" name="Rounded Rectangle 6"/>
           <p:cNvSpPr/>
           <p:nvPr/>
         </p:nvSpPr>
         <p:spPr>
           <a:xfrm>
-            <a:off x="2548890" y="1691640"/>
-            <a:ext cx="1908810" cy="1234440"/>
+            <a:off x="2548890" y="1810512"/>
+            <a:ext cx="1908810" cy="914400"/>
           </a:xfrm>
           <a:prstGeom prst="roundRect">
             <a:avLst>
@@ -11829,19 +13081,20 @@
           <a:lstStyle/>
           <a:p>
             <a:pPr algn="ctr"/>
+            <a:endParaRPr/>
           </a:p>
         </p:txBody>
       </p:sp>
       <p:sp>
         <p:nvSpPr>
-          <p:cNvPr id="7" name="TextBox 6"/>
+          <p:cNvPr id="8" name="TextBox 7"/>
           <p:cNvSpPr txBox="1"/>
           <p:nvPr/>
         </p:nvSpPr>
         <p:spPr>
           <a:xfrm>
-            <a:off x="2548890" y="1856232"/>
-            <a:ext cx="1908810" cy="960120"/>
+            <a:off x="2548890" y="1975104"/>
+            <a:ext cx="1908810" cy="640080"/>
           </a:xfrm>
           <a:prstGeom prst="rect">
             <a:avLst/>
@@ -11856,13 +13109,13 @@
           <a:p>
             <a:pPr algn="ctr"/>
             <a:r>
-              <a:rPr sz="3000" b="1">
+              <a:rPr sz="2200" b="1">
                 <a:solidFill>
                   <a:srgbClr val="82C7A5"/>
                 </a:solidFill>
                 <a:latin typeface="Montserrat"/>
               </a:rPr>
-              <a:t>7</a:t>
+              <a:t>16</a:t>
             </a:r>
           </a:p>
           <a:p>
@@ -11874,21 +13127,21 @@
                 </a:solidFill>
                 <a:latin typeface="Montserrat"/>
               </a:rPr>
-              <a:t>locations (HQ + 6 stores)</a:t>
+              <a:t>columns</a:t>
             </a:r>
           </a:p>
         </p:txBody>
       </p:sp>
       <p:sp>
         <p:nvSpPr>
-          <p:cNvPr id="8" name="Rounded Rectangle 7"/>
+          <p:cNvPr id="9" name="Rounded Rectangle 8"/>
           <p:cNvSpPr/>
           <p:nvPr/>
         </p:nvSpPr>
         <p:spPr>
           <a:xfrm>
-            <a:off x="4686300" y="1691640"/>
-            <a:ext cx="1908810" cy="1234440"/>
+            <a:off x="4686300" y="1810512"/>
+            <a:ext cx="1908810" cy="914400"/>
           </a:xfrm>
           <a:prstGeom prst="roundRect">
             <a:avLst>
@@ -11922,19 +13175,20 @@
           <a:lstStyle/>
           <a:p>
             <a:pPr algn="ctr"/>
+            <a:endParaRPr/>
           </a:p>
         </p:txBody>
       </p:sp>
       <p:sp>
         <p:nvSpPr>
-          <p:cNvPr id="9" name="TextBox 8"/>
+          <p:cNvPr id="10" name="TextBox 9"/>
           <p:cNvSpPr txBox="1"/>
           <p:nvPr/>
         </p:nvSpPr>
         <p:spPr>
           <a:xfrm>
-            <a:off x="4686300" y="1856232"/>
-            <a:ext cx="1908810" cy="960120"/>
+            <a:off x="4686300" y="1975104"/>
+            <a:ext cx="1908810" cy="640080"/>
           </a:xfrm>
           <a:prstGeom prst="rect">
             <a:avLst/>
@@ -11949,13 +13203,13 @@
           <a:p>
             <a:pPr algn="ctr"/>
             <a:r>
-              <a:rPr sz="3000" b="1">
+              <a:rPr sz="2200" b="1">
                 <a:solidFill>
                   <a:srgbClr val="82C7A5"/>
                 </a:solidFill>
                 <a:latin typeface="Montserrat"/>
               </a:rPr>
-              <a:t>94,363</a:t>
+              <a:t>41</a:t>
             </a:r>
           </a:p>
           <a:p>
@@ -11967,21 +13221,21 @@
                 </a:solidFill>
                 <a:latin typeface="Montserrat"/>
               </a:rPr>
-              <a:t>units of stock</a:t>
+              <a:t>locations</a:t>
             </a:r>
           </a:p>
         </p:txBody>
       </p:sp>
       <p:sp>
         <p:nvSpPr>
-          <p:cNvPr id="10" name="Rounded Rectangle 9"/>
+          <p:cNvPr id="11" name="Rounded Rectangle 10"/>
           <p:cNvSpPr/>
           <p:nvPr/>
         </p:nvSpPr>
         <p:spPr>
           <a:xfrm>
-            <a:off x="6823709" y="1691640"/>
-            <a:ext cx="1908810" cy="1234440"/>
+            <a:off x="6823709" y="1810512"/>
+            <a:ext cx="1908810" cy="914400"/>
           </a:xfrm>
           <a:prstGeom prst="roundRect">
             <a:avLst>
@@ -12015,19 +13269,20 @@
           <a:lstStyle/>
           <a:p>
             <a:pPr algn="ctr"/>
+            <a:endParaRPr/>
           </a:p>
         </p:txBody>
       </p:sp>
       <p:sp>
         <p:nvSpPr>
-          <p:cNvPr id="11" name="TextBox 10"/>
+          <p:cNvPr id="12" name="TextBox 11"/>
           <p:cNvSpPr txBox="1"/>
           <p:nvPr/>
         </p:nvSpPr>
         <p:spPr>
           <a:xfrm>
-            <a:off x="6823709" y="1856232"/>
-            <a:ext cx="1908810" cy="960120"/>
+            <a:off x="6823709" y="1975104"/>
+            <a:ext cx="1908810" cy="640080"/>
           </a:xfrm>
           <a:prstGeom prst="rect">
             <a:avLst/>
@@ -12042,13 +13297,13 @@
           <a:p>
             <a:pPr algn="ctr"/>
             <a:r>
-              <a:rPr sz="3000" b="1">
+              <a:rPr sz="2200" b="1">
                 <a:solidFill>
                   <a:srgbClr val="82C7A5"/>
                 </a:solidFill>
                 <a:latin typeface="Montserrat"/>
               </a:rPr>
-              <a:t>1</a:t>
+              <a:t>all</a:t>
             </a:r>
           </a:p>
           <a:p>
@@ -12060,21 +13315,21 @@
                 </a:solidFill>
                 <a:latin typeface="Montserrat"/>
               </a:rPr>
-              <a:t>product family (footwear)</a:t>
+              <a:t>product families</a:t>
             </a:r>
           </a:p>
         </p:txBody>
       </p:sp>
       <p:sp>
         <p:nvSpPr>
-          <p:cNvPr id="12" name="TextBox 11"/>
+          <p:cNvPr id="13" name="TextBox 12"/>
           <p:cNvSpPr txBox="1"/>
           <p:nvPr/>
         </p:nvSpPr>
         <p:spPr>
           <a:xfrm>
-            <a:off x="411480" y="3291840"/>
-            <a:ext cx="8321040" cy="457200"/>
+            <a:off x="411480" y="2907792"/>
+            <a:ext cx="8321040" cy="1869948"/>
           </a:xfrm>
           <a:prstGeom prst="rect">
             <a:avLst/>
@@ -12082,19 +13337,400 @@
           <a:noFill/>
         </p:spPr>
         <p:txBody>
-          <a:bodyPr wrap="square" lIns="0" tIns="0">
+          <a:bodyPr wrap="square" lIns="0" tIns="0" rIns="0">
             <a:spAutoFit/>
           </a:bodyPr>
           <a:lstStyle/>
           <a:p>
-            <a:r>
-              <a:rPr sz="1200" i="1">
+            <a:pPr>
+              <a:spcAft>
+                <a:spcPts val="1000"/>
+              </a:spcAft>
+            </a:pPr>
+            <a:r>
+              <a:rPr sz="1050">
                 <a:solidFill>
                   <a:srgbClr val="B8C0CC"/>
                 </a:solidFill>
                 <a:latin typeface="Montserrat"/>
               </a:rPr>
-              <a:t>Store names are anonymised and the file is not published in the repository.</a:t>
+              <a:t>AFTER CLEANING</a:t>
+            </a:r>
+          </a:p>
+        </p:txBody>
+      </p:sp>
+      <p:sp>
+        <p:nvSpPr>
+          <p:cNvPr id="14" name="Rounded Rectangle 13"/>
+          <p:cNvSpPr/>
+          <p:nvPr/>
+        </p:nvSpPr>
+        <p:spPr>
+          <a:xfrm>
+            <a:off x="411480" y="3163824"/>
+            <a:ext cx="1908810" cy="914400"/>
+          </a:xfrm>
+          <a:prstGeom prst="roundRect">
+            <a:avLst>
+              <a:gd name="adj" fmla="val 8000"/>
+            </a:avLst>
+          </a:prstGeom>
+          <a:solidFill>
+            <a:srgbClr val="121720"/>
+          </a:solidFill>
+          <a:ln>
+            <a:noFill/>
+          </a:ln>
+          <a:effectLst/>
+        </p:spPr>
+        <p:style>
+          <a:lnRef idx="1">
+            <a:schemeClr val="accent1"/>
+          </a:lnRef>
+          <a:fillRef idx="3">
+            <a:schemeClr val="accent1"/>
+          </a:fillRef>
+          <a:effectRef idx="2">
+            <a:schemeClr val="accent1"/>
+          </a:effectRef>
+          <a:fontRef idx="minor">
+            <a:schemeClr val="lt1"/>
+          </a:fontRef>
+        </p:style>
+        <p:txBody>
+          <a:bodyPr rtlCol="0" anchor="ctr"/>
+          <a:lstStyle/>
+          <a:p>
+            <a:pPr algn="ctr"/>
+            <a:endParaRPr/>
+          </a:p>
+        </p:txBody>
+      </p:sp>
+      <p:sp>
+        <p:nvSpPr>
+          <p:cNvPr id="15" name="TextBox 14"/>
+          <p:cNvSpPr txBox="1"/>
+          <p:nvPr/>
+        </p:nvSpPr>
+        <p:spPr>
+          <a:xfrm>
+            <a:off x="411480" y="3328416"/>
+            <a:ext cx="1908810" cy="640080"/>
+          </a:xfrm>
+          <a:prstGeom prst="rect">
+            <a:avLst/>
+          </a:prstGeom>
+          <a:noFill/>
+        </p:spPr>
+        <p:txBody>
+          <a:bodyPr wrap="square">
+            <a:spAutoFit/>
+          </a:bodyPr>
+          <a:lstStyle/>
+          <a:p>
+            <a:pPr algn="ctr"/>
+            <a:r>
+              <a:rPr sz="2200" b="1">
+                <a:solidFill>
+                  <a:srgbClr val="82C7A5"/>
+                </a:solidFill>
+                <a:latin typeface="Montserrat"/>
+              </a:rPr>
+              <a:t>23,279</a:t>
+            </a:r>
+          </a:p>
+          <a:p>
+            <a:pPr algn="ctr"/>
+            <a:r>
+              <a:rPr sz="1100">
+                <a:solidFill>
+                  <a:srgbClr val="B8C0CC"/>
+                </a:solidFill>
+                <a:latin typeface="Montserrat"/>
+              </a:rPr>
+              <a:t>rows</a:t>
+            </a:r>
+          </a:p>
+        </p:txBody>
+      </p:sp>
+      <p:sp>
+        <p:nvSpPr>
+          <p:cNvPr id="16" name="Rounded Rectangle 15"/>
+          <p:cNvSpPr/>
+          <p:nvPr/>
+        </p:nvSpPr>
+        <p:spPr>
+          <a:xfrm>
+            <a:off x="2548890" y="3163824"/>
+            <a:ext cx="1908810" cy="914400"/>
+          </a:xfrm>
+          <a:prstGeom prst="roundRect">
+            <a:avLst>
+              <a:gd name="adj" fmla="val 8000"/>
+            </a:avLst>
+          </a:prstGeom>
+          <a:solidFill>
+            <a:srgbClr val="121720"/>
+          </a:solidFill>
+          <a:ln>
+            <a:noFill/>
+          </a:ln>
+          <a:effectLst/>
+        </p:spPr>
+        <p:style>
+          <a:lnRef idx="1">
+            <a:schemeClr val="accent1"/>
+          </a:lnRef>
+          <a:fillRef idx="3">
+            <a:schemeClr val="accent1"/>
+          </a:fillRef>
+          <a:effectRef idx="2">
+            <a:schemeClr val="accent1"/>
+          </a:effectRef>
+          <a:fontRef idx="minor">
+            <a:schemeClr val="lt1"/>
+          </a:fontRef>
+        </p:style>
+        <p:txBody>
+          <a:bodyPr rtlCol="0" anchor="ctr"/>
+          <a:lstStyle/>
+          <a:p>
+            <a:pPr algn="ctr"/>
+            <a:endParaRPr/>
+          </a:p>
+        </p:txBody>
+      </p:sp>
+      <p:sp>
+        <p:nvSpPr>
+          <p:cNvPr id="17" name="TextBox 16"/>
+          <p:cNvSpPr txBox="1"/>
+          <p:nvPr/>
+        </p:nvSpPr>
+        <p:spPr>
+          <a:xfrm>
+            <a:off x="2548890" y="3328416"/>
+            <a:ext cx="1908810" cy="640080"/>
+          </a:xfrm>
+          <a:prstGeom prst="rect">
+            <a:avLst/>
+          </a:prstGeom>
+          <a:noFill/>
+        </p:spPr>
+        <p:txBody>
+          <a:bodyPr wrap="square">
+            <a:spAutoFit/>
+          </a:bodyPr>
+          <a:lstStyle/>
+          <a:p>
+            <a:pPr algn="ctr"/>
+            <a:r>
+              <a:rPr sz="2200" b="1">
+                <a:solidFill>
+                  <a:srgbClr val="82C7A5"/>
+                </a:solidFill>
+                <a:latin typeface="Montserrat"/>
+              </a:rPr>
+              <a:t>12</a:t>
+            </a:r>
+          </a:p>
+          <a:p>
+            <a:pPr algn="ctr"/>
+            <a:r>
+              <a:rPr sz="1100">
+                <a:solidFill>
+                  <a:srgbClr val="B8C0CC"/>
+                </a:solidFill>
+                <a:latin typeface="Montserrat"/>
+              </a:rPr>
+              <a:t>columns</a:t>
+            </a:r>
+          </a:p>
+        </p:txBody>
+      </p:sp>
+      <p:sp>
+        <p:nvSpPr>
+          <p:cNvPr id="18" name="Rounded Rectangle 17"/>
+          <p:cNvSpPr/>
+          <p:nvPr/>
+        </p:nvSpPr>
+        <p:spPr>
+          <a:xfrm>
+            <a:off x="4686300" y="3163824"/>
+            <a:ext cx="1908810" cy="914400"/>
+          </a:xfrm>
+          <a:prstGeom prst="roundRect">
+            <a:avLst>
+              <a:gd name="adj" fmla="val 8000"/>
+            </a:avLst>
+          </a:prstGeom>
+          <a:solidFill>
+            <a:srgbClr val="121720"/>
+          </a:solidFill>
+          <a:ln>
+            <a:noFill/>
+          </a:ln>
+          <a:effectLst/>
+        </p:spPr>
+        <p:style>
+          <a:lnRef idx="1">
+            <a:schemeClr val="accent1"/>
+          </a:lnRef>
+          <a:fillRef idx="3">
+            <a:schemeClr val="accent1"/>
+          </a:fillRef>
+          <a:effectRef idx="2">
+            <a:schemeClr val="accent1"/>
+          </a:effectRef>
+          <a:fontRef idx="minor">
+            <a:schemeClr val="lt1"/>
+          </a:fontRef>
+        </p:style>
+        <p:txBody>
+          <a:bodyPr rtlCol="0" anchor="ctr"/>
+          <a:lstStyle/>
+          <a:p>
+            <a:pPr algn="ctr"/>
+            <a:endParaRPr/>
+          </a:p>
+        </p:txBody>
+      </p:sp>
+      <p:sp>
+        <p:nvSpPr>
+          <p:cNvPr id="19" name="TextBox 18"/>
+          <p:cNvSpPr txBox="1"/>
+          <p:nvPr/>
+        </p:nvSpPr>
+        <p:spPr>
+          <a:xfrm>
+            <a:off x="4686300" y="3328416"/>
+            <a:ext cx="1908810" cy="640080"/>
+          </a:xfrm>
+          <a:prstGeom prst="rect">
+            <a:avLst/>
+          </a:prstGeom>
+          <a:noFill/>
+        </p:spPr>
+        <p:txBody>
+          <a:bodyPr wrap="square">
+            <a:spAutoFit/>
+          </a:bodyPr>
+          <a:lstStyle/>
+          <a:p>
+            <a:pPr algn="ctr"/>
+            <a:r>
+              <a:rPr sz="2200" b="1">
+                <a:solidFill>
+                  <a:srgbClr val="82C7A5"/>
+                </a:solidFill>
+                <a:latin typeface="Montserrat"/>
+              </a:rPr>
+              <a:t>7</a:t>
+            </a:r>
+          </a:p>
+          <a:p>
+            <a:pPr algn="ctr"/>
+            <a:r>
+              <a:rPr sz="1100">
+                <a:solidFill>
+                  <a:srgbClr val="B8C0CC"/>
+                </a:solidFill>
+                <a:latin typeface="Montserrat"/>
+              </a:rPr>
+              <a:t>locations (HQ + 6 stores)</a:t>
+            </a:r>
+          </a:p>
+        </p:txBody>
+      </p:sp>
+      <p:sp>
+        <p:nvSpPr>
+          <p:cNvPr id="20" name="Rounded Rectangle 19"/>
+          <p:cNvSpPr/>
+          <p:nvPr/>
+        </p:nvSpPr>
+        <p:spPr>
+          <a:xfrm>
+            <a:off x="6823709" y="3163824"/>
+            <a:ext cx="1908810" cy="914400"/>
+          </a:xfrm>
+          <a:prstGeom prst="roundRect">
+            <a:avLst>
+              <a:gd name="adj" fmla="val 8000"/>
+            </a:avLst>
+          </a:prstGeom>
+          <a:solidFill>
+            <a:srgbClr val="121720"/>
+          </a:solidFill>
+          <a:ln>
+            <a:noFill/>
+          </a:ln>
+          <a:effectLst/>
+        </p:spPr>
+        <p:style>
+          <a:lnRef idx="1">
+            <a:schemeClr val="accent1"/>
+          </a:lnRef>
+          <a:fillRef idx="3">
+            <a:schemeClr val="accent1"/>
+          </a:fillRef>
+          <a:effectRef idx="2">
+            <a:schemeClr val="accent1"/>
+          </a:effectRef>
+          <a:fontRef idx="minor">
+            <a:schemeClr val="lt1"/>
+          </a:fontRef>
+        </p:style>
+        <p:txBody>
+          <a:bodyPr rtlCol="0" anchor="ctr"/>
+          <a:lstStyle/>
+          <a:p>
+            <a:pPr algn="ctr"/>
+            <a:endParaRPr/>
+          </a:p>
+        </p:txBody>
+      </p:sp>
+      <p:sp>
+        <p:nvSpPr>
+          <p:cNvPr id="21" name="TextBox 20"/>
+          <p:cNvSpPr txBox="1"/>
+          <p:nvPr/>
+        </p:nvSpPr>
+        <p:spPr>
+          <a:xfrm>
+            <a:off x="6823709" y="3328416"/>
+            <a:ext cx="1908810" cy="640080"/>
+          </a:xfrm>
+          <a:prstGeom prst="rect">
+            <a:avLst/>
+          </a:prstGeom>
+          <a:noFill/>
+        </p:spPr>
+        <p:txBody>
+          <a:bodyPr wrap="square">
+            <a:spAutoFit/>
+          </a:bodyPr>
+          <a:lstStyle/>
+          <a:p>
+            <a:pPr algn="ctr"/>
+            <a:r>
+              <a:rPr sz="2200" b="1">
+                <a:solidFill>
+                  <a:srgbClr val="82C7A5"/>
+                </a:solidFill>
+                <a:latin typeface="Montserrat"/>
+              </a:rPr>
+              <a:t>1</a:t>
+            </a:r>
+          </a:p>
+          <a:p>
+            <a:pPr algn="ctr"/>
+            <a:r>
+              <a:rPr sz="1100">
+                <a:solidFill>
+                  <a:srgbClr val="B8C0CC"/>
+                </a:solidFill>
+                <a:latin typeface="Montserrat"/>
+              </a:rPr>
+              <a:t>footwear only</a:t>
             </a:r>
           </a:p>
         </p:txBody>
@@ -12108,7 +13744,7 @@
 </file>
 
 <file path=ppt/slides/slide5.xml><?xml version="1.0" encoding="utf-8"?>
-<p:sld xmlns:a="http://schemas.openxmlformats.org/drawingml/2006/main" xmlns:p="http://schemas.openxmlformats.org/presentationml/2006/main" xmlns:r="http://schemas.openxmlformats.org/officeDocument/2006/relationships">
+<p:sld xmlns:a="http://schemas.openxmlformats.org/drawingml/2006/main" xmlns:r="http://schemas.openxmlformats.org/officeDocument/2006/relationships" xmlns:p="http://schemas.openxmlformats.org/presentationml/2006/main">
   <p:cSld>
     <p:spTree>
       <p:nvGrpSpPr>
@@ -12116,7 +13752,14 @@
         <p:cNvGrpSpPr/>
         <p:nvPr/>
       </p:nvGrpSpPr>
-      <p:grpSpPr/>
+      <p:grpSpPr>
+        <a:xfrm>
+          <a:off x="0" y="0"/>
+          <a:ext cx="0" cy="0"/>
+          <a:chOff x="0" y="0"/>
+          <a:chExt cx="0" cy="0"/>
+        </a:xfrm>
+      </p:grpSpPr>
       <p:sp>
         <p:nvSpPr>
           <p:cNvPr id="2" name="Title 1"/>
@@ -12139,7 +13782,7 @@
                 </a:solidFill>
                 <a:latin typeface="Montserrat"/>
               </a:rPr>
-              <a:t>Data Preparation</a:t>
+              <a:t>Cleaning the Data</a:t>
             </a:r>
           </a:p>
         </p:txBody>
@@ -12152,8 +13795,8 @@
         </p:nvSpPr>
         <p:spPr>
           <a:xfrm>
-            <a:off x="411480" y="1005840"/>
-            <a:ext cx="8321040" cy="3771900"/>
+            <a:off x="411480" y="1195578"/>
+            <a:ext cx="8321040" cy="1261884"/>
           </a:xfrm>
           <a:prstGeom prst="rect">
             <a:avLst/>
@@ -12161,72 +13804,201 @@
           <a:noFill/>
         </p:spPr>
         <p:txBody>
-          <a:bodyPr wrap="square" lIns="0" rIns="0" tIns="0">
+          <a:bodyPr wrap="square" lIns="0" tIns="0" rIns="0">
             <a:spAutoFit/>
           </a:bodyPr>
           <a:lstStyle/>
           <a:p>
             <a:pPr>
               <a:spcAft>
-                <a:spcPts val="900"/>
+                <a:spcPts val="1000"/>
               </a:spcAft>
             </a:pPr>
             <a:r>
-              <a:rPr sz="1350">
+              <a:rPr sz="1350" dirty="0">
                 <a:solidFill>
                   <a:srgbClr val="FFFFFF"/>
                 </a:solidFill>
                 <a:latin typeface="Montserrat"/>
               </a:rPr>
-              <a:t>Kept warehouses 1 (HQ), 2 (stores) and 5 (outlets) — the rest are returns and repairs.</a:t>
-            </a:r>
+              <a:t>Kept warehouses 1 (HQ), 2 (stores) and 5 (outlets)</a:t>
+            </a:r>
+            <a:r>
+              <a:rPr lang="pt-PT" sz="1350" dirty="0">
+                <a:solidFill>
+                  <a:srgbClr val="FFFFFF"/>
+                </a:solidFill>
+                <a:latin typeface="Montserrat"/>
+              </a:rPr>
+              <a:t> </a:t>
+            </a:r>
+            <a:r>
+              <a:rPr lang="pt-PT" sz="1350" dirty="0" err="1">
+                <a:solidFill>
+                  <a:srgbClr val="FFFFFF"/>
+                </a:solidFill>
+                <a:latin typeface="Montserrat"/>
+              </a:rPr>
+              <a:t>because</a:t>
+            </a:r>
+            <a:r>
+              <a:rPr lang="pt-PT" sz="1350" dirty="0">
+                <a:solidFill>
+                  <a:srgbClr val="FFFFFF"/>
+                </a:solidFill>
+                <a:latin typeface="Montserrat"/>
+              </a:rPr>
+              <a:t> </a:t>
+            </a:r>
+            <a:r>
+              <a:rPr lang="pt-PT" sz="1350" dirty="0" err="1">
+                <a:solidFill>
+                  <a:srgbClr val="FFFFFF"/>
+                </a:solidFill>
+                <a:latin typeface="Montserrat"/>
+              </a:rPr>
+              <a:t>is</a:t>
+            </a:r>
+            <a:r>
+              <a:rPr lang="pt-PT" sz="1350" dirty="0">
+                <a:solidFill>
+                  <a:srgbClr val="FFFFFF"/>
+                </a:solidFill>
+                <a:latin typeface="Montserrat"/>
+              </a:rPr>
+              <a:t> </a:t>
+            </a:r>
+            <a:r>
+              <a:rPr lang="pt-PT" sz="1350" dirty="0" err="1">
+                <a:solidFill>
+                  <a:srgbClr val="FFFFFF"/>
+                </a:solidFill>
+                <a:latin typeface="Montserrat"/>
+              </a:rPr>
+              <a:t>the</a:t>
+            </a:r>
+            <a:r>
+              <a:rPr lang="pt-PT" sz="1350" dirty="0">
+                <a:solidFill>
+                  <a:srgbClr val="FFFFFF"/>
+                </a:solidFill>
+                <a:latin typeface="Montserrat"/>
+              </a:rPr>
+              <a:t> </a:t>
+            </a:r>
+            <a:r>
+              <a:rPr lang="pt-PT" sz="1350" dirty="0" err="1">
+                <a:solidFill>
+                  <a:srgbClr val="FFFFFF"/>
+                </a:solidFill>
+                <a:latin typeface="Montserrat"/>
+              </a:rPr>
+              <a:t>warehouses</a:t>
+            </a:r>
+            <a:r>
+              <a:rPr lang="pt-PT" sz="1350" dirty="0">
+                <a:solidFill>
+                  <a:srgbClr val="FFFFFF"/>
+                </a:solidFill>
+                <a:latin typeface="Montserrat"/>
+              </a:rPr>
+              <a:t> </a:t>
+            </a:r>
+            <a:r>
+              <a:rPr lang="pt-PT" sz="1350" dirty="0" err="1">
+                <a:solidFill>
+                  <a:srgbClr val="FFFFFF"/>
+                </a:solidFill>
+                <a:latin typeface="Montserrat"/>
+              </a:rPr>
+              <a:t>with</a:t>
+            </a:r>
+            <a:r>
+              <a:rPr lang="pt-PT" sz="1350" dirty="0">
+                <a:solidFill>
+                  <a:srgbClr val="FFFFFF"/>
+                </a:solidFill>
+                <a:latin typeface="Montserrat"/>
+              </a:rPr>
+              <a:t> more </a:t>
+            </a:r>
+            <a:r>
+              <a:rPr lang="pt-PT" sz="1350" dirty="0" err="1">
+                <a:solidFill>
+                  <a:srgbClr val="FFFFFF"/>
+                </a:solidFill>
+                <a:latin typeface="Montserrat"/>
+              </a:rPr>
+              <a:t>units</a:t>
+            </a:r>
+            <a:r>
+              <a:rPr lang="pt-PT" sz="1350" dirty="0">
+                <a:solidFill>
+                  <a:srgbClr val="FFFFFF"/>
+                </a:solidFill>
+                <a:latin typeface="Montserrat"/>
+              </a:rPr>
+              <a:t>.</a:t>
+            </a:r>
+            <a:endParaRPr sz="1350" dirty="0">
+              <a:solidFill>
+                <a:srgbClr val="FFFFFF"/>
+              </a:solidFill>
+              <a:latin typeface="Montserrat"/>
+            </a:endParaRPr>
           </a:p>
           <a:p>
             <a:pPr>
               <a:spcAft>
-                <a:spcPts val="900"/>
+                <a:spcPts val="1000"/>
               </a:spcAft>
             </a:pPr>
             <a:r>
-              <a:rPr sz="1350">
+              <a:rPr sz="1350" dirty="0">
                 <a:solidFill>
                   <a:srgbClr val="FFFFFF"/>
                 </a:solidFill>
                 <a:latin typeface="Montserrat"/>
               </a:rPr>
-              <a:t>Footwear only, dropping every other product family.</a:t>
+              <a:t>Footwear only. The family column had 181 different labels, all folded into one.</a:t>
             </a:r>
           </a:p>
           <a:p>
             <a:pPr>
               <a:spcAft>
-                <a:spcPts val="900"/>
+                <a:spcPts val="1000"/>
               </a:spcAft>
             </a:pPr>
             <a:r>
-              <a:rPr sz="1350">
+              <a:rPr sz="1350" dirty="0">
                 <a:solidFill>
                   <a:srgbClr val="FFFFFF"/>
                 </a:solidFill>
                 <a:latin typeface="Montserrat"/>
               </a:rPr>
-              <a:t>Negative quantities set to 0 — incomplete transfers in the source system, not real stock.</a:t>
-            </a:r>
+              <a:t>Negative quantities set to 0 — 4,206 rows</a:t>
+            </a:r>
+            <a:endParaRPr lang="pt-PT" sz="1350" dirty="0">
+              <a:solidFill>
+                <a:srgbClr val="FFFFFF"/>
+              </a:solidFill>
+              <a:latin typeface="Montserrat"/>
+            </a:endParaRPr>
           </a:p>
           <a:p>
             <a:pPr>
               <a:spcAft>
-                <a:spcPts val="900"/>
+                <a:spcPts val="1000"/>
               </a:spcAft>
             </a:pPr>
             <a:r>
-              <a:rPr sz="1350">
+              <a:rPr sz="1350" dirty="0">
                 <a:solidFill>
                   <a:srgbClr val="FFFFFF"/>
                 </a:solidFill>
                 <a:latin typeface="Montserrat"/>
               </a:rPr>
-              <a:t>Brand names unified: the same brand appeared under three different labels.</a:t>
+              <a:t>Brand names unified: the same brand appeared under more than one label.</a:t>
             </a:r>
           </a:p>
         </p:txBody>
@@ -12239,7 +14011,7 @@
         </p:nvSpPr>
         <p:spPr>
           <a:xfrm>
-            <a:off x="411480" y="2880360"/>
+            <a:off x="411480" y="2971800"/>
             <a:ext cx="8321040" cy="1627632"/>
           </a:xfrm>
           <a:prstGeom prst="roundRect">
@@ -12274,6 +14046,7 @@
           <a:lstStyle/>
           <a:p>
             <a:pPr algn="ctr"/>
+            <a:endParaRPr/>
           </a:p>
         </p:txBody>
       </p:sp>
@@ -12285,7 +14058,7 @@
         </p:nvSpPr>
         <p:spPr>
           <a:xfrm>
-            <a:off x="576072" y="2990088"/>
+            <a:off x="576072" y="3081528"/>
             <a:ext cx="7991856" cy="1408176"/>
           </a:xfrm>
           <a:prstGeom prst="rect">
@@ -12294,7 +14067,7 @@
           <a:noFill/>
         </p:spPr>
         <p:txBody>
-          <a:bodyPr wrap="square" lIns="0" rIns="0" tIns="0" bIns="0">
+          <a:bodyPr wrap="square" lIns="0" tIns="0" rIns="0" bIns="0">
             <a:spAutoFit/>
           </a:bodyPr>
           <a:lstStyle/>
@@ -12307,6 +14080,22 @@
             <a:r>
               <a:rPr sz="1000">
                 <a:solidFill>
+                  <a:srgbClr val="748499"/>
+                </a:solidFill>
+                <a:latin typeface="Consolas"/>
+              </a:rPr>
+              <a:t># portuguese decimal comma, and negatives treated as 0</a:t>
+            </a:r>
+          </a:p>
+          <a:p>
+            <a:pPr algn="l">
+              <a:spcAft>
+                <a:spcPts val="0"/>
+              </a:spcAft>
+            </a:pPr>
+            <a:r>
+              <a:rPr sz="1000">
+                <a:solidFill>
                   <a:srgbClr val="D6DEE8"/>
                 </a:solidFill>
                 <a:latin typeface="Consolas"/>
@@ -12375,23 +14164,7 @@
                 </a:solidFill>
                 <a:latin typeface="Consolas"/>
               </a:rPr>
-              <a:t>    'Fila apparel_acc': 'Fila',</a:t>
-            </a:r>
-          </a:p>
-          <a:p>
-            <a:pPr algn="l">
-              <a:spcAft>
-                <a:spcPts val="0"/>
-              </a:spcAft>
-            </a:pPr>
-            <a:r>
-              <a:rPr sz="1000">
-                <a:solidFill>
-                  <a:srgbClr val="D6DEE8"/>
-                </a:solidFill>
-                <a:latin typeface="Consolas"/>
-              </a:rPr>
-              <a:t>    'Merrell Aces': 'Merrell Foot',</a:t>
+              <a:t>    'Fila apparel_acc': 'Fila', 'Merrell Aces': 'Merrell Foot',</a:t>
             </a:r>
           </a:p>
           <a:p>
@@ -12437,7 +14210,7 @@
 </file>
 
 <file path=ppt/slides/slide6.xml><?xml version="1.0" encoding="utf-8"?>
-<p:sld xmlns:a="http://schemas.openxmlformats.org/drawingml/2006/main" xmlns:p="http://schemas.openxmlformats.org/presentationml/2006/main" xmlns:r="http://schemas.openxmlformats.org/officeDocument/2006/relationships">
+<p:sld xmlns:a="http://schemas.openxmlformats.org/drawingml/2006/main" xmlns:r="http://schemas.openxmlformats.org/officeDocument/2006/relationships" xmlns:p="http://schemas.openxmlformats.org/presentationml/2006/main">
   <p:cSld>
     <p:spTree>
       <p:nvGrpSpPr>
@@ -12445,7 +14218,557 @@
         <p:cNvGrpSpPr/>
         <p:nvPr/>
       </p:nvGrpSpPr>
-      <p:grpSpPr/>
+      <p:grpSpPr>
+        <a:xfrm>
+          <a:off x="0" y="0"/>
+          <a:ext cx="0" cy="0"/>
+          <a:chOff x="0" y="0"/>
+          <a:chExt cx="0" cy="0"/>
+        </a:xfrm>
+      </p:grpSpPr>
+      <p:sp>
+        <p:nvSpPr>
+          <p:cNvPr id="2" name="Title 1"/>
+          <p:cNvSpPr>
+            <a:spLocks noGrp="1"/>
+          </p:cNvSpPr>
+          <p:nvPr>
+            <p:ph type="title"/>
+          </p:nvPr>
+        </p:nvSpPr>
+        <p:spPr/>
+        <p:txBody>
+          <a:bodyPr/>
+          <a:lstStyle/>
+          <a:p>
+            <a:r>
+              <a:rPr sz="2800" b="1">
+                <a:solidFill>
+                  <a:srgbClr val="FFFFFF"/>
+                </a:solidFill>
+                <a:latin typeface="Montserrat"/>
+              </a:rPr>
+              <a:t>Choosing the Scope</a:t>
+            </a:r>
+          </a:p>
+        </p:txBody>
+      </p:sp>
+      <p:sp>
+        <p:nvSpPr>
+          <p:cNvPr id="3" name="TextBox 2"/>
+          <p:cNvSpPr txBox="1"/>
+          <p:nvPr/>
+        </p:nvSpPr>
+        <p:spPr>
+          <a:xfrm>
+            <a:off x="411480" y="1005840"/>
+            <a:ext cx="8321040" cy="1300356"/>
+          </a:xfrm>
+          <a:prstGeom prst="rect">
+            <a:avLst/>
+          </a:prstGeom>
+          <a:noFill/>
+        </p:spPr>
+        <p:txBody>
+          <a:bodyPr wrap="square" lIns="0" tIns="0" rIns="0">
+            <a:spAutoFit/>
+          </a:bodyPr>
+          <a:lstStyle/>
+          <a:p>
+            <a:pPr>
+              <a:spcAft>
+                <a:spcPts val="1100"/>
+              </a:spcAft>
+            </a:pPr>
+            <a:endParaRPr lang="pt-PT" sz="1350" dirty="0">
+              <a:solidFill>
+                <a:srgbClr val="FFFFFF"/>
+              </a:solidFill>
+              <a:latin typeface="Montserrat"/>
+            </a:endParaRPr>
+          </a:p>
+          <a:p>
+            <a:pPr>
+              <a:spcAft>
+                <a:spcPts val="1100"/>
+              </a:spcAft>
+            </a:pPr>
+            <a:r>
+              <a:rPr sz="1350" dirty="0">
+                <a:solidFill>
+                  <a:srgbClr val="FFFFFF"/>
+                </a:solidFill>
+                <a:latin typeface="Montserrat"/>
+              </a:rPr>
+              <a:t>The raw file covers 41 locations. Most hold very little stock, and 13 held under 100 units.</a:t>
+            </a:r>
+          </a:p>
+          <a:p>
+            <a:pPr>
+              <a:spcAft>
+                <a:spcPts val="1100"/>
+              </a:spcAft>
+            </a:pPr>
+            <a:r>
+              <a:rPr lang="en-US" sz="1350" dirty="0">
+                <a:solidFill>
+                  <a:srgbClr val="FFFFFF"/>
+                </a:solidFill>
+                <a:latin typeface="Montserrat"/>
+              </a:rPr>
+              <a:t>I kept the 6 highest-volume stores, plus HQ as the stock source.</a:t>
+            </a:r>
+          </a:p>
+          <a:p>
+            <a:pPr>
+              <a:spcAft>
+                <a:spcPts val="1100"/>
+              </a:spcAft>
+            </a:pPr>
+            <a:r>
+              <a:rPr sz="1350" dirty="0">
+                <a:solidFill>
+                  <a:srgbClr val="FFFFFF"/>
+                </a:solidFill>
+                <a:latin typeface="Montserrat"/>
+              </a:rPr>
+              <a:t>Brands that exist only at HQ and in none of those stores were dropped — nothing to replenish.</a:t>
+            </a:r>
+          </a:p>
+        </p:txBody>
+      </p:sp>
+      <p:sp>
+        <p:nvSpPr>
+          <p:cNvPr id="4" name="Rounded Rectangle 3"/>
+          <p:cNvSpPr/>
+          <p:nvPr/>
+        </p:nvSpPr>
+        <p:spPr>
+          <a:xfrm>
+            <a:off x="411480" y="2880360"/>
+            <a:ext cx="8321040" cy="1458468"/>
+          </a:xfrm>
+          <a:prstGeom prst="roundRect">
+            <a:avLst>
+              <a:gd name="adj" fmla="val 4000"/>
+            </a:avLst>
+          </a:prstGeom>
+          <a:solidFill>
+            <a:srgbClr val="121720"/>
+          </a:solidFill>
+          <a:ln>
+            <a:noFill/>
+          </a:ln>
+          <a:effectLst/>
+        </p:spPr>
+        <p:style>
+          <a:lnRef idx="1">
+            <a:schemeClr val="accent1"/>
+          </a:lnRef>
+          <a:fillRef idx="3">
+            <a:schemeClr val="accent1"/>
+          </a:fillRef>
+          <a:effectRef idx="2">
+            <a:schemeClr val="accent1"/>
+          </a:effectRef>
+          <a:fontRef idx="minor">
+            <a:schemeClr val="lt1"/>
+          </a:fontRef>
+        </p:style>
+        <p:txBody>
+          <a:bodyPr rtlCol="0" anchor="ctr"/>
+          <a:lstStyle/>
+          <a:p>
+            <a:pPr algn="ctr"/>
+            <a:endParaRPr/>
+          </a:p>
+        </p:txBody>
+      </p:sp>
+      <p:sp>
+        <p:nvSpPr>
+          <p:cNvPr id="5" name="TextBox 4"/>
+          <p:cNvSpPr txBox="1"/>
+          <p:nvPr/>
+        </p:nvSpPr>
+        <p:spPr>
+          <a:xfrm>
+            <a:off x="576072" y="2990088"/>
+            <a:ext cx="7991856" cy="1239012"/>
+          </a:xfrm>
+          <a:prstGeom prst="rect">
+            <a:avLst/>
+          </a:prstGeom>
+          <a:noFill/>
+        </p:spPr>
+        <p:txBody>
+          <a:bodyPr wrap="square" lIns="0" tIns="0" rIns="0" bIns="0">
+            <a:spAutoFit/>
+          </a:bodyPr>
+          <a:lstStyle/>
+          <a:p>
+            <a:pPr algn="l">
+              <a:spcAft>
+                <a:spcPts val="0"/>
+              </a:spcAft>
+            </a:pPr>
+            <a:r>
+              <a:rPr sz="1000">
+                <a:solidFill>
+                  <a:srgbClr val="748499"/>
+                </a:solidFill>
+                <a:latin typeface="Consolas"/>
+              </a:rPr>
+              <a:t># scope: the 6 selected stores, keeping HQ as the stock source</a:t>
+            </a:r>
+          </a:p>
+          <a:p>
+            <a:pPr algn="l">
+              <a:spcAft>
+                <a:spcPts val="0"/>
+              </a:spcAft>
+            </a:pPr>
+            <a:r>
+              <a:rPr sz="1000">
+                <a:solidFill>
+                  <a:srgbClr val="D6DEE8"/>
+                </a:solidFill>
+                <a:latin typeface="Consolas"/>
+              </a:rPr>
+              <a:t>SELECTED_STORES = ['5-52', '5-53', '5-50', '2-8', '5-51', '2-41']</a:t>
+            </a:r>
+          </a:p>
+          <a:p>
+            <a:pPr algn="l">
+              <a:spcAft>
+                <a:spcPts val="0"/>
+              </a:spcAft>
+            </a:pPr>
+            <a:r>
+              <a:rPr sz="1000">
+                <a:solidFill>
+                  <a:srgbClr val="D6DEE8"/>
+                </a:solidFill>
+                <a:latin typeface="Consolas"/>
+              </a:rPr>
+              <a:t>df_work = df_work[df_work['STORE_ID'].isin(SELECTED_STORES + ['1-HQ'])]</a:t>
+            </a:r>
+          </a:p>
+          <a:p>
+            <a:pPr algn="l">
+              <a:spcAft>
+                <a:spcPts val="0"/>
+              </a:spcAft>
+            </a:pPr>
+            <a:r>
+              <a:rPr sz="1000">
+                <a:solidFill>
+                  <a:srgbClr val="D6DEE8"/>
+                </a:solidFill>
+                <a:latin typeface="Consolas"/>
+              </a:rPr>
+              <a:t> </a:t>
+            </a:r>
+          </a:p>
+          <a:p>
+            <a:pPr algn="l">
+              <a:spcAft>
+                <a:spcPts val="0"/>
+              </a:spcAft>
+            </a:pPr>
+            <a:r>
+              <a:rPr sz="1000">
+                <a:solidFill>
+                  <a:srgbClr val="748499"/>
+                </a:solidFill>
+                <a:latin typeface="Consolas"/>
+              </a:rPr>
+              <a:t># drop brands that exist only at HQ and in no selected store</a:t>
+            </a:r>
+          </a:p>
+          <a:p>
+            <a:pPr algn="l">
+              <a:spcAft>
+                <a:spcPts val="0"/>
+              </a:spcAft>
+            </a:pPr>
+            <a:r>
+              <a:rPr sz="1000">
+                <a:solidFill>
+                  <a:srgbClr val="D6DEE8"/>
+                </a:solidFill>
+                <a:latin typeface="Consolas"/>
+              </a:rPr>
+              <a:t>relevant_brands = df_work[df_work['STORE_ID'] != '1-HQ']['BRAND'].unique()</a:t>
+            </a:r>
+          </a:p>
+          <a:p>
+            <a:pPr algn="l">
+              <a:spcAft>
+                <a:spcPts val="0"/>
+              </a:spcAft>
+            </a:pPr>
+            <a:r>
+              <a:rPr sz="1000">
+                <a:solidFill>
+                  <a:srgbClr val="D6DEE8"/>
+                </a:solidFill>
+                <a:latin typeface="Consolas"/>
+              </a:rPr>
+              <a:t>df_work = df_work[df_work['BRAND'].isin(relevant_brands)]</a:t>
+            </a:r>
+          </a:p>
+        </p:txBody>
+      </p:sp>
+    </p:spTree>
+  </p:cSld>
+  <p:clrMapOvr>
+    <a:masterClrMapping/>
+  </p:clrMapOvr>
+</p:sld>
+</file>
+
+<file path=ppt/slides/slide7.xml><?xml version="1.0" encoding="utf-8"?>
+<p:sld xmlns:a="http://schemas.openxmlformats.org/drawingml/2006/main" xmlns:r="http://schemas.openxmlformats.org/officeDocument/2006/relationships" xmlns:p="http://schemas.openxmlformats.org/presentationml/2006/main">
+  <p:cSld>
+    <p:spTree>
+      <p:nvGrpSpPr>
+        <p:cNvPr id="1" name=""/>
+        <p:cNvGrpSpPr/>
+        <p:nvPr/>
+      </p:nvGrpSpPr>
+      <p:grpSpPr>
+        <a:xfrm>
+          <a:off x="0" y="0"/>
+          <a:ext cx="0" cy="0"/>
+          <a:chOff x="0" y="0"/>
+          <a:chExt cx="0" cy="0"/>
+        </a:xfrm>
+      </p:grpSpPr>
+      <p:sp>
+        <p:nvSpPr>
+          <p:cNvPr id="2" name="Title 1"/>
+          <p:cNvSpPr>
+            <a:spLocks noGrp="1"/>
+          </p:cNvSpPr>
+          <p:nvPr>
+            <p:ph type="title"/>
+          </p:nvPr>
+        </p:nvSpPr>
+        <p:spPr/>
+        <p:txBody>
+          <a:bodyPr/>
+          <a:lstStyle/>
+          <a:p>
+            <a:r>
+              <a:rPr sz="2800" b="1">
+                <a:solidFill>
+                  <a:srgbClr val="FFFFFF"/>
+                </a:solidFill>
+                <a:latin typeface="Montserrat"/>
+              </a:rPr>
+              <a:t>Every Store Is Different</a:t>
+            </a:r>
+          </a:p>
+        </p:txBody>
+      </p:sp>
+      <p:pic>
+        <p:nvPicPr>
+          <p:cNvPr id="3" name="Picture 2" descr="heatmap.png"/>
+          <p:cNvPicPr>
+            <a:picLocks noChangeAspect="1"/>
+          </p:cNvPicPr>
+          <p:nvPr/>
+        </p:nvPicPr>
+        <p:blipFill>
+          <a:blip r:embed="rId3"/>
+          <a:stretch>
+            <a:fillRect/>
+          </a:stretch>
+        </p:blipFill>
+        <p:spPr>
+          <a:xfrm>
+            <a:off x="5623560" y="502920"/>
+            <a:ext cx="3467254" cy="4343400"/>
+          </a:xfrm>
+          <a:prstGeom prst="rect">
+            <a:avLst/>
+          </a:prstGeom>
+        </p:spPr>
+      </p:pic>
+      <p:sp>
+        <p:nvSpPr>
+          <p:cNvPr id="4" name="TextBox 3"/>
+          <p:cNvSpPr txBox="1"/>
+          <p:nvPr/>
+        </p:nvSpPr>
+        <p:spPr>
+          <a:xfrm>
+            <a:off x="411480" y="1051560"/>
+            <a:ext cx="4937760" cy="3726179"/>
+          </a:xfrm>
+          <a:prstGeom prst="rect">
+            <a:avLst/>
+          </a:prstGeom>
+          <a:noFill/>
+        </p:spPr>
+        <p:txBody>
+          <a:bodyPr wrap="square" lIns="0" tIns="0" rIns="0">
+            <a:spAutoFit/>
+          </a:bodyPr>
+          <a:lstStyle/>
+          <a:p>
+            <a:pPr>
+              <a:spcAft>
+                <a:spcPts val="1000"/>
+              </a:spcAft>
+            </a:pPr>
+            <a:r>
+              <a:rPr sz="1350">
+                <a:solidFill>
+                  <a:srgbClr val="FFFFFF"/>
+                </a:solidFill>
+                <a:latin typeface="Montserrat"/>
+              </a:rPr>
+              <a:t>Brands are not spread evenly. Each store carries its own mix, and most of the grid is zero.</a:t>
+            </a:r>
+          </a:p>
+        </p:txBody>
+      </p:sp>
+      <p:sp>
+        <p:nvSpPr>
+          <p:cNvPr id="5" name="TextBox 4"/>
+          <p:cNvSpPr txBox="1"/>
+          <p:nvPr/>
+        </p:nvSpPr>
+        <p:spPr>
+          <a:xfrm>
+            <a:off x="411480" y="1828800"/>
+            <a:ext cx="4937760" cy="2948940"/>
+          </a:xfrm>
+          <a:prstGeom prst="rect">
+            <a:avLst/>
+          </a:prstGeom>
+          <a:noFill/>
+        </p:spPr>
+        <p:txBody>
+          <a:bodyPr wrap="square" lIns="0" tIns="0" rIns="0">
+            <a:spAutoFit/>
+          </a:bodyPr>
+          <a:lstStyle/>
+          <a:p>
+            <a:pPr>
+              <a:spcAft>
+                <a:spcPts val="1100"/>
+              </a:spcAft>
+            </a:pPr>
+            <a:r>
+              <a:rPr sz="1300">
+                <a:solidFill>
+                  <a:srgbClr val="FFFFFF"/>
+                </a:solidFill>
+                <a:latin typeface="Montserrat"/>
+              </a:rPr>
+              <a:t>Merrell Foot: 2,793 units in Outlet Loures, none in Loja Colombo.</a:t>
+            </a:r>
+          </a:p>
+          <a:p>
+            <a:pPr>
+              <a:spcAft>
+                <a:spcPts val="1100"/>
+              </a:spcAft>
+            </a:pPr>
+            <a:r>
+              <a:rPr sz="1300">
+                <a:solidFill>
+                  <a:srgbClr val="FFFFFF"/>
+                </a:solidFill>
+                <a:latin typeface="Montserrat"/>
+              </a:rPr>
+              <a:t>Havaianas exists only in Cascais and Gaia.</a:t>
+            </a:r>
+          </a:p>
+          <a:p>
+            <a:pPr>
+              <a:spcAft>
+                <a:spcPts val="1100"/>
+              </a:spcAft>
+            </a:pPr>
+            <a:r>
+              <a:rPr sz="1300">
+                <a:solidFill>
+                  <a:srgbClr val="FFFFFF"/>
+                </a:solidFill>
+                <a:latin typeface="Montserrat"/>
+              </a:rPr>
+              <a:t>Fila sits almost entirely in Outlet Almada.</a:t>
+            </a:r>
+          </a:p>
+        </p:txBody>
+      </p:sp>
+      <p:sp>
+        <p:nvSpPr>
+          <p:cNvPr id="6" name="TextBox 5"/>
+          <p:cNvSpPr txBox="1"/>
+          <p:nvPr/>
+        </p:nvSpPr>
+        <p:spPr>
+          <a:xfrm>
+            <a:off x="411480" y="3291840"/>
+            <a:ext cx="4937760" cy="1485900"/>
+          </a:xfrm>
+          <a:prstGeom prst="rect">
+            <a:avLst/>
+          </a:prstGeom>
+          <a:noFill/>
+        </p:spPr>
+        <p:txBody>
+          <a:bodyPr wrap="square" lIns="0" tIns="0" rIns="0">
+            <a:spAutoFit/>
+          </a:bodyPr>
+          <a:lstStyle/>
+          <a:p>
+            <a:pPr>
+              <a:spcAft>
+                <a:spcPts val="800"/>
+              </a:spcAft>
+            </a:pPr>
+            <a:r>
+              <a:rPr sz="1300">
+                <a:solidFill>
+                  <a:srgbClr val="82C7A5"/>
+                </a:solidFill>
+                <a:latin typeface="Montserrat"/>
+              </a:rPr>
+              <a:t>This is why replenishment only looks at references a store already carries: sending a brand a store does not sell is not replenishment.</a:t>
+            </a:r>
+          </a:p>
+        </p:txBody>
+      </p:sp>
+    </p:spTree>
+  </p:cSld>
+  <p:clrMapOvr>
+    <a:masterClrMapping/>
+  </p:clrMapOvr>
+</p:sld>
+</file>
+
+<file path=ppt/slides/slide8.xml><?xml version="1.0" encoding="utf-8"?>
+<p:sld xmlns:a="http://schemas.openxmlformats.org/drawingml/2006/main" xmlns:r="http://schemas.openxmlformats.org/officeDocument/2006/relationships" xmlns:p="http://schemas.openxmlformats.org/presentationml/2006/main">
+  <p:cSld>
+    <p:spTree>
+      <p:nvGrpSpPr>
+        <p:cNvPr id="1" name=""/>
+        <p:cNvGrpSpPr/>
+        <p:nvPr/>
+      </p:nvGrpSpPr>
+      <p:grpSpPr>
+        <a:xfrm>
+          <a:off x="0" y="0"/>
+          <a:ext cx="0" cy="0"/>
+          <a:chOff x="0" y="0"/>
+          <a:chExt cx="0" cy="0"/>
+        </a:xfrm>
+      </p:grpSpPr>
       <p:sp>
         <p:nvSpPr>
           <p:cNvPr id="2" name="Title 1"/>
@@ -12490,7 +14813,7 @@
           <a:noFill/>
         </p:spPr>
         <p:txBody>
-          <a:bodyPr wrap="square" lIns="0" rIns="0" tIns="0">
+          <a:bodyPr wrap="square" lIns="0" tIns="0" rIns="0">
             <a:spAutoFit/>
           </a:bodyPr>
           <a:lstStyle/>
@@ -12555,6 +14878,7 @@
           <a:lstStyle/>
           <a:p>
             <a:pPr algn="ctr"/>
+            <a:endParaRPr/>
           </a:p>
         </p:txBody>
       </p:sp>
@@ -12575,7 +14899,7 @@
           <a:noFill/>
         </p:spPr>
         <p:txBody>
-          <a:bodyPr wrap="square" lIns="0" rIns="0" tIns="0" bIns="0">
+          <a:bodyPr wrap="square" lIns="0" tIns="0" rIns="0" bIns="0">
             <a:spAutoFit/>
           </a:bodyPr>
           <a:lstStyle/>
@@ -12694,7 +15018,7 @@
           <a:noFill/>
         </p:spPr>
         <p:txBody>
-          <a:bodyPr wrap="square" lIns="0" rIns="0" tIns="0">
+          <a:bodyPr wrap="square" lIns="0" tIns="0" rIns="0">
             <a:spAutoFit/>
           </a:bodyPr>
           <a:lstStyle/>
@@ -12758,8 +15082,8 @@
 </p:sld>
 </file>
 
-<file path=ppt/slides/slide7.xml><?xml version="1.0" encoding="utf-8"?>
-<p:sld xmlns:a="http://schemas.openxmlformats.org/drawingml/2006/main" xmlns:p="http://schemas.openxmlformats.org/presentationml/2006/main" xmlns:r="http://schemas.openxmlformats.org/officeDocument/2006/relationships">
+<file path=ppt/slides/slide9.xml><?xml version="1.0" encoding="utf-8"?>
+<p:sld xmlns:a="http://schemas.openxmlformats.org/drawingml/2006/main" xmlns:r="http://schemas.openxmlformats.org/officeDocument/2006/relationships" xmlns:p="http://schemas.openxmlformats.org/presentationml/2006/main">
   <p:cSld>
     <p:spTree>
       <p:nvGrpSpPr>
@@ -12767,7 +15091,14 @@
         <p:cNvGrpSpPr/>
         <p:nvPr/>
       </p:nvGrpSpPr>
-      <p:grpSpPr/>
+      <p:grpSpPr>
+        <a:xfrm>
+          <a:off x="0" y="0"/>
+          <a:ext cx="0" cy="0"/>
+          <a:chOff x="0" y="0"/>
+          <a:chExt cx="0" cy="0"/>
+        </a:xfrm>
+      </p:grpSpPr>
       <p:sp>
         <p:nvSpPr>
           <p:cNvPr id="2" name="Title 1"/>
@@ -12791,682 +15122,6 @@
                 <a:latin typeface="Montserrat"/>
               </a:rPr>
               <a:t>How it works</a:t>
-            </a:r>
-          </a:p>
-        </p:txBody>
-      </p:sp>
-    </p:spTree>
-  </p:cSld>
-  <p:clrMapOvr>
-    <a:masterClrMapping/>
-  </p:clrMapOvr>
-</p:sld>
-</file>
-
-<file path=ppt/slides/slide8.xml><?xml version="1.0" encoding="utf-8"?>
-<p:sld xmlns:a="http://schemas.openxmlformats.org/drawingml/2006/main" xmlns:p="http://schemas.openxmlformats.org/presentationml/2006/main" xmlns:r="http://schemas.openxmlformats.org/officeDocument/2006/relationships">
-  <p:cSld>
-    <p:spTree>
-      <p:nvGrpSpPr>
-        <p:cNvPr id="1" name=""/>
-        <p:cNvGrpSpPr/>
-        <p:nvPr/>
-      </p:nvGrpSpPr>
-      <p:grpSpPr/>
-      <p:sp>
-        <p:nvSpPr>
-          <p:cNvPr id="2" name="Title 1"/>
-          <p:cNvSpPr>
-            <a:spLocks noGrp="1"/>
-          </p:cNvSpPr>
-          <p:nvPr>
-            <p:ph type="title"/>
-          </p:nvPr>
-        </p:nvSpPr>
-        <p:spPr/>
-        <p:txBody>
-          <a:bodyPr/>
-          <a:lstStyle/>
-          <a:p>
-            <a:r>
-              <a:rPr sz="2800" b="1">
-                <a:solidFill>
-                  <a:srgbClr val="FFFFFF"/>
-                </a:solidFill>
-                <a:latin typeface="Montserrat"/>
-              </a:rPr>
-              <a:t>Architecture</a:t>
-            </a:r>
-          </a:p>
-        </p:txBody>
-      </p:sp>
-      <p:sp>
-        <p:nvSpPr>
-          <p:cNvPr id="3" name="TextBox 2"/>
-          <p:cNvSpPr txBox="1"/>
-          <p:nvPr/>
-        </p:nvSpPr>
-        <p:spPr>
-          <a:xfrm>
-            <a:off x="411480" y="1005840"/>
-            <a:ext cx="8321040" cy="3771900"/>
-          </a:xfrm>
-          <a:prstGeom prst="rect">
-            <a:avLst/>
-          </a:prstGeom>
-          <a:noFill/>
-        </p:spPr>
-        <p:txBody>
-          <a:bodyPr wrap="square" lIns="0" rIns="0" tIns="0">
-            <a:spAutoFit/>
-          </a:bodyPr>
-          <a:lstStyle/>
-          <a:p>
-            <a:pPr>
-              <a:spcAft>
-                <a:spcPts val="800"/>
-              </a:spcAft>
-            </a:pPr>
-            <a:r>
-              <a:rPr sz="1400">
-                <a:solidFill>
-                  <a:srgbClr val="FFFFFF"/>
-                </a:solidFill>
-                <a:latin typeface="Montserrat"/>
-              </a:rPr>
-              <a:t>The language model reads the question and decides which function to call. It never produces a stock figure itself.</a:t>
-            </a:r>
-          </a:p>
-        </p:txBody>
-      </p:sp>
-      <p:sp>
-        <p:nvSpPr>
-          <p:cNvPr id="4" name="Rounded Rectangle 3"/>
-          <p:cNvSpPr/>
-          <p:nvPr/>
-        </p:nvSpPr>
-        <p:spPr>
-          <a:xfrm>
-            <a:off x="411480" y="1737360"/>
-            <a:ext cx="8321040" cy="1458468"/>
-          </a:xfrm>
-          <a:prstGeom prst="roundRect">
-            <a:avLst>
-              <a:gd name="adj" fmla="val 4000"/>
-            </a:avLst>
-          </a:prstGeom>
-          <a:solidFill>
-            <a:srgbClr val="121720"/>
-          </a:solidFill>
-          <a:ln>
-            <a:noFill/>
-          </a:ln>
-          <a:effectLst/>
-        </p:spPr>
-        <p:style>
-          <a:lnRef idx="1">
-            <a:schemeClr val="accent1"/>
-          </a:lnRef>
-          <a:fillRef idx="3">
-            <a:schemeClr val="accent1"/>
-          </a:fillRef>
-          <a:effectRef idx="2">
-            <a:schemeClr val="accent1"/>
-          </a:effectRef>
-          <a:fontRef idx="minor">
-            <a:schemeClr val="lt1"/>
-          </a:fontRef>
-        </p:style>
-        <p:txBody>
-          <a:bodyPr rtlCol="0" anchor="ctr"/>
-          <a:lstStyle/>
-          <a:p>
-            <a:pPr algn="ctr"/>
-          </a:p>
-        </p:txBody>
-      </p:sp>
-      <p:sp>
-        <p:nvSpPr>
-          <p:cNvPr id="5" name="TextBox 4"/>
-          <p:cNvSpPr txBox="1"/>
-          <p:nvPr/>
-        </p:nvSpPr>
-        <p:spPr>
-          <a:xfrm>
-            <a:off x="576072" y="1847088"/>
-            <a:ext cx="7991856" cy="1239012"/>
-          </a:xfrm>
-          <a:prstGeom prst="rect">
-            <a:avLst/>
-          </a:prstGeom>
-          <a:noFill/>
-        </p:spPr>
-        <p:txBody>
-          <a:bodyPr wrap="square" lIns="0" rIns="0" tIns="0" bIns="0">
-            <a:spAutoFit/>
-          </a:bodyPr>
-          <a:lstStyle/>
-          <a:p>
-            <a:pPr algn="l">
-              <a:spcAft>
-                <a:spcPts val="0"/>
-              </a:spcAft>
-            </a:pPr>
-            <a:r>
-              <a:rPr sz="1200">
-                <a:solidFill>
-                  <a:srgbClr val="D6DEE8"/>
-                </a:solidFill>
-                <a:latin typeface="Consolas"/>
-              </a:rPr>
-              <a:t>  user question</a:t>
-            </a:r>
-          </a:p>
-          <a:p>
-            <a:pPr algn="l">
-              <a:spcAft>
-                <a:spcPts val="0"/>
-              </a:spcAft>
-            </a:pPr>
-            <a:r>
-              <a:rPr sz="1200">
-                <a:solidFill>
-                  <a:srgbClr val="D6DEE8"/>
-                </a:solidFill>
-                <a:latin typeface="Consolas"/>
-              </a:rPr>
-              <a:t>        |</a:t>
-            </a:r>
-          </a:p>
-          <a:p>
-            <a:pPr algn="l">
-              <a:spcAft>
-                <a:spcPts val="0"/>
-              </a:spcAft>
-            </a:pPr>
-            <a:r>
-              <a:rPr sz="1200">
-                <a:solidFill>
-                  <a:srgbClr val="D6DEE8"/>
-                </a:solidFill>
-                <a:latin typeface="Consolas"/>
-              </a:rPr>
-              <a:t>        v</a:t>
-            </a:r>
-          </a:p>
-          <a:p>
-            <a:pPr algn="l">
-              <a:spcAft>
-                <a:spcPts val="0"/>
-              </a:spcAft>
-            </a:pPr>
-            <a:r>
-              <a:rPr sz="1200">
-                <a:solidFill>
-                  <a:srgbClr val="D6DEE8"/>
-                </a:solidFill>
-                <a:latin typeface="Consolas"/>
-              </a:rPr>
-              <a:t>  LLM  (routing only, no data)</a:t>
-            </a:r>
-          </a:p>
-          <a:p>
-            <a:pPr algn="l">
-              <a:spcAft>
-                <a:spcPts val="0"/>
-              </a:spcAft>
-            </a:pPr>
-            <a:r>
-              <a:rPr sz="1200">
-                <a:solidFill>
-                  <a:srgbClr val="D6DEE8"/>
-                </a:solidFill>
-                <a:latin typeface="Consolas"/>
-              </a:rPr>
-              <a:t>        |</a:t>
-            </a:r>
-          </a:p>
-          <a:p>
-            <a:pPr algn="l">
-              <a:spcAft>
-                <a:spcPts val="0"/>
-              </a:spcAft>
-            </a:pPr>
-            <a:r>
-              <a:rPr sz="1200">
-                <a:solidFill>
-                  <a:srgbClr val="D6DEE8"/>
-                </a:solidFill>
-                <a:latin typeface="Consolas"/>
-              </a:rPr>
-              <a:t>        v</a:t>
-            </a:r>
-          </a:p>
-          <a:p>
-            <a:pPr algn="l">
-              <a:spcAft>
-                <a:spcPts val="0"/>
-              </a:spcAft>
-            </a:pPr>
-            <a:r>
-              <a:rPr sz="1200">
-                <a:solidFill>
-                  <a:srgbClr val="D6DEE8"/>
-                </a:solidFill>
-                <a:latin typeface="Consolas"/>
-              </a:rPr>
-              <a:t>  Python query function  -&gt;  dataset  -&gt;  real numbers</a:t>
-            </a:r>
-          </a:p>
-        </p:txBody>
-      </p:sp>
-      <p:sp>
-        <p:nvSpPr>
-          <p:cNvPr id="6" name="TextBox 5"/>
-          <p:cNvSpPr txBox="1"/>
-          <p:nvPr/>
-        </p:nvSpPr>
-        <p:spPr>
-          <a:xfrm>
-            <a:off x="411480" y="3840480"/>
-            <a:ext cx="8321040" cy="937259"/>
-          </a:xfrm>
-          <a:prstGeom prst="rect">
-            <a:avLst/>
-          </a:prstGeom>
-          <a:noFill/>
-        </p:spPr>
-        <p:txBody>
-          <a:bodyPr wrap="square" lIns="0" rIns="0" tIns="0">
-            <a:spAutoFit/>
-          </a:bodyPr>
-          <a:lstStyle/>
-          <a:p>
-            <a:pPr>
-              <a:spcAft>
-                <a:spcPts val="1000"/>
-              </a:spcAft>
-            </a:pPr>
-            <a:r>
-              <a:rPr b="1" sz="1400">
-                <a:solidFill>
-                  <a:srgbClr val="82C7A5"/>
-                </a:solidFill>
-                <a:latin typeface="Montserrat"/>
-              </a:rPr>
-              <a:t>Every number on screen comes from pandas, not from the model.</a:t>
-            </a:r>
-            <a:r>
-              <a:rPr sz="1400">
-                <a:solidFill>
-                  <a:srgbClr val="FFFFFF"/>
-                </a:solidFill>
-                <a:latin typeface="Montserrat"/>
-              </a:rPr>
-              <a:t/>
-            </a:r>
-          </a:p>
-        </p:txBody>
-      </p:sp>
-    </p:spTree>
-  </p:cSld>
-  <p:clrMapOvr>
-    <a:masterClrMapping/>
-  </p:clrMapOvr>
-</p:sld>
-</file>
-
-<file path=ppt/slides/slide9.xml><?xml version="1.0" encoding="utf-8"?>
-<p:sld xmlns:a="http://schemas.openxmlformats.org/drawingml/2006/main" xmlns:p="http://schemas.openxmlformats.org/presentationml/2006/main" xmlns:r="http://schemas.openxmlformats.org/officeDocument/2006/relationships">
-  <p:cSld>
-    <p:spTree>
-      <p:nvGrpSpPr>
-        <p:cNvPr id="1" name=""/>
-        <p:cNvGrpSpPr/>
-        <p:nvPr/>
-      </p:nvGrpSpPr>
-      <p:grpSpPr/>
-      <p:sp>
-        <p:nvSpPr>
-          <p:cNvPr id="2" name="Title 1"/>
-          <p:cNvSpPr>
-            <a:spLocks noGrp="1"/>
-          </p:cNvSpPr>
-          <p:nvPr>
-            <p:ph type="title"/>
-          </p:nvPr>
-        </p:nvSpPr>
-        <p:spPr/>
-        <p:txBody>
-          <a:bodyPr/>
-          <a:lstStyle/>
-          <a:p>
-            <a:r>
-              <a:rPr sz="2800" b="1">
-                <a:solidFill>
-                  <a:srgbClr val="FFFFFF"/>
-                </a:solidFill>
-                <a:latin typeface="Montserrat"/>
-              </a:rPr>
-              <a:t>Function Calling</a:t>
-            </a:r>
-          </a:p>
-        </p:txBody>
-      </p:sp>
-      <p:sp>
-        <p:nvSpPr>
-          <p:cNvPr id="3" name="TextBox 2"/>
-          <p:cNvSpPr txBox="1"/>
-          <p:nvPr/>
-        </p:nvSpPr>
-        <p:spPr>
-          <a:xfrm>
-            <a:off x="411480" y="1005840"/>
-            <a:ext cx="8321040" cy="3771900"/>
-          </a:xfrm>
-          <a:prstGeom prst="rect">
-            <a:avLst/>
-          </a:prstGeom>
-          <a:noFill/>
-        </p:spPr>
-        <p:txBody>
-          <a:bodyPr wrap="square" lIns="0" rIns="0" tIns="0">
-            <a:spAutoFit/>
-          </a:bodyPr>
-          <a:lstStyle/>
-          <a:p>
-            <a:pPr>
-              <a:spcAft>
-                <a:spcPts val="800"/>
-              </a:spcAft>
-            </a:pPr>
-            <a:r>
-              <a:rPr sz="1350">
-                <a:solidFill>
-                  <a:srgbClr val="FFFFFF"/>
-                </a:solidFill>
-                <a:latin typeface="Montserrat"/>
-              </a:rPr>
-              <a:t>Each function is described to the model as a tool. The model picks one and fills in the arguments.</a:t>
-            </a:r>
-          </a:p>
-        </p:txBody>
-      </p:sp>
-      <p:sp>
-        <p:nvSpPr>
-          <p:cNvPr id="4" name="Rounded Rectangle 3"/>
-          <p:cNvSpPr/>
-          <p:nvPr/>
-        </p:nvSpPr>
-        <p:spPr>
-          <a:xfrm>
-            <a:off x="411480" y="1737360"/>
-            <a:ext cx="8321040" cy="2135124"/>
-          </a:xfrm>
-          <a:prstGeom prst="roundRect">
-            <a:avLst>
-              <a:gd name="adj" fmla="val 4000"/>
-            </a:avLst>
-          </a:prstGeom>
-          <a:solidFill>
-            <a:srgbClr val="121720"/>
-          </a:solidFill>
-          <a:ln>
-            <a:noFill/>
-          </a:ln>
-          <a:effectLst/>
-        </p:spPr>
-        <p:style>
-          <a:lnRef idx="1">
-            <a:schemeClr val="accent1"/>
-          </a:lnRef>
-          <a:fillRef idx="3">
-            <a:schemeClr val="accent1"/>
-          </a:fillRef>
-          <a:effectRef idx="2">
-            <a:schemeClr val="accent1"/>
-          </a:effectRef>
-          <a:fontRef idx="minor">
-            <a:schemeClr val="lt1"/>
-          </a:fontRef>
-        </p:style>
-        <p:txBody>
-          <a:bodyPr rtlCol="0" anchor="ctr"/>
-          <a:lstStyle/>
-          <a:p>
-            <a:pPr algn="ctr"/>
-          </a:p>
-        </p:txBody>
-      </p:sp>
-      <p:sp>
-        <p:nvSpPr>
-          <p:cNvPr id="5" name="TextBox 4"/>
-          <p:cNvSpPr txBox="1"/>
-          <p:nvPr/>
-        </p:nvSpPr>
-        <p:spPr>
-          <a:xfrm>
-            <a:off x="576072" y="1847088"/>
-            <a:ext cx="7991856" cy="1915667"/>
-          </a:xfrm>
-          <a:prstGeom prst="rect">
-            <a:avLst/>
-          </a:prstGeom>
-          <a:noFill/>
-        </p:spPr>
-        <p:txBody>
-          <a:bodyPr wrap="square" lIns="0" rIns="0" tIns="0" bIns="0">
-            <a:spAutoFit/>
-          </a:bodyPr>
-          <a:lstStyle/>
-          <a:p>
-            <a:pPr algn="l">
-              <a:spcAft>
-                <a:spcPts val="0"/>
-              </a:spcAft>
-            </a:pPr>
-            <a:r>
-              <a:rPr sz="1050">
-                <a:solidFill>
-                  <a:srgbClr val="D6DEE8"/>
-                </a:solidFill>
-                <a:latin typeface="Consolas"/>
-              </a:rPr>
-              <a:t>{</a:t>
-            </a:r>
-          </a:p>
-          <a:p>
-            <a:pPr algn="l">
-              <a:spcAft>
-                <a:spcPts val="0"/>
-              </a:spcAft>
-            </a:pPr>
-            <a:r>
-              <a:rPr sz="1050">
-                <a:solidFill>
-                  <a:srgbClr val="D6DEE8"/>
-                </a:solidFill>
-                <a:latin typeface="Consolas"/>
-              </a:rPr>
-              <a:t>    'name': 'find_replenishable_sizes',</a:t>
-            </a:r>
-          </a:p>
-          <a:p>
-            <a:pPr algn="l">
-              <a:spcAft>
-                <a:spcPts val="0"/>
-              </a:spcAft>
-            </a:pPr>
-            <a:r>
-              <a:rPr sz="1050">
-                <a:solidFill>
-                  <a:srgbClr val="D6DEE8"/>
-                </a:solidFill>
-                <a:latin typeface="Consolas"/>
-              </a:rPr>
-              <a:t>    'description': 'Find sizes the central warehouse has in stock but a store</a:t>
-            </a:r>
-          </a:p>
-          <a:p>
-            <a:pPr algn="l">
-              <a:spcAft>
-                <a:spcPts val="0"/>
-              </a:spcAft>
-            </a:pPr>
-            <a:r>
-              <a:rPr sz="1050">
-                <a:solidFill>
-                  <a:srgbClr val="D6DEE8"/>
-                </a:solidFill>
-                <a:latin typeface="Consolas"/>
-              </a:rPr>
-              <a:t>                    does not, for references the store already carries.',</a:t>
-            </a:r>
-          </a:p>
-          <a:p>
-            <a:pPr algn="l">
-              <a:spcAft>
-                <a:spcPts val="0"/>
-              </a:spcAft>
-            </a:pPr>
-            <a:r>
-              <a:rPr sz="1050">
-                <a:solidFill>
-                  <a:srgbClr val="D6DEE8"/>
-                </a:solidFill>
-                <a:latin typeface="Consolas"/>
-              </a:rPr>
-              <a:t>    'parameters': {</a:t>
-            </a:r>
-          </a:p>
-          <a:p>
-            <a:pPr algn="l">
-              <a:spcAft>
-                <a:spcPts val="0"/>
-              </a:spcAft>
-            </a:pPr>
-            <a:r>
-              <a:rPr sz="1050">
-                <a:solidFill>
-                  <a:srgbClr val="D6DEE8"/>
-                </a:solidFill>
-                <a:latin typeface="Consolas"/>
-              </a:rPr>
-              <a:t>        'store_input':     {'type': 'string'},   # required</a:t>
-            </a:r>
-          </a:p>
-          <a:p>
-            <a:pPr algn="l">
-              <a:spcAft>
-                <a:spcPts val="0"/>
-              </a:spcAft>
-            </a:pPr>
-            <a:r>
-              <a:rPr sz="1050">
-                <a:solidFill>
-                  <a:srgbClr val="D6DEE8"/>
-                </a:solidFill>
-                <a:latin typeface="Consolas"/>
-              </a:rPr>
-              <a:t>        'brand_input':     {'type': 'string'},   # optional</a:t>
-            </a:r>
-          </a:p>
-          <a:p>
-            <a:pPr algn="l">
-              <a:spcAft>
-                <a:spcPts val="0"/>
-              </a:spcAft>
-            </a:pPr>
-            <a:r>
-              <a:rPr sz="1050">
-                <a:solidFill>
-                  <a:srgbClr val="D6DEE8"/>
-                </a:solidFill>
-                <a:latin typeface="Consolas"/>
-              </a:rPr>
-              <a:t>        'reference_input': {'type': 'string'},   # optional</a:t>
-            </a:r>
-          </a:p>
-          <a:p>
-            <a:pPr algn="l">
-              <a:spcAft>
-                <a:spcPts val="0"/>
-              </a:spcAft>
-            </a:pPr>
-            <a:r>
-              <a:rPr sz="1050">
-                <a:solidFill>
-                  <a:srgbClr val="D6DEE8"/>
-                </a:solidFill>
-                <a:latin typeface="Consolas"/>
-              </a:rPr>
-              <a:t>        'units_per_size':  {'type': 'integer'},  # optional</a:t>
-            </a:r>
-          </a:p>
-          <a:p>
-            <a:pPr algn="l">
-              <a:spcAft>
-                <a:spcPts val="0"/>
-              </a:spcAft>
-            </a:pPr>
-            <a:r>
-              <a:rPr sz="1050">
-                <a:solidFill>
-                  <a:srgbClr val="D6DEE8"/>
-                </a:solidFill>
-                <a:latin typeface="Consolas"/>
-              </a:rPr>
-              <a:t>    },</a:t>
-            </a:r>
-          </a:p>
-          <a:p>
-            <a:pPr algn="l">
-              <a:spcAft>
-                <a:spcPts val="0"/>
-              </a:spcAft>
-            </a:pPr>
-            <a:r>
-              <a:rPr sz="1050">
-                <a:solidFill>
-                  <a:srgbClr val="D6DEE8"/>
-                </a:solidFill>
-                <a:latin typeface="Consolas"/>
-              </a:rPr>
-              <a:t>}</a:t>
-            </a:r>
-          </a:p>
-        </p:txBody>
-      </p:sp>
-      <p:sp>
-        <p:nvSpPr>
-          <p:cNvPr id="6" name="TextBox 5"/>
-          <p:cNvSpPr txBox="1"/>
-          <p:nvPr/>
-        </p:nvSpPr>
-        <p:spPr>
-          <a:xfrm>
-            <a:off x="411480" y="4114800"/>
-            <a:ext cx="8321040" cy="457200"/>
-          </a:xfrm>
-          <a:prstGeom prst="rect">
-            <a:avLst/>
-          </a:prstGeom>
-          <a:noFill/>
-        </p:spPr>
-        <p:txBody>
-          <a:bodyPr wrap="square" lIns="0" tIns="0">
-            <a:spAutoFit/>
-          </a:bodyPr>
-          <a:lstStyle/>
-          <a:p>
-            <a:r>
-              <a:rPr sz="1200" i="1">
-                <a:solidFill>
-                  <a:srgbClr val="B8C0CC"/>
-                </a:solidFill>
-                <a:latin typeface="Montserrat"/>
-              </a:rPr>
-              <a:t>"Which Nike sizes are missing in Loja Colombo?"  -&gt;  store_input='Loja Colombo', brand_input='Nike'</a:t>
             </a:r>
           </a:p>
         </p:txBody>
